--- a/week_08_graphs1/graphs1.pptx
+++ b/week_08_graphs1/graphs1.pptx
@@ -13,6 +13,8 @@
     <p:sldId id="261" r:id="rId12"/>
     <p:sldId id="262" r:id="rId13"/>
     <p:sldId id="263" r:id="rId14"/>
+    <p:sldId id="264" r:id="rId15"/>
+    <p:sldId id="265" r:id="rId16"/>
   </p:sldIdLst>
   <p:sldSz cx="12191695" cy="6858000" type="screen4x3"/>
   <p:notesSz cx="6858000" cy="9144000"/>
@@ -3489,6 +3491,545 @@
 </p:sld>
 </file>
 
+<file path=ppt/slides/slide10.xml><?xml version="1.0" encoding="utf-8"?>
+<p:sld xmlns:a="http://schemas.openxmlformats.org/drawingml/2006/main" xmlns:p="http://schemas.openxmlformats.org/presentationml/2006/main" xmlns:r="http://schemas.openxmlformats.org/officeDocument/2006/relationships">
+  <p:cSld>
+    <p:spTree>
+      <p:nvGrpSpPr>
+        <p:cNvPr id="1" name=""/>
+        <p:cNvGrpSpPr/>
+        <p:nvPr/>
+      </p:nvGrpSpPr>
+      <p:grpSpPr/>
+      <p:sp>
+        <p:nvSpPr>
+          <p:cNvPr id="2" name="Rectangle 1"/>
+          <p:cNvSpPr/>
+          <p:nvPr/>
+        </p:nvSpPr>
+        <p:spPr>
+          <a:xfrm>
+            <a:off x="0" y="0"/>
+            <a:ext cx="320040" cy="6858000"/>
+          </a:xfrm>
+          <a:prstGeom prst="rect">
+            <a:avLst/>
+          </a:prstGeom>
+          <a:solidFill>
+            <a:srgbClr val="0B2A4A"/>
+          </a:solidFill>
+          <a:ln>
+            <a:noFill/>
+          </a:ln>
+          <a:effectLst/>
+        </p:spPr>
+        <p:style>
+          <a:lnRef idx="1">
+            <a:schemeClr val="accent1"/>
+          </a:lnRef>
+          <a:fillRef idx="3">
+            <a:schemeClr val="accent1"/>
+          </a:fillRef>
+          <a:effectRef idx="2">
+            <a:schemeClr val="accent1"/>
+          </a:effectRef>
+          <a:fontRef idx="minor">
+            <a:schemeClr val="lt1"/>
+          </a:fontRef>
+        </p:style>
+        <p:txBody>
+          <a:bodyPr rtlCol="0" anchor="ctr"/>
+          <a:lstStyle/>
+          <a:p>
+            <a:pPr algn="ctr"/>
+          </a:p>
+        </p:txBody>
+      </p:sp>
+      <p:sp>
+        <p:nvSpPr>
+          <p:cNvPr id="3" name="Rectangle 2"/>
+          <p:cNvSpPr/>
+          <p:nvPr/>
+        </p:nvSpPr>
+        <p:spPr>
+          <a:xfrm>
+            <a:off x="320040" y="0"/>
+            <a:ext cx="11871655" cy="73152"/>
+          </a:xfrm>
+          <a:prstGeom prst="rect">
+            <a:avLst/>
+          </a:prstGeom>
+          <a:solidFill>
+            <a:srgbClr val="E0A81F"/>
+          </a:solidFill>
+          <a:ln>
+            <a:noFill/>
+          </a:ln>
+          <a:effectLst/>
+        </p:spPr>
+        <p:style>
+          <a:lnRef idx="1">
+            <a:schemeClr val="accent1"/>
+          </a:lnRef>
+          <a:fillRef idx="3">
+            <a:schemeClr val="accent1"/>
+          </a:fillRef>
+          <a:effectRef idx="2">
+            <a:schemeClr val="accent1"/>
+          </a:effectRef>
+          <a:fontRef idx="minor">
+            <a:schemeClr val="lt1"/>
+          </a:fontRef>
+        </p:style>
+        <p:txBody>
+          <a:bodyPr rtlCol="0" anchor="ctr"/>
+          <a:lstStyle/>
+          <a:p>
+            <a:pPr algn="ctr"/>
+          </a:p>
+        </p:txBody>
+      </p:sp>
+      <p:sp>
+        <p:nvSpPr>
+          <p:cNvPr id="4" name="TextBox 3"/>
+          <p:cNvSpPr txBox="1"/>
+          <p:nvPr/>
+        </p:nvSpPr>
+        <p:spPr>
+          <a:xfrm>
+            <a:off x="548640" y="164592"/>
+            <a:ext cx="10515600" cy="640080"/>
+          </a:xfrm>
+          <a:prstGeom prst="rect">
+            <a:avLst/>
+          </a:prstGeom>
+          <a:noFill/>
+        </p:spPr>
+        <p:txBody>
+          <a:bodyPr wrap="square" lIns="45720" rIns="45720" tIns="18288" bIns="18288" anchor="t">
+            <a:spAutoFit/>
+          </a:bodyPr>
+          <a:lstStyle/>
+          <a:p>
+            <a:pPr algn="l"/>
+            <a:r>
+              <a:rPr sz="3000" b="1" i="0">
+                <a:solidFill>
+                  <a:srgbClr val="0B2A4A"/>
+                </a:solidFill>
+                <a:latin typeface="Calibri"/>
+              </a:rPr>
+              <a:t>Summary</a:t>
+            </a:r>
+          </a:p>
+        </p:txBody>
+      </p:sp>
+      <p:sp>
+        <p:nvSpPr>
+          <p:cNvPr id="5" name="TextBox 4"/>
+          <p:cNvSpPr txBox="1"/>
+          <p:nvPr/>
+        </p:nvSpPr>
+        <p:spPr>
+          <a:xfrm>
+            <a:off x="548640" y="713232"/>
+            <a:ext cx="10515600" cy="411480"/>
+          </a:xfrm>
+          <a:prstGeom prst="rect">
+            <a:avLst/>
+          </a:prstGeom>
+          <a:noFill/>
+        </p:spPr>
+        <p:txBody>
+          <a:bodyPr wrap="square" lIns="45720" rIns="45720" tIns="18288" bIns="18288" anchor="t">
+            <a:spAutoFit/>
+          </a:bodyPr>
+          <a:lstStyle/>
+          <a:p>
+            <a:pPr algn="l"/>
+            <a:r>
+              <a:rPr sz="1500" b="0" i="1">
+                <a:solidFill>
+                  <a:srgbClr val="127A8A"/>
+                </a:solidFill>
+                <a:latin typeface="Calibri"/>
+              </a:rPr>
+              <a:t>Graphs open up the rest of Computer Science</a:t>
+            </a:r>
+          </a:p>
+        </p:txBody>
+      </p:sp>
+      <p:sp>
+        <p:nvSpPr>
+          <p:cNvPr id="6" name="Rectangle 5"/>
+          <p:cNvSpPr/>
+          <p:nvPr/>
+        </p:nvSpPr>
+        <p:spPr>
+          <a:xfrm>
+            <a:off x="548640" y="1115568"/>
+            <a:ext cx="1828800" cy="36576"/>
+          </a:xfrm>
+          <a:prstGeom prst="rect">
+            <a:avLst/>
+          </a:prstGeom>
+          <a:solidFill>
+            <a:srgbClr val="E0A81F"/>
+          </a:solidFill>
+          <a:ln>
+            <a:noFill/>
+          </a:ln>
+          <a:effectLst/>
+        </p:spPr>
+        <p:style>
+          <a:lnRef idx="1">
+            <a:schemeClr val="accent1"/>
+          </a:lnRef>
+          <a:fillRef idx="3">
+            <a:schemeClr val="accent1"/>
+          </a:fillRef>
+          <a:effectRef idx="2">
+            <a:schemeClr val="accent1"/>
+          </a:effectRef>
+          <a:fontRef idx="minor">
+            <a:schemeClr val="lt1"/>
+          </a:fontRef>
+        </p:style>
+        <p:txBody>
+          <a:bodyPr rtlCol="0" anchor="ctr"/>
+          <a:lstStyle/>
+          <a:p>
+            <a:pPr algn="ctr"/>
+          </a:p>
+        </p:txBody>
+      </p:sp>
+      <p:sp>
+        <p:nvSpPr>
+          <p:cNvPr id="7" name="TextBox 6"/>
+          <p:cNvSpPr txBox="1"/>
+          <p:nvPr/>
+        </p:nvSpPr>
+        <p:spPr>
+          <a:xfrm>
+            <a:off x="548640" y="6446520"/>
+            <a:ext cx="7315200" cy="274320"/>
+          </a:xfrm>
+          <a:prstGeom prst="rect">
+            <a:avLst/>
+          </a:prstGeom>
+          <a:noFill/>
+        </p:spPr>
+        <p:txBody>
+          <a:bodyPr wrap="square" lIns="45720" rIns="45720" tIns="18288" bIns="18288" anchor="t">
+            <a:spAutoFit/>
+          </a:bodyPr>
+          <a:lstStyle/>
+          <a:p>
+            <a:pPr algn="l"/>
+            <a:r>
+              <a:rPr sz="1000" b="0" i="1">
+                <a:solidFill>
+                  <a:srgbClr val="333D4A"/>
+                </a:solidFill>
+                <a:latin typeface="Calibri"/>
+              </a:rPr>
+              <a:t>Data Structures &amp; Algorithms · Week 08 · Graphs I</a:t>
+            </a:r>
+          </a:p>
+        </p:txBody>
+      </p:sp>
+      <p:sp>
+        <p:nvSpPr>
+          <p:cNvPr id="8" name="TextBox 7"/>
+          <p:cNvSpPr txBox="1"/>
+          <p:nvPr/>
+        </p:nvSpPr>
+        <p:spPr>
+          <a:xfrm>
+            <a:off x="10728655" y="6446520"/>
+            <a:ext cx="1097280" cy="274320"/>
+          </a:xfrm>
+          <a:prstGeom prst="rect">
+            <a:avLst/>
+          </a:prstGeom>
+          <a:noFill/>
+        </p:spPr>
+        <p:txBody>
+          <a:bodyPr wrap="square" lIns="45720" rIns="45720" tIns="18288" bIns="18288" anchor="t">
+            <a:spAutoFit/>
+          </a:bodyPr>
+          <a:lstStyle/>
+          <a:p>
+            <a:pPr algn="r"/>
+            <a:r>
+              <a:rPr sz="1000" b="0" i="0">
+                <a:solidFill>
+                  <a:srgbClr val="333D4A"/>
+                </a:solidFill>
+                <a:latin typeface="Calibri"/>
+              </a:rPr>
+              <a:t>Slide 9 / 9</a:t>
+            </a:r>
+          </a:p>
+        </p:txBody>
+      </p:sp>
+      <p:sp>
+        <p:nvSpPr>
+          <p:cNvPr id="9" name="TextBox 8"/>
+          <p:cNvSpPr txBox="1"/>
+          <p:nvPr/>
+        </p:nvSpPr>
+        <p:spPr>
+          <a:xfrm>
+            <a:off x="822960" y="1371600"/>
+            <a:ext cx="10515600" cy="914400"/>
+          </a:xfrm>
+          <a:prstGeom prst="rect">
+            <a:avLst/>
+          </a:prstGeom>
+          <a:noFill/>
+        </p:spPr>
+        <p:txBody>
+          <a:bodyPr wrap="square" lIns="45720" rIns="45720" tIns="18288" bIns="18288" anchor="t">
+            <a:spAutoFit/>
+          </a:bodyPr>
+          <a:lstStyle/>
+          <a:p>
+            <a:pPr algn="l"/>
+            <a:r>
+              <a:rPr sz="1800" b="1" i="0">
+                <a:solidFill>
+                  <a:srgbClr val="0B2A4A"/>
+                </a:solidFill>
+                <a:latin typeface="Calibri"/>
+              </a:rPr>
+              <a:t>Graphs are the most versatile data structure. Mastering BFS and DFS is mandatory for complex problem solving.</a:t>
+            </a:r>
+          </a:p>
+        </p:txBody>
+      </p:sp>
+      <p:sp>
+        <p:nvSpPr>
+          <p:cNvPr id="10" name="TextBox 9"/>
+          <p:cNvSpPr txBox="1"/>
+          <p:nvPr/>
+        </p:nvSpPr>
+        <p:spPr>
+          <a:xfrm>
+            <a:off x="822960" y="2286000"/>
+            <a:ext cx="10515600" cy="2743200"/>
+          </a:xfrm>
+          <a:prstGeom prst="rect">
+            <a:avLst/>
+          </a:prstGeom>
+          <a:noFill/>
+        </p:spPr>
+        <p:txBody>
+          <a:bodyPr wrap="square" lIns="45720" rIns="45720">
+            <a:spAutoFit/>
+          </a:bodyPr>
+          <a:lstStyle/>
+          <a:p>
+            <a:pPr algn="l">
+              <a:lnSpc>
+                <a:spcPct val="140000"/>
+              </a:lnSpc>
+              <a:spcAft>
+                <a:spcPts val="400"/>
+              </a:spcAft>
+            </a:pPr>
+            <a:r>
+              <a:rPr sz="1600" b="1">
+                <a:solidFill>
+                  <a:srgbClr val="127A8A"/>
+                </a:solidFill>
+                <a:latin typeface="Calibri"/>
+              </a:rPr>
+              <a:t>▸  </a:t>
+            </a:r>
+            <a:r>
+              <a:rPr sz="1600">
+                <a:solidFill>
+                  <a:srgbClr val="333D4A"/>
+                </a:solidFill>
+                <a:latin typeface="Calibri"/>
+              </a:rPr>
+              <a:t>Use Adjacency Lists almost always, unless the graph is extremely dense.</a:t>
+            </a:r>
+          </a:p>
+          <a:p>
+            <a:pPr algn="l">
+              <a:lnSpc>
+                <a:spcPct val="140000"/>
+              </a:lnSpc>
+              <a:spcAft>
+                <a:spcPts val="400"/>
+              </a:spcAft>
+            </a:pPr>
+            <a:r>
+              <a:rPr sz="1600" b="1">
+                <a:solidFill>
+                  <a:srgbClr val="127A8A"/>
+                </a:solidFill>
+                <a:latin typeface="Calibri"/>
+              </a:rPr>
+              <a:t>▸  </a:t>
+            </a:r>
+            <a:r>
+              <a:rPr sz="1600">
+                <a:solidFill>
+                  <a:srgbClr val="333D4A"/>
+                </a:solidFill>
+                <a:latin typeface="Calibri"/>
+              </a:rPr>
+              <a:t>Need the Shortest Path in an unweighted graph? Use BFS.</a:t>
+            </a:r>
+          </a:p>
+          <a:p>
+            <a:pPr algn="l">
+              <a:lnSpc>
+                <a:spcPct val="140000"/>
+              </a:lnSpc>
+              <a:spcAft>
+                <a:spcPts val="400"/>
+              </a:spcAft>
+            </a:pPr>
+            <a:r>
+              <a:rPr sz="1600" b="1">
+                <a:solidFill>
+                  <a:srgbClr val="127A8A"/>
+                </a:solidFill>
+                <a:latin typeface="Calibri"/>
+              </a:rPr>
+              <a:t>▸  </a:t>
+            </a:r>
+            <a:r>
+              <a:rPr sz="1600">
+                <a:solidFill>
+                  <a:srgbClr val="333D4A"/>
+                </a:solidFill>
+                <a:latin typeface="Calibri"/>
+              </a:rPr>
+              <a:t>Need to check if a path exists, or find cycles? DFS is usually cleaner to implement recursively.</a:t>
+            </a:r>
+          </a:p>
+          <a:p>
+            <a:pPr algn="l">
+              <a:lnSpc>
+                <a:spcPct val="140000"/>
+              </a:lnSpc>
+              <a:spcAft>
+                <a:spcPts val="400"/>
+              </a:spcAft>
+            </a:pPr>
+            <a:r>
+              <a:rPr sz="1600" b="1">
+                <a:solidFill>
+                  <a:srgbClr val="127A8A"/>
+                </a:solidFill>
+                <a:latin typeface="Calibri"/>
+              </a:rPr>
+              <a:t>▸  </a:t>
+            </a:r>
+            <a:r>
+              <a:rPr sz="1600">
+                <a:solidFill>
+                  <a:srgbClr val="333D4A"/>
+                </a:solidFill>
+                <a:latin typeface="Calibri"/>
+              </a:rPr>
+              <a:t>Always remember to track Visited nodes, otherwise cycles will cause infinite loops (Stack Overflow or Memory Exceeded).</a:t>
+            </a:r>
+          </a:p>
+        </p:txBody>
+      </p:sp>
+      <p:sp>
+        <p:nvSpPr>
+          <p:cNvPr id="11" name="Rectangle 10"/>
+          <p:cNvSpPr/>
+          <p:nvPr/>
+        </p:nvSpPr>
+        <p:spPr>
+          <a:xfrm>
+            <a:off x="822960" y="5029200"/>
+            <a:ext cx="10515600" cy="914400"/>
+          </a:xfrm>
+          <a:prstGeom prst="rect">
+            <a:avLst/>
+          </a:prstGeom>
+          <a:solidFill>
+            <a:srgbClr val="127A8A"/>
+          </a:solidFill>
+          <a:ln>
+            <a:noFill/>
+          </a:ln>
+          <a:effectLst/>
+        </p:spPr>
+        <p:style>
+          <a:lnRef idx="1">
+            <a:schemeClr val="accent1"/>
+          </a:lnRef>
+          <a:fillRef idx="3">
+            <a:schemeClr val="accent1"/>
+          </a:fillRef>
+          <a:effectRef idx="2">
+            <a:schemeClr val="accent1"/>
+          </a:effectRef>
+          <a:fontRef idx="minor">
+            <a:schemeClr val="lt1"/>
+          </a:fontRef>
+        </p:style>
+        <p:txBody>
+          <a:bodyPr rtlCol="0" anchor="ctr"/>
+          <a:lstStyle/>
+          <a:p>
+            <a:pPr algn="ctr"/>
+          </a:p>
+        </p:txBody>
+      </p:sp>
+      <p:sp>
+        <p:nvSpPr>
+          <p:cNvPr id="12" name="TextBox 11"/>
+          <p:cNvSpPr txBox="1"/>
+          <p:nvPr/>
+        </p:nvSpPr>
+        <p:spPr>
+          <a:xfrm>
+            <a:off x="1005840" y="5120640"/>
+            <a:ext cx="10058400" cy="731520"/>
+          </a:xfrm>
+          <a:prstGeom prst="rect">
+            <a:avLst/>
+          </a:prstGeom>
+          <a:noFill/>
+        </p:spPr>
+        <p:txBody>
+          <a:bodyPr wrap="square" lIns="45720" rIns="45720" tIns="18288" bIns="18288" anchor="ctr">
+            <a:spAutoFit/>
+          </a:bodyPr>
+          <a:lstStyle/>
+          <a:p>
+            <a:pPr algn="ctr"/>
+            <a:r>
+              <a:rPr sz="1600" b="1" i="0">
+                <a:solidFill>
+                  <a:srgbClr val="FFFFFF"/>
+                </a:solidFill>
+                <a:latin typeface="Calibri"/>
+              </a:rPr>
+              <a:t>Next Week (Graphs II): We will introduce edge weights and explore Dijkstra's Algorithm for finding the shortest paths on real-world maps.</a:t>
+            </a:r>
+          </a:p>
+        </p:txBody>
+      </p:sp>
+    </p:spTree>
+  </p:cSld>
+  <p:clrMapOvr>
+    <a:masterClrMapping/>
+  </p:clrMapOvr>
+</p:sld>
+</file>
+
 <file path=ppt/slides/slide2.xml><?xml version="1.0" encoding="utf-8"?>
 <p:sld xmlns:a="http://schemas.openxmlformats.org/drawingml/2006/main" xmlns:p="http://schemas.openxmlformats.org/presentationml/2006/main" xmlns:r="http://schemas.openxmlformats.org/officeDocument/2006/relationships">
   <p:cSld>
@@ -3766,7 +4307,7 @@
                 </a:solidFill>
                 <a:latin typeface="Calibri"/>
               </a:rPr>
-              <a:t>Slide 1 / 7</a:t>
+              <a:t>Slide 1 / 9</a:t>
             </a:r>
           </a:p>
         </p:txBody>
@@ -3817,7 +4358,7 @@
                 </a:solidFill>
                 <a:latin typeface="Calibri"/>
               </a:rPr>
-              <a:t>1. Introduction to Graphs.  </a:t>
+              <a:t>1. What is a Graph?  </a:t>
             </a:r>
             <a:r>
               <a:rPr sz="1800">
@@ -3854,7 +4395,7 @@
                 </a:solidFill>
                 <a:latin typeface="Calibri"/>
               </a:rPr>
-              <a:t>2. Real-World Graph Applications.  </a:t>
+              <a:t>2. Graph Terminology.  </a:t>
             </a:r>
             <a:r>
               <a:rPr sz="1800">
@@ -3863,7 +4404,7 @@
                 </a:solidFill>
                 <a:latin typeface="Calibri"/>
               </a:rPr>
-              <a:t>Social networks, Maps, and the Web.</a:t>
+              <a:t>Vertices, Edges, Directed vs Undirected, Cycles.</a:t>
             </a:r>
           </a:p>
           <a:p>
@@ -3891,7 +4432,7 @@
                 </a:solidFill>
                 <a:latin typeface="Calibri"/>
               </a:rPr>
-              <a:t>3. Graph Terminology.  </a:t>
+              <a:t>3. Representing Graphs in Code.  </a:t>
             </a:r>
             <a:r>
               <a:rPr sz="1800">
@@ -3900,7 +4441,7 @@
                 </a:solidFill>
                 <a:latin typeface="Calibri"/>
               </a:rPr>
-              <a:t>Vertices, Edges, Directed vs Undirected, Cycles.</a:t>
+              <a:t>Adjacency Lists vs Adjacency Matrices.</a:t>
             </a:r>
           </a:p>
           <a:p>
@@ -3928,7 +4469,7 @@
                 </a:solidFill>
                 <a:latin typeface="Calibri"/>
               </a:rPr>
-              <a:t>4. Representing Graphs in Code.  </a:t>
+              <a:t>4. Breadth-First Search (BFS).  </a:t>
             </a:r>
             <a:r>
               <a:rPr sz="1800">
@@ -3937,7 +4478,7 @@
                 </a:solidFill>
                 <a:latin typeface="Calibri"/>
               </a:rPr>
-              <a:t>Adjacency Lists vs Adjacency Matrices.</a:t>
+              <a:t>Concept, pseudocode, and execution tracing.</a:t>
             </a:r>
           </a:p>
           <a:p>
@@ -3965,7 +4506,7 @@
                 </a:solidFill>
                 <a:latin typeface="Calibri"/>
               </a:rPr>
-              <a:t>5. Breadth-First Search (BFS).  </a:t>
+              <a:t>5. Depth-First Search (DFS).  </a:t>
             </a:r>
             <a:r>
               <a:rPr sz="1800">
@@ -3974,44 +4515,7 @@
                 </a:solidFill>
                 <a:latin typeface="Calibri"/>
               </a:rPr>
-              <a:t>Exploring level by level to find shortest paths.</a:t>
-            </a:r>
-          </a:p>
-          <a:p>
-            <a:pPr algn="l">
-              <a:lnSpc>
-                <a:spcPct val="132000"/>
-              </a:lnSpc>
-              <a:spcAft>
-                <a:spcPts val="400"/>
-              </a:spcAft>
-            </a:pPr>
-            <a:r>
-              <a:rPr sz="1800" b="1">
-                <a:solidFill>
-                  <a:srgbClr val="127A8A"/>
-                </a:solidFill>
-                <a:latin typeface="Calibri"/>
-              </a:rPr>
-              <a:t>▸  </a:t>
-            </a:r>
-            <a:r>
-              <a:rPr sz="1800" b="1">
-                <a:solidFill>
-                  <a:srgbClr val="0B2A4A"/>
-                </a:solidFill>
-                <a:latin typeface="Calibri"/>
-              </a:rPr>
-              <a:t>6. Depth-First Search (DFS).  </a:t>
-            </a:r>
-            <a:r>
-              <a:rPr sz="1800">
-                <a:solidFill>
-                  <a:srgbClr val="333D4A"/>
-                </a:solidFill>
-                <a:latin typeface="Calibri"/>
-              </a:rPr>
-              <a:t>Plunging deep to map connectivity and cycles.</a:t>
+              <a:t>Concept, recursion, and call stack simulation.</a:t>
             </a:r>
           </a:p>
         </p:txBody>
@@ -4301,7 +4805,7 @@
                 </a:solidFill>
                 <a:latin typeface="Calibri"/>
               </a:rPr>
-              <a:t>Slide 2 / 7</a:t>
+              <a:t>Slide 2 / 9</a:t>
             </a:r>
           </a:p>
         </p:txBody>
@@ -5325,7 +5829,7 @@
                 </a:solidFill>
                 <a:latin typeface="Calibri"/>
               </a:rPr>
-              <a:t>Slide 3 / 7</a:t>
+              <a:t>Slide 3 / 9</a:t>
             </a:r>
           </a:p>
         </p:txBody>
@@ -5897,7 +6401,7 @@
                 </a:solidFill>
                 <a:latin typeface="Calibri"/>
               </a:rPr>
-              <a:t>Slide 4 / 7</a:t>
+              <a:t>Slide 4 / 9</a:t>
             </a:r>
           </a:p>
         </p:txBody>
@@ -6123,7 +6627,7 @@
           <a:noFill/>
         </p:spPr>
         <p:txBody>
-          <a:bodyPr wrap="square">
+          <a:bodyPr wrap="square" lIns="45720" rIns="45720">
             <a:spAutoFit/>
           </a:bodyPr>
           <a:lstStyle/>
@@ -6430,7 +6934,7 @@
           <a:noFill/>
         </p:spPr>
         <p:txBody>
-          <a:bodyPr wrap="square">
+          <a:bodyPr wrap="square" lIns="45720" rIns="45720">
             <a:spAutoFit/>
           </a:bodyPr>
           <a:lstStyle/>
@@ -6652,7 +7156,7 @@
                 </a:solidFill>
                 <a:latin typeface="Calibri"/>
               </a:rPr>
-              <a:t>4. Breadth-First Search (BFS)</a:t>
+              <a:t>4. Breadth-First Search (BFS): Concept</a:t>
             </a:r>
           </a:p>
         </p:txBody>
@@ -6687,7 +7191,7 @@
                 </a:solidFill>
                 <a:latin typeface="Calibri"/>
               </a:rPr>
-              <a:t>Expanding like a ripple in a pond</a:t>
+              <a:t>Exploring level by level like a ripple in a pond</a:t>
             </a:r>
           </a:p>
         </p:txBody>
@@ -6801,7 +7305,7 @@
                 </a:solidFill>
                 <a:latin typeface="Calibri"/>
               </a:rPr>
-              <a:t>Slide 5 / 7</a:t>
+              <a:t>Slide 5 / 9</a:t>
             </a:r>
           </a:p>
         </p:txBody>
@@ -6815,7 +7319,7 @@
         <p:spPr>
           <a:xfrm>
             <a:off x="822960" y="1371600"/>
-            <a:ext cx="5486400" cy="2286000"/>
+            <a:ext cx="5486400" cy="4572000"/>
           </a:xfrm>
           <a:prstGeom prst="rect">
             <a:avLst/>
@@ -6823,350 +7327,200 @@
           <a:noFill/>
         </p:spPr>
         <p:txBody>
-          <a:bodyPr wrap="square" lIns="45720" rIns="45720" tIns="18288" bIns="18288" anchor="t">
+          <a:bodyPr wrap="square" lIns="45720" rIns="45720">
             <a:spAutoFit/>
           </a:bodyPr>
           <a:lstStyle/>
           <a:p>
-            <a:pPr algn="l"/>
-            <a:r>
-              <a:rPr sz="1500" b="0" i="0">
-                <a:solidFill>
-                  <a:srgbClr val="333D4A"/>
-                </a:solidFill>
-                <a:latin typeface="Calibri"/>
-              </a:rPr>
-              <a:t>Breadth-First Search explores all immediate neighbors first, before moving to neighbors of neighbors.
-Key Characteristics:
-• Data Structure: Uses a Queue (FIFO).
-• Unweighted Shortest Path: BFS is guaranteed to find the shortest path from start to target in an unweighted graph.
-• Must track 'Visited' nodes to prevent infinite loops.</a:t>
-            </a:r>
-          </a:p>
-        </p:txBody>
-      </p:sp>
-      <p:sp>
-        <p:nvSpPr>
-          <p:cNvPr id="10" name="Rectangle 9"/>
-          <p:cNvSpPr/>
-          <p:nvPr/>
-        </p:nvSpPr>
-        <p:spPr>
-          <a:xfrm>
-            <a:off x="822960" y="3657600"/>
-            <a:ext cx="5486400" cy="2286000"/>
-          </a:xfrm>
-          <a:prstGeom prst="rect">
-            <a:avLst/>
-          </a:prstGeom>
-          <a:solidFill>
-            <a:srgbClr val="1E1E2E"/>
-          </a:solidFill>
-          <a:ln>
-            <a:noFill/>
-          </a:ln>
-          <a:effectLst/>
-        </p:spPr>
-        <p:style>
-          <a:lnRef idx="1">
-            <a:schemeClr val="accent1"/>
-          </a:lnRef>
-          <a:fillRef idx="3">
-            <a:schemeClr val="accent1"/>
-          </a:fillRef>
-          <a:effectRef idx="2">
-            <a:schemeClr val="accent1"/>
-          </a:effectRef>
-          <a:fontRef idx="minor">
-            <a:schemeClr val="lt1"/>
-          </a:fontRef>
-        </p:style>
-        <p:txBody>
-          <a:bodyPr rtlCol="0" anchor="ctr"/>
-          <a:lstStyle/>
-          <a:p>
-            <a:pPr algn="ctr"/>
-          </a:p>
-        </p:txBody>
-      </p:sp>
-      <p:sp>
-        <p:nvSpPr>
-          <p:cNvPr id="11" name="Rectangle 10"/>
-          <p:cNvSpPr/>
-          <p:nvPr/>
-        </p:nvSpPr>
-        <p:spPr>
-          <a:xfrm>
-            <a:off x="822960" y="3657600"/>
-            <a:ext cx="73152" cy="2286000"/>
-          </a:xfrm>
-          <a:prstGeom prst="rect">
-            <a:avLst/>
-          </a:prstGeom>
-          <a:solidFill>
-            <a:srgbClr val="E0A81F"/>
-          </a:solidFill>
-          <a:ln>
-            <a:noFill/>
-          </a:ln>
-          <a:effectLst/>
-        </p:spPr>
-        <p:style>
-          <a:lnRef idx="1">
-            <a:schemeClr val="accent1"/>
-          </a:lnRef>
-          <a:fillRef idx="3">
-            <a:schemeClr val="accent1"/>
-          </a:fillRef>
-          <a:effectRef idx="2">
-            <a:schemeClr val="accent1"/>
-          </a:effectRef>
-          <a:fontRef idx="minor">
-            <a:schemeClr val="lt1"/>
-          </a:fontRef>
-        </p:style>
-        <p:txBody>
-          <a:bodyPr rtlCol="0" anchor="ctr"/>
-          <a:lstStyle/>
-          <a:p>
-            <a:pPr algn="ctr"/>
-          </a:p>
-        </p:txBody>
-      </p:sp>
-      <p:sp>
-        <p:nvSpPr>
-          <p:cNvPr id="12" name="TextBox 11"/>
-          <p:cNvSpPr txBox="1"/>
-          <p:nvPr/>
-        </p:nvSpPr>
-        <p:spPr>
-          <a:xfrm>
-            <a:off x="960120" y="3749040"/>
-            <a:ext cx="5257800" cy="2103120"/>
-          </a:xfrm>
-          <a:prstGeom prst="rect">
-            <a:avLst/>
-          </a:prstGeom>
-          <a:noFill/>
-        </p:spPr>
-        <p:txBody>
-          <a:bodyPr wrap="square">
-            <a:spAutoFit/>
-          </a:bodyPr>
-          <a:lstStyle/>
-          <a:p>
             <a:pPr algn="l">
               <a:lnSpc>
-                <a:spcPct val="115000"/>
+                <a:spcPct val="120000"/>
               </a:lnSpc>
+              <a:spcAft>
+                <a:spcPts val="400"/>
+              </a:spcAft>
             </a:pPr>
             <a:r>
-              <a:rPr sz="1200">
-                <a:solidFill>
-                  <a:srgbClr val="E6E6E6"/>
-                </a:solidFill>
-                <a:latin typeface="Consolas"/>
-              </a:rPr>
-              <a:t>from collections import deque</a:t>
+              <a:rPr sz="1500" b="1">
+                <a:solidFill>
+                  <a:srgbClr val="127A8A"/>
+                </a:solidFill>
+                <a:latin typeface="Calibri"/>
+              </a:rPr>
+              <a:t>▸  </a:t>
+            </a:r>
+            <a:r>
+              <a:rPr sz="1500" b="1">
+                <a:solidFill>
+                  <a:srgbClr val="0B2A4A"/>
+                </a:solidFill>
+                <a:latin typeface="Calibri"/>
+              </a:rPr>
+              <a:t>The Level-Order Approach: </a:t>
+            </a:r>
+            <a:r>
+              <a:rPr sz="1500">
+                <a:solidFill>
+                  <a:srgbClr val="333D4A"/>
+                </a:solidFill>
+                <a:latin typeface="Calibri"/>
+              </a:rPr>
+              <a:t>BFS starts at a source node and visits all of its direct neighbors first (Level 1), then all of their neighbors (Level 2), and so on.</a:t>
             </a:r>
           </a:p>
           <a:p>
             <a:pPr algn="l">
               <a:lnSpc>
-                <a:spcPct val="115000"/>
+                <a:spcPct val="120000"/>
               </a:lnSpc>
+              <a:spcAft>
+                <a:spcPts val="400"/>
+              </a:spcAft>
             </a:pPr>
             <a:r>
-              <a:rPr sz="1200">
-                <a:solidFill>
-                  <a:srgbClr val="E6E6E6"/>
-                </a:solidFill>
-                <a:latin typeface="Consolas"/>
-              </a:rPr>
-              <a:t> </a:t>
+              <a:rPr sz="1500" b="1">
+                <a:solidFill>
+                  <a:srgbClr val="127A8A"/>
+                </a:solidFill>
+                <a:latin typeface="Calibri"/>
+              </a:rPr>
+              <a:t>▸  </a:t>
+            </a:r>
+            <a:r>
+              <a:rPr sz="1500" b="1">
+                <a:solidFill>
+                  <a:srgbClr val="0B2A4A"/>
+                </a:solidFill>
+                <a:latin typeface="Calibri"/>
+              </a:rPr>
+              <a:t>FIFO Queue Mechanism: </a:t>
+            </a:r>
+            <a:r>
+              <a:rPr sz="1500">
+                <a:solidFill>
+                  <a:srgbClr val="333D4A"/>
+                </a:solidFill>
+                <a:latin typeface="Calibri"/>
+              </a:rPr>
+              <a:t>It uses a Queue to keep track of nodes to explore next. First In, First Out ensures we explore closer nodes before further ones.</a:t>
             </a:r>
           </a:p>
           <a:p>
             <a:pPr algn="l">
               <a:lnSpc>
-                <a:spcPct val="115000"/>
+                <a:spcPct val="120000"/>
               </a:lnSpc>
+              <a:spcAft>
+                <a:spcPts val="400"/>
+              </a:spcAft>
             </a:pPr>
             <a:r>
-              <a:rPr sz="1200">
-                <a:solidFill>
-                  <a:srgbClr val="E6E6E6"/>
-                </a:solidFill>
-                <a:latin typeface="Consolas"/>
-              </a:rPr>
-              <a:t>def bfs(graph, start):</a:t>
+              <a:rPr sz="1500" b="1">
+                <a:solidFill>
+                  <a:srgbClr val="127A8A"/>
+                </a:solidFill>
+                <a:latin typeface="Calibri"/>
+              </a:rPr>
+              <a:t>▸  </a:t>
+            </a:r>
+            <a:r>
+              <a:rPr sz="1500" b="1">
+                <a:solidFill>
+                  <a:srgbClr val="0B2A4A"/>
+                </a:solidFill>
+                <a:latin typeface="Calibri"/>
+              </a:rPr>
+              <a:t>Shortest Path Guarantee: </a:t>
+            </a:r>
+            <a:r>
+              <a:rPr sz="1500">
+                <a:solidFill>
+                  <a:srgbClr val="333D4A"/>
+                </a:solidFill>
+                <a:latin typeface="Calibri"/>
+              </a:rPr>
+              <a:t>In an unweighted graph, the first time BFS reaches a node, it has found the shortest path (minimum edge count) to that node.</a:t>
             </a:r>
           </a:p>
           <a:p>
             <a:pPr algn="l">
               <a:lnSpc>
-                <a:spcPct val="115000"/>
+                <a:spcPct val="120000"/>
               </a:lnSpc>
+              <a:spcAft>
+                <a:spcPts val="400"/>
+              </a:spcAft>
             </a:pPr>
             <a:r>
-              <a:rPr sz="1200">
-                <a:solidFill>
-                  <a:srgbClr val="E6E6E6"/>
-                </a:solidFill>
-                <a:latin typeface="Consolas"/>
-              </a:rPr>
-              <a:t>    visited = set([start])</a:t>
+              <a:rPr sz="1500" b="1">
+                <a:solidFill>
+                  <a:srgbClr val="127A8A"/>
+                </a:solidFill>
+                <a:latin typeface="Calibri"/>
+              </a:rPr>
+              <a:t>▸  </a:t>
+            </a:r>
+            <a:r>
+              <a:rPr sz="1500" b="1">
+                <a:solidFill>
+                  <a:srgbClr val="0B2A4A"/>
+                </a:solidFill>
+                <a:latin typeface="Calibri"/>
+              </a:rPr>
+              <a:t>Visited Set: </a:t>
+            </a:r>
+            <a:r>
+              <a:rPr sz="1500">
+                <a:solidFill>
+                  <a:srgbClr val="333D4A"/>
+                </a:solidFill>
+                <a:latin typeface="Calibri"/>
+              </a:rPr>
+              <a:t>Crucial to keep track of visited vertices to avoid infinite loops and re-processing nodes in cyclic graphs.</a:t>
             </a:r>
           </a:p>
           <a:p>
             <a:pPr algn="l">
               <a:lnSpc>
-                <a:spcPct val="115000"/>
+                <a:spcPct val="120000"/>
               </a:lnSpc>
+              <a:spcAft>
+                <a:spcPts val="400"/>
+              </a:spcAft>
             </a:pPr>
             <a:r>
-              <a:rPr sz="1200">
-                <a:solidFill>
-                  <a:srgbClr val="E6E6E6"/>
-                </a:solidFill>
-                <a:latin typeface="Consolas"/>
-              </a:rPr>
-              <a:t>    q = deque([start])</a:t>
-            </a:r>
-          </a:p>
-          <a:p>
-            <a:pPr algn="l">
-              <a:lnSpc>
-                <a:spcPct val="115000"/>
-              </a:lnSpc>
-            </a:pPr>
-            <a:r>
-              <a:rPr sz="1200">
-                <a:solidFill>
-                  <a:srgbClr val="E6E6E6"/>
-                </a:solidFill>
-                <a:latin typeface="Consolas"/>
-              </a:rPr>
-              <a:t> </a:t>
-            </a:r>
-          </a:p>
-          <a:p>
-            <a:pPr algn="l">
-              <a:lnSpc>
-                <a:spcPct val="115000"/>
-              </a:lnSpc>
-            </a:pPr>
-            <a:r>
-              <a:rPr sz="1200">
-                <a:solidFill>
-                  <a:srgbClr val="E6E6E6"/>
-                </a:solidFill>
-                <a:latin typeface="Consolas"/>
-              </a:rPr>
-              <a:t>    while q:</a:t>
-            </a:r>
-          </a:p>
-          <a:p>
-            <a:pPr algn="l">
-              <a:lnSpc>
-                <a:spcPct val="115000"/>
-              </a:lnSpc>
-            </a:pPr>
-            <a:r>
-              <a:rPr sz="1200">
-                <a:solidFill>
-                  <a:srgbClr val="E6E6E6"/>
-                </a:solidFill>
-                <a:latin typeface="Consolas"/>
-              </a:rPr>
-              <a:t>        node = q.popleft()</a:t>
-            </a:r>
-          </a:p>
-          <a:p>
-            <a:pPr algn="l">
-              <a:lnSpc>
-                <a:spcPct val="115000"/>
-              </a:lnSpc>
-            </a:pPr>
-            <a:r>
-              <a:rPr sz="1200">
-                <a:solidFill>
-                  <a:srgbClr val="E6E6E6"/>
-                </a:solidFill>
-                <a:latin typeface="Consolas"/>
-              </a:rPr>
-              <a:t>        print(node)</a:t>
-            </a:r>
-          </a:p>
-          <a:p>
-            <a:pPr algn="l">
-              <a:lnSpc>
-                <a:spcPct val="115000"/>
-              </a:lnSpc>
-            </a:pPr>
-            <a:r>
-              <a:rPr sz="1200">
-                <a:solidFill>
-                  <a:srgbClr val="E6E6E6"/>
-                </a:solidFill>
-                <a:latin typeface="Consolas"/>
-              </a:rPr>
-              <a:t>        for neighbor in graph[node]:</a:t>
-            </a:r>
-          </a:p>
-          <a:p>
-            <a:pPr algn="l">
-              <a:lnSpc>
-                <a:spcPct val="115000"/>
-              </a:lnSpc>
-            </a:pPr>
-            <a:r>
-              <a:rPr sz="1200">
-                <a:solidFill>
-                  <a:srgbClr val="E6E6E6"/>
-                </a:solidFill>
-                <a:latin typeface="Consolas"/>
-              </a:rPr>
-              <a:t>            if neighbor not in visited:</a:t>
-            </a:r>
-          </a:p>
-          <a:p>
-            <a:pPr algn="l">
-              <a:lnSpc>
-                <a:spcPct val="115000"/>
-              </a:lnSpc>
-            </a:pPr>
-            <a:r>
-              <a:rPr sz="1200">
-                <a:solidFill>
-                  <a:srgbClr val="E6E6E6"/>
-                </a:solidFill>
-                <a:latin typeface="Consolas"/>
-              </a:rPr>
-              <a:t>                visited.add(neighbor)</a:t>
-            </a:r>
-          </a:p>
-          <a:p>
-            <a:pPr algn="l">
-              <a:lnSpc>
-                <a:spcPct val="115000"/>
-              </a:lnSpc>
-            </a:pPr>
-            <a:r>
-              <a:rPr sz="1200">
-                <a:solidFill>
-                  <a:srgbClr val="E6E6E6"/>
-                </a:solidFill>
-                <a:latin typeface="Consolas"/>
-              </a:rPr>
-              <a:t>                q.append(neighbor)</a:t>
-            </a:r>
-          </a:p>
-        </p:txBody>
-      </p:sp>
-      <p:sp>
-        <p:nvSpPr>
-          <p:cNvPr id="13" name="Rectangle 12"/>
+              <a:rPr sz="1500" b="1">
+                <a:solidFill>
+                  <a:srgbClr val="127A8A"/>
+                </a:solidFill>
+                <a:latin typeface="Calibri"/>
+              </a:rPr>
+              <a:t>▸  </a:t>
+            </a:r>
+            <a:r>
+              <a:rPr sz="1500" b="1">
+                <a:solidFill>
+                  <a:srgbClr val="0B2A4A"/>
+                </a:solidFill>
+                <a:latin typeface="Calibri"/>
+              </a:rPr>
+              <a:t>Complexity: </a:t>
+            </a:r>
+            <a:r>
+              <a:rPr sz="1500">
+                <a:solidFill>
+                  <a:srgbClr val="333D4A"/>
+                </a:solidFill>
+                <a:latin typeface="Calibri"/>
+              </a:rPr>
+              <a:t>Time: O(V + E) as every vertex is visited and every edge is checked. Space: O(V) for the queue and visited set.</a:t>
+            </a:r>
+          </a:p>
+        </p:txBody>
+      </p:sp>
+      <p:sp>
+        <p:nvSpPr>
+          <p:cNvPr id="10" name="Rectangle 9"/>
           <p:cNvSpPr/>
           <p:nvPr/>
         </p:nvSpPr>
@@ -7208,6 +7562,111 @@
           </a:p>
         </p:txBody>
       </p:sp>
+      <p:sp>
+        <p:nvSpPr>
+          <p:cNvPr id="11" name="TextBox 10"/>
+          <p:cNvSpPr txBox="1"/>
+          <p:nvPr/>
+        </p:nvSpPr>
+        <p:spPr>
+          <a:xfrm>
+            <a:off x="6858000" y="1463040"/>
+            <a:ext cx="4572000" cy="457200"/>
+          </a:xfrm>
+          <a:prstGeom prst="rect">
+            <a:avLst/>
+          </a:prstGeom>
+          <a:noFill/>
+        </p:spPr>
+        <p:txBody>
+          <a:bodyPr wrap="square" lIns="45720" rIns="45720" tIns="18288" bIns="18288" anchor="t">
+            <a:spAutoFit/>
+          </a:bodyPr>
+          <a:lstStyle/>
+          <a:p>
+            <a:pPr algn="ctr"/>
+            <a:r>
+              <a:rPr sz="1600" b="1" i="0">
+                <a:solidFill>
+                  <a:srgbClr val="0B2A4A"/>
+                </a:solidFill>
+                <a:latin typeface="Calibri"/>
+              </a:rPr>
+              <a:t>BFS Layer Traversal Visual</a:t>
+            </a:r>
+          </a:p>
+        </p:txBody>
+      </p:sp>
+      <p:cxnSp>
+        <p:nvCxnSpPr>
+          <p:cNvPr id="12" name="Connector 11"/>
+          <p:cNvCxnSpPr/>
+          <p:nvPr/>
+        </p:nvCxnSpPr>
+        <p:spPr>
+          <a:xfrm flipH="1">
+            <a:off x="7772400" y="2103120"/>
+            <a:ext cx="1371600" cy="1188720"/>
+          </a:xfrm>
+          <a:prstGeom prst="line">
+            <a:avLst/>
+          </a:prstGeom>
+          <a:ln w="25400">
+            <a:solidFill>
+              <a:srgbClr val="127A8A"/>
+            </a:solidFill>
+          </a:ln>
+        </p:spPr>
+        <p:style>
+          <a:lnRef idx="2">
+            <a:schemeClr val="accent1"/>
+          </a:lnRef>
+          <a:fillRef idx="0">
+            <a:schemeClr val="accent1"/>
+          </a:fillRef>
+          <a:effectRef idx="1">
+            <a:schemeClr val="accent1"/>
+          </a:effectRef>
+          <a:fontRef idx="minor">
+            <a:schemeClr val="tx1"/>
+          </a:fontRef>
+        </p:style>
+      </p:cxnSp>
+      <p:cxnSp>
+        <p:nvCxnSpPr>
+          <p:cNvPr id="13" name="Connector 12"/>
+          <p:cNvCxnSpPr/>
+          <p:nvPr/>
+        </p:nvCxnSpPr>
+        <p:spPr>
+          <a:xfrm>
+            <a:off x="9144000" y="2103120"/>
+            <a:ext cx="1371600" cy="1188720"/>
+          </a:xfrm>
+          <a:prstGeom prst="line">
+            <a:avLst/>
+          </a:prstGeom>
+          <a:ln w="25400">
+            <a:solidFill>
+              <a:srgbClr val="127A8A"/>
+            </a:solidFill>
+          </a:ln>
+        </p:spPr>
+        <p:style>
+          <a:lnRef idx="2">
+            <a:schemeClr val="accent1"/>
+          </a:lnRef>
+          <a:fillRef idx="0">
+            <a:schemeClr val="accent1"/>
+          </a:fillRef>
+          <a:effectRef idx="1">
+            <a:schemeClr val="accent1"/>
+          </a:effectRef>
+          <a:fontRef idx="minor">
+            <a:schemeClr val="tx1"/>
+          </a:fontRef>
+        </p:style>
+      </p:cxnSp>
       <p:cxnSp>
         <p:nvCxnSpPr>
           <p:cNvPr id="14" name="Connector 13"/>
@@ -7215,9 +7674,9 @@
           <p:nvPr/>
         </p:nvCxnSpPr>
         <p:spPr>
-          <a:xfrm flipH="1">
-            <a:off x="7772400" y="2286000"/>
-            <a:ext cx="1371600" cy="1371600"/>
+          <a:xfrm>
+            <a:off x="7772400" y="3291840"/>
+            <a:ext cx="0" cy="1371600"/>
           </a:xfrm>
           <a:prstGeom prst="line">
             <a:avLst/>
@@ -7251,8 +7710,8 @@
         </p:nvCxnSpPr>
         <p:spPr>
           <a:xfrm>
-            <a:off x="9144000" y="2286000"/>
-            <a:ext cx="1371600" cy="1371600"/>
+            <a:off x="10515600" y="3291840"/>
+            <a:ext cx="0" cy="1371600"/>
           </a:xfrm>
           <a:prstGeom prst="line">
             <a:avLst/>
@@ -7278,85 +7737,258 @@
           </a:fontRef>
         </p:style>
       </p:cxnSp>
-      <p:cxnSp>
-        <p:nvCxnSpPr>
-          <p:cNvPr id="16" name="Connector 15"/>
-          <p:cNvCxnSpPr/>
-          <p:nvPr/>
-        </p:nvCxnSpPr>
-        <p:spPr>
-          <a:xfrm>
-            <a:off x="7772400" y="3657600"/>
-            <a:ext cx="0" cy="1371600"/>
-          </a:xfrm>
-          <a:prstGeom prst="line">
-            <a:avLst/>
-          </a:prstGeom>
+      <p:sp>
+        <p:nvSpPr>
+          <p:cNvPr id="16" name="Oval 15"/>
+          <p:cNvSpPr/>
+          <p:nvPr/>
+        </p:nvSpPr>
+        <p:spPr>
+          <a:xfrm>
+            <a:off x="8778240" y="1737360"/>
+            <a:ext cx="731520" cy="731520"/>
+          </a:xfrm>
+          <a:prstGeom prst="ellipse">
+            <a:avLst/>
+          </a:prstGeom>
+          <a:solidFill>
+            <a:srgbClr val="E0A81F"/>
+          </a:solidFill>
           <a:ln w="25400">
             <a:solidFill>
-              <a:srgbClr val="127A8A"/>
+              <a:srgbClr val="0B2A4A"/>
             </a:solidFill>
           </a:ln>
+          <a:effectLst/>
         </p:spPr>
         <p:style>
-          <a:lnRef idx="2">
+          <a:lnRef idx="1">
             <a:schemeClr val="accent1"/>
           </a:lnRef>
-          <a:fillRef idx="0">
+          <a:fillRef idx="3">
             <a:schemeClr val="accent1"/>
           </a:fillRef>
-          <a:effectRef idx="1">
+          <a:effectRef idx="2">
             <a:schemeClr val="accent1"/>
           </a:effectRef>
           <a:fontRef idx="minor">
-            <a:schemeClr val="tx1"/>
+            <a:schemeClr val="lt1"/>
           </a:fontRef>
         </p:style>
-      </p:cxnSp>
-      <p:cxnSp>
-        <p:nvCxnSpPr>
-          <p:cNvPr id="17" name="Connector 16"/>
-          <p:cNvCxnSpPr/>
-          <p:nvPr/>
-        </p:nvCxnSpPr>
-        <p:spPr>
-          <a:xfrm>
-            <a:off x="10515600" y="3657600"/>
-            <a:ext cx="0" cy="1371600"/>
-          </a:xfrm>
-          <a:prstGeom prst="line">
-            <a:avLst/>
-          </a:prstGeom>
+        <p:txBody>
+          <a:bodyPr rtlCol="0" anchor="ctr"/>
+          <a:lstStyle/>
+          <a:p>
+            <a:pPr algn="ctr"/>
+          </a:p>
+        </p:txBody>
+      </p:sp>
+      <p:sp>
+        <p:nvSpPr>
+          <p:cNvPr id="17" name="TextBox 16"/>
+          <p:cNvSpPr txBox="1"/>
+          <p:nvPr/>
+        </p:nvSpPr>
+        <p:spPr>
+          <a:xfrm>
+            <a:off x="8778240" y="1737360"/>
+            <a:ext cx="731520" cy="731520"/>
+          </a:xfrm>
+          <a:prstGeom prst="rect">
+            <a:avLst/>
+          </a:prstGeom>
+          <a:noFill/>
+        </p:spPr>
+        <p:txBody>
+          <a:bodyPr wrap="square" lIns="45720" rIns="45720" tIns="18288" bIns="18288" anchor="ctr">
+            <a:spAutoFit/>
+          </a:bodyPr>
+          <a:lstStyle/>
+          <a:p>
+            <a:pPr algn="ctr"/>
+            <a:r>
+              <a:rPr sz="1600" b="1" i="0">
+                <a:solidFill>
+                  <a:srgbClr val="0B2A4A"/>
+                </a:solidFill>
+                <a:latin typeface="Calibri"/>
+              </a:rPr>
+              <a:t>A</a:t>
+            </a:r>
+          </a:p>
+        </p:txBody>
+      </p:sp>
+      <p:sp>
+        <p:nvSpPr>
+          <p:cNvPr id="18" name="Oval 17"/>
+          <p:cNvSpPr/>
+          <p:nvPr/>
+        </p:nvSpPr>
+        <p:spPr>
+          <a:xfrm>
+            <a:off x="7406640" y="2926080"/>
+            <a:ext cx="731520" cy="731520"/>
+          </a:xfrm>
+          <a:prstGeom prst="ellipse">
+            <a:avLst/>
+          </a:prstGeom>
+          <a:solidFill>
+            <a:srgbClr val="127A8A"/>
+          </a:solidFill>
           <a:ln w="25400">
             <a:solidFill>
-              <a:srgbClr val="127A8A"/>
+              <a:srgbClr val="0B2A4A"/>
             </a:solidFill>
           </a:ln>
+          <a:effectLst/>
         </p:spPr>
         <p:style>
-          <a:lnRef idx="2">
+          <a:lnRef idx="1">
             <a:schemeClr val="accent1"/>
           </a:lnRef>
-          <a:fillRef idx="0">
+          <a:fillRef idx="3">
             <a:schemeClr val="accent1"/>
           </a:fillRef>
-          <a:effectRef idx="1">
+          <a:effectRef idx="2">
             <a:schemeClr val="accent1"/>
           </a:effectRef>
           <a:fontRef idx="minor">
-            <a:schemeClr val="tx1"/>
+            <a:schemeClr val="lt1"/>
           </a:fontRef>
         </p:style>
-      </p:cxnSp>
-      <p:sp>
-        <p:nvSpPr>
-          <p:cNvPr id="18" name="Oval 17"/>
+        <p:txBody>
+          <a:bodyPr rtlCol="0" anchor="ctr"/>
+          <a:lstStyle/>
+          <a:p>
+            <a:pPr algn="ctr"/>
+          </a:p>
+        </p:txBody>
+      </p:sp>
+      <p:sp>
+        <p:nvSpPr>
+          <p:cNvPr id="19" name="TextBox 18"/>
+          <p:cNvSpPr txBox="1"/>
+          <p:nvPr/>
+        </p:nvSpPr>
+        <p:spPr>
+          <a:xfrm>
+            <a:off x="7406640" y="2926080"/>
+            <a:ext cx="731520" cy="731520"/>
+          </a:xfrm>
+          <a:prstGeom prst="rect">
+            <a:avLst/>
+          </a:prstGeom>
+          <a:noFill/>
+        </p:spPr>
+        <p:txBody>
+          <a:bodyPr wrap="square" lIns="45720" rIns="45720" tIns="18288" bIns="18288" anchor="ctr">
+            <a:spAutoFit/>
+          </a:bodyPr>
+          <a:lstStyle/>
+          <a:p>
+            <a:pPr algn="ctr"/>
+            <a:r>
+              <a:rPr sz="1600" b="1" i="0">
+                <a:solidFill>
+                  <a:srgbClr val="0B2A4A"/>
+                </a:solidFill>
+                <a:latin typeface="Calibri"/>
+              </a:rPr>
+              <a:t>B</a:t>
+            </a:r>
+          </a:p>
+        </p:txBody>
+      </p:sp>
+      <p:sp>
+        <p:nvSpPr>
+          <p:cNvPr id="20" name="Oval 19"/>
           <p:cNvSpPr/>
           <p:nvPr/>
         </p:nvSpPr>
         <p:spPr>
           <a:xfrm>
-            <a:off x="8778240" y="1920240"/>
+            <a:off x="10149840" y="2926080"/>
+            <a:ext cx="731520" cy="731520"/>
+          </a:xfrm>
+          <a:prstGeom prst="ellipse">
+            <a:avLst/>
+          </a:prstGeom>
+          <a:solidFill>
+            <a:srgbClr val="127A8A"/>
+          </a:solidFill>
+          <a:ln w="25400">
+            <a:solidFill>
+              <a:srgbClr val="0B2A4A"/>
+            </a:solidFill>
+          </a:ln>
+          <a:effectLst/>
+        </p:spPr>
+        <p:style>
+          <a:lnRef idx="1">
+            <a:schemeClr val="accent1"/>
+          </a:lnRef>
+          <a:fillRef idx="3">
+            <a:schemeClr val="accent1"/>
+          </a:fillRef>
+          <a:effectRef idx="2">
+            <a:schemeClr val="accent1"/>
+          </a:effectRef>
+          <a:fontRef idx="minor">
+            <a:schemeClr val="lt1"/>
+          </a:fontRef>
+        </p:style>
+        <p:txBody>
+          <a:bodyPr rtlCol="0" anchor="ctr"/>
+          <a:lstStyle/>
+          <a:p>
+            <a:pPr algn="ctr"/>
+          </a:p>
+        </p:txBody>
+      </p:sp>
+      <p:sp>
+        <p:nvSpPr>
+          <p:cNvPr id="21" name="TextBox 20"/>
+          <p:cNvSpPr txBox="1"/>
+          <p:nvPr/>
+        </p:nvSpPr>
+        <p:spPr>
+          <a:xfrm>
+            <a:off x="10149840" y="2926080"/>
+            <a:ext cx="731520" cy="731520"/>
+          </a:xfrm>
+          <a:prstGeom prst="rect">
+            <a:avLst/>
+          </a:prstGeom>
+          <a:noFill/>
+        </p:spPr>
+        <p:txBody>
+          <a:bodyPr wrap="square" lIns="45720" rIns="45720" tIns="18288" bIns="18288" anchor="ctr">
+            <a:spAutoFit/>
+          </a:bodyPr>
+          <a:lstStyle/>
+          <a:p>
+            <a:pPr algn="ctr"/>
+            <a:r>
+              <a:rPr sz="1600" b="1" i="0">
+                <a:solidFill>
+                  <a:srgbClr val="0B2A4A"/>
+                </a:solidFill>
+                <a:latin typeface="Calibri"/>
+              </a:rPr>
+              <a:t>C</a:t>
+            </a:r>
+          </a:p>
+        </p:txBody>
+      </p:sp>
+      <p:sp>
+        <p:nvSpPr>
+          <p:cNvPr id="22" name="Oval 21"/>
+          <p:cNvSpPr/>
+          <p:nvPr/>
+        </p:nvSpPr>
+        <p:spPr>
+          <a:xfrm>
+            <a:off x="7406640" y="4297680"/>
             <a:ext cx="731520" cy="731520"/>
           </a:xfrm>
           <a:prstGeom prst="ellipse">
@@ -7396,13 +8028,13 @@
       </p:sp>
       <p:sp>
         <p:nvSpPr>
-          <p:cNvPr id="19" name="TextBox 18"/>
+          <p:cNvPr id="23" name="TextBox 22"/>
           <p:cNvSpPr txBox="1"/>
           <p:nvPr/>
         </p:nvSpPr>
         <p:spPr>
           <a:xfrm>
-            <a:off x="8778240" y="1920240"/>
+            <a:off x="7406640" y="4297680"/>
             <a:ext cx="731520" cy="731520"/>
           </a:xfrm>
           <a:prstGeom prst="rect">
@@ -7424,20 +8056,20 @@
                 </a:solidFill>
                 <a:latin typeface="Calibri"/>
               </a:rPr>
-              <a:t>A</a:t>
-            </a:r>
-          </a:p>
-        </p:txBody>
-      </p:sp>
-      <p:sp>
-        <p:nvSpPr>
-          <p:cNvPr id="20" name="Oval 19"/>
+              <a:t>D</a:t>
+            </a:r>
+          </a:p>
+        </p:txBody>
+      </p:sp>
+      <p:sp>
+        <p:nvSpPr>
+          <p:cNvPr id="24" name="Oval 23"/>
           <p:cNvSpPr/>
           <p:nvPr/>
         </p:nvSpPr>
         <p:spPr>
           <a:xfrm>
-            <a:off x="7406640" y="3291840"/>
+            <a:off x="10149840" y="4297680"/>
             <a:ext cx="731520" cy="731520"/>
           </a:xfrm>
           <a:prstGeom prst="ellipse">
@@ -7477,13 +8109,13 @@
       </p:sp>
       <p:sp>
         <p:nvSpPr>
-          <p:cNvPr id="21" name="TextBox 20"/>
+          <p:cNvPr id="25" name="TextBox 24"/>
           <p:cNvSpPr txBox="1"/>
           <p:nvPr/>
         </p:nvSpPr>
         <p:spPr>
           <a:xfrm>
-            <a:off x="7406640" y="3291840"/>
+            <a:off x="10149840" y="4297680"/>
             <a:ext cx="731520" cy="731520"/>
           </a:xfrm>
           <a:prstGeom prst="rect">
@@ -7505,264 +8137,21 @@
                 </a:solidFill>
                 <a:latin typeface="Calibri"/>
               </a:rPr>
-              <a:t>B</a:t>
-            </a:r>
-          </a:p>
-        </p:txBody>
-      </p:sp>
-      <p:sp>
-        <p:nvSpPr>
-          <p:cNvPr id="22" name="Oval 21"/>
-          <p:cNvSpPr/>
-          <p:nvPr/>
-        </p:nvSpPr>
-        <p:spPr>
-          <a:xfrm>
-            <a:off x="10149840" y="3291840"/>
-            <a:ext cx="731520" cy="731520"/>
-          </a:xfrm>
-          <a:prstGeom prst="ellipse">
-            <a:avLst/>
-          </a:prstGeom>
-          <a:solidFill>
-            <a:srgbClr val="FFFFFF"/>
-          </a:solidFill>
-          <a:ln w="25400">
-            <a:solidFill>
-              <a:srgbClr val="0B2A4A"/>
-            </a:solidFill>
-          </a:ln>
-          <a:effectLst/>
-        </p:spPr>
-        <p:style>
-          <a:lnRef idx="1">
-            <a:schemeClr val="accent1"/>
-          </a:lnRef>
-          <a:fillRef idx="3">
-            <a:schemeClr val="accent1"/>
-          </a:fillRef>
-          <a:effectRef idx="2">
-            <a:schemeClr val="accent1"/>
-          </a:effectRef>
-          <a:fontRef idx="minor">
-            <a:schemeClr val="lt1"/>
-          </a:fontRef>
-        </p:style>
-        <p:txBody>
-          <a:bodyPr rtlCol="0" anchor="ctr"/>
-          <a:lstStyle/>
-          <a:p>
-            <a:pPr algn="ctr"/>
-          </a:p>
-        </p:txBody>
-      </p:sp>
-      <p:sp>
-        <p:nvSpPr>
-          <p:cNvPr id="23" name="TextBox 22"/>
+              <a:t>E</a:t>
+            </a:r>
+          </a:p>
+        </p:txBody>
+      </p:sp>
+      <p:sp>
+        <p:nvSpPr>
+          <p:cNvPr id="26" name="TextBox 25"/>
           <p:cNvSpPr txBox="1"/>
           <p:nvPr/>
         </p:nvSpPr>
         <p:spPr>
           <a:xfrm>
-            <a:off x="10149840" y="3291840"/>
-            <a:ext cx="731520" cy="731520"/>
-          </a:xfrm>
-          <a:prstGeom prst="rect">
-            <a:avLst/>
-          </a:prstGeom>
-          <a:noFill/>
-        </p:spPr>
-        <p:txBody>
-          <a:bodyPr wrap="square" lIns="45720" rIns="45720" tIns="18288" bIns="18288" anchor="ctr">
-            <a:spAutoFit/>
-          </a:bodyPr>
-          <a:lstStyle/>
-          <a:p>
-            <a:pPr algn="ctr"/>
-            <a:r>
-              <a:rPr sz="1600" b="1" i="0">
-                <a:solidFill>
-                  <a:srgbClr val="0B2A4A"/>
-                </a:solidFill>
-                <a:latin typeface="Calibri"/>
-              </a:rPr>
-              <a:t>C</a:t>
-            </a:r>
-          </a:p>
-        </p:txBody>
-      </p:sp>
-      <p:sp>
-        <p:nvSpPr>
-          <p:cNvPr id="24" name="Oval 23"/>
-          <p:cNvSpPr/>
-          <p:nvPr/>
-        </p:nvSpPr>
-        <p:spPr>
-          <a:xfrm>
-            <a:off x="7406640" y="4663440"/>
-            <a:ext cx="731520" cy="731520"/>
-          </a:xfrm>
-          <a:prstGeom prst="ellipse">
-            <a:avLst/>
-          </a:prstGeom>
-          <a:solidFill>
-            <a:srgbClr val="FFFFFF"/>
-          </a:solidFill>
-          <a:ln w="25400">
-            <a:solidFill>
-              <a:srgbClr val="0B2A4A"/>
-            </a:solidFill>
-          </a:ln>
-          <a:effectLst/>
-        </p:spPr>
-        <p:style>
-          <a:lnRef idx="1">
-            <a:schemeClr val="accent1"/>
-          </a:lnRef>
-          <a:fillRef idx="3">
-            <a:schemeClr val="accent1"/>
-          </a:fillRef>
-          <a:effectRef idx="2">
-            <a:schemeClr val="accent1"/>
-          </a:effectRef>
-          <a:fontRef idx="minor">
-            <a:schemeClr val="lt1"/>
-          </a:fontRef>
-        </p:style>
-        <p:txBody>
-          <a:bodyPr rtlCol="0" anchor="ctr"/>
-          <a:lstStyle/>
-          <a:p>
-            <a:pPr algn="ctr"/>
-          </a:p>
-        </p:txBody>
-      </p:sp>
-      <p:sp>
-        <p:nvSpPr>
-          <p:cNvPr id="25" name="TextBox 24"/>
-          <p:cNvSpPr txBox="1"/>
-          <p:nvPr/>
-        </p:nvSpPr>
-        <p:spPr>
-          <a:xfrm>
-            <a:off x="7406640" y="4663440"/>
-            <a:ext cx="731520" cy="731520"/>
-          </a:xfrm>
-          <a:prstGeom prst="rect">
-            <a:avLst/>
-          </a:prstGeom>
-          <a:noFill/>
-        </p:spPr>
-        <p:txBody>
-          <a:bodyPr wrap="square" lIns="45720" rIns="45720" tIns="18288" bIns="18288" anchor="ctr">
-            <a:spAutoFit/>
-          </a:bodyPr>
-          <a:lstStyle/>
-          <a:p>
-            <a:pPr algn="ctr"/>
-            <a:r>
-              <a:rPr sz="1600" b="1" i="0">
-                <a:solidFill>
-                  <a:srgbClr val="0B2A4A"/>
-                </a:solidFill>
-                <a:latin typeface="Calibri"/>
-              </a:rPr>
-              <a:t>D</a:t>
-            </a:r>
-          </a:p>
-        </p:txBody>
-      </p:sp>
-      <p:sp>
-        <p:nvSpPr>
-          <p:cNvPr id="26" name="Oval 25"/>
-          <p:cNvSpPr/>
-          <p:nvPr/>
-        </p:nvSpPr>
-        <p:spPr>
-          <a:xfrm>
-            <a:off x="10149840" y="4663440"/>
-            <a:ext cx="731520" cy="731520"/>
-          </a:xfrm>
-          <a:prstGeom prst="ellipse">
-            <a:avLst/>
-          </a:prstGeom>
-          <a:solidFill>
-            <a:srgbClr val="FFFFFF"/>
-          </a:solidFill>
-          <a:ln w="25400">
-            <a:solidFill>
-              <a:srgbClr val="0B2A4A"/>
-            </a:solidFill>
-          </a:ln>
-          <a:effectLst/>
-        </p:spPr>
-        <p:style>
-          <a:lnRef idx="1">
-            <a:schemeClr val="accent1"/>
-          </a:lnRef>
-          <a:fillRef idx="3">
-            <a:schemeClr val="accent1"/>
-          </a:fillRef>
-          <a:effectRef idx="2">
-            <a:schemeClr val="accent1"/>
-          </a:effectRef>
-          <a:fontRef idx="minor">
-            <a:schemeClr val="lt1"/>
-          </a:fontRef>
-        </p:style>
-        <p:txBody>
-          <a:bodyPr rtlCol="0" anchor="ctr"/>
-          <a:lstStyle/>
-          <a:p>
-            <a:pPr algn="ctr"/>
-          </a:p>
-        </p:txBody>
-      </p:sp>
-      <p:sp>
-        <p:nvSpPr>
-          <p:cNvPr id="27" name="TextBox 26"/>
-          <p:cNvSpPr txBox="1"/>
-          <p:nvPr/>
-        </p:nvSpPr>
-        <p:spPr>
-          <a:xfrm>
-            <a:off x="10149840" y="4663440"/>
-            <a:ext cx="731520" cy="731520"/>
-          </a:xfrm>
-          <a:prstGeom prst="rect">
-            <a:avLst/>
-          </a:prstGeom>
-          <a:noFill/>
-        </p:spPr>
-        <p:txBody>
-          <a:bodyPr wrap="square" lIns="45720" rIns="45720" tIns="18288" bIns="18288" anchor="ctr">
-            <a:spAutoFit/>
-          </a:bodyPr>
-          <a:lstStyle/>
-          <a:p>
-            <a:pPr algn="ctr"/>
-            <a:r>
-              <a:rPr sz="1600" b="1" i="0">
-                <a:solidFill>
-                  <a:srgbClr val="0B2A4A"/>
-                </a:solidFill>
-                <a:latin typeface="Calibri"/>
-              </a:rPr>
-              <a:t>E</a:t>
-            </a:r>
-          </a:p>
-        </p:txBody>
-      </p:sp>
-      <p:sp>
-        <p:nvSpPr>
-          <p:cNvPr id="28" name="TextBox 27"/>
-          <p:cNvSpPr txBox="1"/>
-          <p:nvPr/>
-        </p:nvSpPr>
-        <p:spPr>
-          <a:xfrm>
-            <a:off x="6858000" y="1463040"/>
-            <a:ext cx="4572000" cy="457200"/>
+            <a:off x="6858000" y="5303520"/>
+            <a:ext cx="4572000" cy="548640"/>
           </a:xfrm>
           <a:prstGeom prst="rect">
             <a:avLst/>
@@ -7777,13 +8166,13 @@
           <a:p>
             <a:pPr algn="ctr"/>
             <a:r>
-              <a:rPr sz="1600" b="1" i="0">
-                <a:solidFill>
-                  <a:srgbClr val="C0392B"/>
-                </a:solidFill>
-                <a:latin typeface="Calibri"/>
-              </a:rPr>
-              <a:t>Order: A -&gt; B, C -&gt; D, E</a:t>
+              <a:rPr sz="1300" b="1" i="0">
+                <a:solidFill>
+                  <a:srgbClr val="333D4A"/>
+                </a:solidFill>
+                <a:latin typeface="Calibri"/>
+              </a:rPr>
+              <a:t>Level 0 (Gold)  ➔  Level 1 (Teal)  ➔  Level 2 (White)</a:t>
             </a:r>
           </a:p>
         </p:txBody>
@@ -7924,7 +8313,7 @@
                 </a:solidFill>
                 <a:latin typeface="Calibri"/>
               </a:rPr>
-              <a:t>5. Depth-First Search (DFS)</a:t>
+              <a:t>4. Breadth-First Search (BFS): Code &amp; Trace</a:t>
             </a:r>
           </a:p>
         </p:txBody>
@@ -7959,7 +8348,7 @@
                 </a:solidFill>
                 <a:latin typeface="Calibri"/>
               </a:rPr>
-              <a:t>Plunging deep until hitting a dead end</a:t>
+              <a:t>Implementing and executing the BFS algorithm</a:t>
             </a:r>
           </a:p>
         </p:txBody>
@@ -8073,60 +8462,21 @@
                 </a:solidFill>
                 <a:latin typeface="Calibri"/>
               </a:rPr>
-              <a:t>Slide 6 / 7</a:t>
-            </a:r>
-          </a:p>
-        </p:txBody>
-      </p:sp>
-      <p:sp>
-        <p:nvSpPr>
-          <p:cNvPr id="9" name="TextBox 8"/>
-          <p:cNvSpPr txBox="1"/>
+              <a:t>Slide 6 / 9</a:t>
+            </a:r>
+          </a:p>
+        </p:txBody>
+      </p:sp>
+      <p:sp>
+        <p:nvSpPr>
+          <p:cNvPr id="9" name="Rectangle 8"/>
+          <p:cNvSpPr/>
           <p:nvPr/>
         </p:nvSpPr>
         <p:spPr>
           <a:xfrm>
             <a:off x="822960" y="1371600"/>
-            <a:ext cx="5486400" cy="2286000"/>
-          </a:xfrm>
-          <a:prstGeom prst="rect">
-            <a:avLst/>
-          </a:prstGeom>
-          <a:noFill/>
-        </p:spPr>
-        <p:txBody>
-          <a:bodyPr wrap="square" lIns="45720" rIns="45720" tIns="18288" bIns="18288" anchor="t">
-            <a:spAutoFit/>
-          </a:bodyPr>
-          <a:lstStyle/>
-          <a:p>
-            <a:pPr algn="l"/>
-            <a:r>
-              <a:rPr sz="1500" b="0" i="0">
-                <a:solidFill>
-                  <a:srgbClr val="333D4A"/>
-                </a:solidFill>
-                <a:latin typeface="Calibri"/>
-              </a:rPr>
-              <a:t>Depth-First Search picks a path and follows it as deeply as possible before backtracking.
-Key Characteristics:
-• Data Structure: Uses a Stack (LIFO) or Recursion (Call Stack).
-• Ideal for: Cycle detection, Path finding (e.g. maze solving), Topological sorting.
-• Can yield wildly different paths compared to BFS.</a:t>
-            </a:r>
-          </a:p>
-        </p:txBody>
-      </p:sp>
-      <p:sp>
-        <p:nvSpPr>
-          <p:cNvPr id="10" name="Rectangle 9"/>
-          <p:cNvSpPr/>
-          <p:nvPr/>
-        </p:nvSpPr>
-        <p:spPr>
-          <a:xfrm>
-            <a:off x="822960" y="3657600"/>
-            <a:ext cx="5486400" cy="2286000"/>
+            <a:ext cx="5486400" cy="4572000"/>
           </a:xfrm>
           <a:prstGeom prst="rect">
             <a:avLst/>
@@ -8163,14 +8513,14 @@
       </p:sp>
       <p:sp>
         <p:nvSpPr>
-          <p:cNvPr id="11" name="Rectangle 10"/>
+          <p:cNvPr id="10" name="Rectangle 9"/>
           <p:cNvSpPr/>
           <p:nvPr/>
         </p:nvSpPr>
         <p:spPr>
           <a:xfrm>
-            <a:off x="822960" y="3657600"/>
-            <a:ext cx="73152" cy="2286000"/>
+            <a:off x="822960" y="1371600"/>
+            <a:ext cx="73152" cy="4572000"/>
           </a:xfrm>
           <a:prstGeom prst="rect">
             <a:avLst/>
@@ -8207,14 +8557,14 @@
       </p:sp>
       <p:sp>
         <p:nvSpPr>
-          <p:cNvPr id="12" name="TextBox 11"/>
+          <p:cNvPr id="11" name="TextBox 10"/>
           <p:cNvSpPr txBox="1"/>
           <p:nvPr/>
         </p:nvSpPr>
         <p:spPr>
           <a:xfrm>
-            <a:off x="960120" y="3749040"/>
-            <a:ext cx="5257800" cy="2103120"/>
+            <a:off x="960120" y="1463040"/>
+            <a:ext cx="5257800" cy="4389120"/>
           </a:xfrm>
           <a:prstGeom prst="rect">
             <a:avLst/>
@@ -8222,7 +8572,7 @@
           <a:noFill/>
         </p:spPr>
         <p:txBody>
-          <a:bodyPr wrap="square">
+          <a:bodyPr wrap="square" lIns="45720" rIns="45720">
             <a:spAutoFit/>
           </a:bodyPr>
           <a:lstStyle/>
@@ -8239,7 +8589,7 @@
                 </a:solidFill>
                 <a:latin typeface="Consolas"/>
               </a:rPr>
-              <a:t>def dfs(graph, node, visited=None):</a:t>
+              <a:t>from collections import deque</a:t>
             </a:r>
           </a:p>
           <a:p>
@@ -8255,7 +8605,7 @@
                 </a:solidFill>
                 <a:latin typeface="Consolas"/>
               </a:rPr>
-              <a:t>    if visited is None:</a:t>
+              <a:t> </a:t>
             </a:r>
           </a:p>
           <a:p>
@@ -8271,7 +8621,7 @@
                 </a:solidFill>
                 <a:latin typeface="Consolas"/>
               </a:rPr>
-              <a:t>        visited = set()</a:t>
+              <a:t>def bfs(graph, start):</a:t>
             </a:r>
           </a:p>
           <a:p>
@@ -8287,7 +8637,7 @@
                 </a:solidFill>
                 <a:latin typeface="Consolas"/>
               </a:rPr>
-              <a:t> </a:t>
+              <a:t>    visited = {start}</a:t>
             </a:r>
           </a:p>
           <a:p>
@@ -8303,7 +8653,7 @@
                 </a:solidFill>
                 <a:latin typeface="Consolas"/>
               </a:rPr>
-              <a:t>    if node not in visited:</a:t>
+              <a:t>    q = deque([start])</a:t>
             </a:r>
           </a:p>
           <a:p>
@@ -8319,7 +8669,7 @@
                 </a:solidFill>
                 <a:latin typeface="Consolas"/>
               </a:rPr>
-              <a:t>        visited.add(node)</a:t>
+              <a:t> </a:t>
             </a:r>
           </a:p>
           <a:p>
@@ -8335,7 +8685,7 @@
                 </a:solidFill>
                 <a:latin typeface="Consolas"/>
               </a:rPr>
-              <a:t>        print(node)</a:t>
+              <a:t>    while q:</a:t>
             </a:r>
           </a:p>
           <a:p>
@@ -8351,7 +8701,7 @@
                 </a:solidFill>
                 <a:latin typeface="Consolas"/>
               </a:rPr>
-              <a:t>        for neighbor in graph[node]:</a:t>
+              <a:t>        node = q.popleft()</a:t>
             </a:r>
           </a:p>
           <a:p>
@@ -8367,14 +8717,94 @@
                 </a:solidFill>
                 <a:latin typeface="Consolas"/>
               </a:rPr>
-              <a:t>            dfs(graph, neighbor, visited)</a:t>
-            </a:r>
-          </a:p>
-        </p:txBody>
-      </p:sp>
-      <p:sp>
-        <p:nvSpPr>
-          <p:cNvPr id="13" name="Rectangle 12"/>
+              <a:t>        print(node)  # Process node</a:t>
+            </a:r>
+          </a:p>
+          <a:p>
+            <a:pPr algn="l">
+              <a:lnSpc>
+                <a:spcPct val="115000"/>
+              </a:lnSpc>
+            </a:pPr>
+            <a:r>
+              <a:rPr sz="1300">
+                <a:solidFill>
+                  <a:srgbClr val="E6E6E6"/>
+                </a:solidFill>
+                <a:latin typeface="Consolas"/>
+              </a:rPr>
+              <a:t> </a:t>
+            </a:r>
+          </a:p>
+          <a:p>
+            <a:pPr algn="l">
+              <a:lnSpc>
+                <a:spcPct val="115000"/>
+              </a:lnSpc>
+            </a:pPr>
+            <a:r>
+              <a:rPr sz="1300">
+                <a:solidFill>
+                  <a:srgbClr val="E6E6E6"/>
+                </a:solidFill>
+                <a:latin typeface="Consolas"/>
+              </a:rPr>
+              <a:t>        for neighbor in graph[node]:</a:t>
+            </a:r>
+          </a:p>
+          <a:p>
+            <a:pPr algn="l">
+              <a:lnSpc>
+                <a:spcPct val="115000"/>
+              </a:lnSpc>
+            </a:pPr>
+            <a:r>
+              <a:rPr sz="1300">
+                <a:solidFill>
+                  <a:srgbClr val="E6E6E6"/>
+                </a:solidFill>
+                <a:latin typeface="Consolas"/>
+              </a:rPr>
+              <a:t>            if neighbor not in visited:</a:t>
+            </a:r>
+          </a:p>
+          <a:p>
+            <a:pPr algn="l">
+              <a:lnSpc>
+                <a:spcPct val="115000"/>
+              </a:lnSpc>
+            </a:pPr>
+            <a:r>
+              <a:rPr sz="1300">
+                <a:solidFill>
+                  <a:srgbClr val="E6E6E6"/>
+                </a:solidFill>
+                <a:latin typeface="Consolas"/>
+              </a:rPr>
+              <a:t>                visited.add(neighbor)</a:t>
+            </a:r>
+          </a:p>
+          <a:p>
+            <a:pPr algn="l">
+              <a:lnSpc>
+                <a:spcPct val="115000"/>
+              </a:lnSpc>
+            </a:pPr>
+            <a:r>
+              <a:rPr sz="1300">
+                <a:solidFill>
+                  <a:srgbClr val="E6E6E6"/>
+                </a:solidFill>
+                <a:latin typeface="Consolas"/>
+              </a:rPr>
+              <a:t>                q.append(neighbor)</a:t>
+            </a:r>
+          </a:p>
+        </p:txBody>
+      </p:sp>
+      <p:sp>
+        <p:nvSpPr>
+          <p:cNvPr id="12" name="Rectangle 11"/>
           <p:cNvSpPr/>
           <p:nvPr/>
         </p:nvSpPr>
@@ -8416,167 +8846,95 @@
           </a:p>
         </p:txBody>
       </p:sp>
-      <p:cxnSp>
-        <p:nvCxnSpPr>
-          <p:cNvPr id="14" name="Connector 13"/>
-          <p:cNvCxnSpPr/>
-          <p:nvPr/>
-        </p:nvCxnSpPr>
-        <p:spPr>
-          <a:xfrm flipH="1">
-            <a:off x="7772400" y="2286000"/>
-            <a:ext cx="1371600" cy="1371600"/>
-          </a:xfrm>
-          <a:prstGeom prst="line">
-            <a:avLst/>
-          </a:prstGeom>
-          <a:ln w="25400">
-            <a:solidFill>
-              <a:srgbClr val="E0A81F"/>
-            </a:solidFill>
-          </a:ln>
-        </p:spPr>
-        <p:style>
-          <a:lnRef idx="2">
-            <a:schemeClr val="accent1"/>
-          </a:lnRef>
-          <a:fillRef idx="0">
-            <a:schemeClr val="accent1"/>
-          </a:fillRef>
-          <a:effectRef idx="1">
-            <a:schemeClr val="accent1"/>
-          </a:effectRef>
-          <a:fontRef idx="minor">
-            <a:schemeClr val="tx1"/>
-          </a:fontRef>
-        </p:style>
-      </p:cxnSp>
-      <p:cxnSp>
-        <p:nvCxnSpPr>
-          <p:cNvPr id="15" name="Connector 14"/>
-          <p:cNvCxnSpPr/>
-          <p:nvPr/>
-        </p:nvCxnSpPr>
-        <p:spPr>
-          <a:xfrm>
-            <a:off x="7772400" y="3657600"/>
-            <a:ext cx="0" cy="1371600"/>
-          </a:xfrm>
-          <a:prstGeom prst="line">
-            <a:avLst/>
-          </a:prstGeom>
-          <a:ln w="25400">
-            <a:solidFill>
-              <a:srgbClr val="E0A81F"/>
-            </a:solidFill>
-          </a:ln>
-        </p:spPr>
-        <p:style>
-          <a:lnRef idx="2">
-            <a:schemeClr val="accent1"/>
-          </a:lnRef>
-          <a:fillRef idx="0">
-            <a:schemeClr val="accent1"/>
-          </a:fillRef>
-          <a:effectRef idx="1">
-            <a:schemeClr val="accent1"/>
-          </a:effectRef>
-          <a:fontRef idx="minor">
-            <a:schemeClr val="tx1"/>
-          </a:fontRef>
-        </p:style>
-      </p:cxnSp>
-      <p:cxnSp>
-        <p:nvCxnSpPr>
-          <p:cNvPr id="16" name="Connector 15"/>
-          <p:cNvCxnSpPr/>
-          <p:nvPr/>
-        </p:nvCxnSpPr>
-        <p:spPr>
-          <a:xfrm>
-            <a:off x="9144000" y="2286000"/>
-            <a:ext cx="1371600" cy="1371600"/>
-          </a:xfrm>
-          <a:prstGeom prst="line">
-            <a:avLst/>
-          </a:prstGeom>
-          <a:ln w="25400">
-            <a:solidFill>
-              <a:srgbClr val="E0A81F"/>
-            </a:solidFill>
-          </a:ln>
-        </p:spPr>
-        <p:style>
-          <a:lnRef idx="2">
-            <a:schemeClr val="accent1"/>
-          </a:lnRef>
-          <a:fillRef idx="0">
-            <a:schemeClr val="accent1"/>
-          </a:fillRef>
-          <a:effectRef idx="1">
-            <a:schemeClr val="accent1"/>
-          </a:effectRef>
-          <a:fontRef idx="minor">
-            <a:schemeClr val="tx1"/>
-          </a:fontRef>
-        </p:style>
-      </p:cxnSp>
-      <p:cxnSp>
-        <p:nvCxnSpPr>
-          <p:cNvPr id="17" name="Connector 16"/>
-          <p:cNvCxnSpPr/>
-          <p:nvPr/>
-        </p:nvCxnSpPr>
-        <p:spPr>
-          <a:xfrm>
-            <a:off x="10515600" y="3657600"/>
-            <a:ext cx="0" cy="1371600"/>
-          </a:xfrm>
-          <a:prstGeom prst="line">
-            <a:avLst/>
-          </a:prstGeom>
-          <a:ln w="25400">
-            <a:solidFill>
-              <a:srgbClr val="E0A81F"/>
-            </a:solidFill>
-          </a:ln>
-        </p:spPr>
-        <p:style>
-          <a:lnRef idx="2">
-            <a:schemeClr val="accent1"/>
-          </a:lnRef>
-          <a:fillRef idx="0">
-            <a:schemeClr val="accent1"/>
-          </a:fillRef>
-          <a:effectRef idx="1">
-            <a:schemeClr val="accent1"/>
-          </a:effectRef>
-          <a:fontRef idx="minor">
-            <a:schemeClr val="tx1"/>
-          </a:fontRef>
-        </p:style>
-      </p:cxnSp>
-      <p:sp>
-        <p:nvSpPr>
-          <p:cNvPr id="18" name="Oval 17"/>
+      <p:sp>
+        <p:nvSpPr>
+          <p:cNvPr id="13" name="TextBox 12"/>
+          <p:cNvSpPr txBox="1"/>
+          <p:nvPr/>
+        </p:nvSpPr>
+        <p:spPr>
+          <a:xfrm>
+            <a:off x="6858000" y="1463040"/>
+            <a:ext cx="4572000" cy="457200"/>
+          </a:xfrm>
+          <a:prstGeom prst="rect">
+            <a:avLst/>
+          </a:prstGeom>
+          <a:noFill/>
+        </p:spPr>
+        <p:txBody>
+          <a:bodyPr wrap="square" lIns="45720" rIns="45720" tIns="18288" bIns="18288" anchor="t">
+            <a:spAutoFit/>
+          </a:bodyPr>
+          <a:lstStyle/>
+          <a:p>
+            <a:pPr algn="ctr"/>
+            <a:r>
+              <a:rPr sz="1600" b="1" i="0">
+                <a:solidFill>
+                  <a:srgbClr val="C0392B"/>
+                </a:solidFill>
+                <a:latin typeface="Calibri"/>
+              </a:rPr>
+              <a:t>Step-by-Step Execution Trace</a:t>
+            </a:r>
+          </a:p>
+        </p:txBody>
+      </p:sp>
+      <p:sp>
+        <p:nvSpPr>
+          <p:cNvPr id="14" name="TextBox 13"/>
+          <p:cNvSpPr txBox="1"/>
+          <p:nvPr/>
+        </p:nvSpPr>
+        <p:spPr>
+          <a:xfrm>
+            <a:off x="7040880" y="2011680"/>
+            <a:ext cx="4206240" cy="548640"/>
+          </a:xfrm>
+          <a:prstGeom prst="rect">
+            <a:avLst/>
+          </a:prstGeom>
+          <a:noFill/>
+        </p:spPr>
+        <p:txBody>
+          <a:bodyPr wrap="square" lIns="45720" rIns="45720" tIns="18288" bIns="18288" anchor="t">
+            <a:spAutoFit/>
+          </a:bodyPr>
+          <a:lstStyle/>
+          <a:p>
+            <a:pPr algn="l"/>
+            <a:r>
+              <a:rPr sz="1300" b="1" i="0">
+                <a:solidFill>
+                  <a:srgbClr val="333D4A"/>
+                </a:solidFill>
+                <a:latin typeface="Calibri"/>
+              </a:rPr>
+              <a:t>Graph: A-B, A-C, B-D, C-E (Start at 'A')</a:t>
+            </a:r>
+          </a:p>
+        </p:txBody>
+      </p:sp>
+      <p:sp>
+        <p:nvSpPr>
+          <p:cNvPr id="15" name="Rectangle 14"/>
           <p:cNvSpPr/>
           <p:nvPr/>
         </p:nvSpPr>
         <p:spPr>
           <a:xfrm>
-            <a:off x="8778240" y="1920240"/>
-            <a:ext cx="731520" cy="731520"/>
-          </a:xfrm>
-          <a:prstGeom prst="ellipse">
+            <a:off x="7040880" y="2651760"/>
+            <a:ext cx="4206240" cy="365760"/>
+          </a:xfrm>
+          <a:prstGeom prst="rect">
             <a:avLst/>
           </a:prstGeom>
           <a:solidFill>
-            <a:srgbClr val="FFFFFF"/>
+            <a:srgbClr val="0B2A4A"/>
           </a:solidFill>
-          <a:ln w="25400">
-            <a:solidFill>
-              <a:srgbClr val="0B2A4A"/>
-            </a:solidFill>
+          <a:ln>
+            <a:noFill/>
           </a:ln>
           <a:effectLst/>
         </p:spPr>
@@ -8604,14 +8962,14 @@
       </p:sp>
       <p:sp>
         <p:nvSpPr>
-          <p:cNvPr id="19" name="TextBox 18"/>
+          <p:cNvPr id="16" name="TextBox 15"/>
           <p:cNvSpPr txBox="1"/>
           <p:nvPr/>
         </p:nvSpPr>
         <p:spPr>
           <a:xfrm>
-            <a:off x="8778240" y="1920240"/>
-            <a:ext cx="731520" cy="731520"/>
+            <a:off x="7040880" y="2697480"/>
+            <a:ext cx="914400" cy="274320"/>
           </a:xfrm>
           <a:prstGeom prst="rect">
             <a:avLst/>
@@ -8619,44 +8977,114 @@
           <a:noFill/>
         </p:spPr>
         <p:txBody>
-          <a:bodyPr wrap="square" lIns="45720" rIns="45720" tIns="18288" bIns="18288" anchor="ctr">
+          <a:bodyPr wrap="square" lIns="45720" rIns="45720" tIns="18288" bIns="18288" anchor="t">
             <a:spAutoFit/>
           </a:bodyPr>
           <a:lstStyle/>
           <a:p>
             <a:pPr algn="ctr"/>
             <a:r>
-              <a:rPr sz="1600" b="1" i="0">
-                <a:solidFill>
-                  <a:srgbClr val="0B2A4A"/>
-                </a:solidFill>
-                <a:latin typeface="Calibri"/>
-              </a:rPr>
-              <a:t>A</a:t>
-            </a:r>
-          </a:p>
-        </p:txBody>
-      </p:sp>
-      <p:sp>
-        <p:nvSpPr>
-          <p:cNvPr id="20" name="Oval 19"/>
+              <a:rPr sz="1100" b="1" i="0">
+                <a:solidFill>
+                  <a:srgbClr val="FFFFFF"/>
+                </a:solidFill>
+                <a:latin typeface="Calibri"/>
+              </a:rPr>
+              <a:t>Pop Node</a:t>
+            </a:r>
+          </a:p>
+        </p:txBody>
+      </p:sp>
+      <p:sp>
+        <p:nvSpPr>
+          <p:cNvPr id="17" name="TextBox 16"/>
+          <p:cNvSpPr txBox="1"/>
+          <p:nvPr/>
+        </p:nvSpPr>
+        <p:spPr>
+          <a:xfrm>
+            <a:off x="7955279" y="2697480"/>
+            <a:ext cx="1645920" cy="274320"/>
+          </a:xfrm>
+          <a:prstGeom prst="rect">
+            <a:avLst/>
+          </a:prstGeom>
+          <a:noFill/>
+        </p:spPr>
+        <p:txBody>
+          <a:bodyPr wrap="square" lIns="45720" rIns="45720" tIns="18288" bIns="18288" anchor="t">
+            <a:spAutoFit/>
+          </a:bodyPr>
+          <a:lstStyle/>
+          <a:p>
+            <a:pPr algn="ctr"/>
+            <a:r>
+              <a:rPr sz="1100" b="1" i="0">
+                <a:solidFill>
+                  <a:srgbClr val="FFFFFF"/>
+                </a:solidFill>
+                <a:latin typeface="Calibri"/>
+              </a:rPr>
+              <a:t>Queue Status</a:t>
+            </a:r>
+          </a:p>
+        </p:txBody>
+      </p:sp>
+      <p:sp>
+        <p:nvSpPr>
+          <p:cNvPr id="18" name="TextBox 17"/>
+          <p:cNvSpPr txBox="1"/>
+          <p:nvPr/>
+        </p:nvSpPr>
+        <p:spPr>
+          <a:xfrm>
+            <a:off x="9601200" y="2697480"/>
+            <a:ext cx="1645920" cy="274320"/>
+          </a:xfrm>
+          <a:prstGeom prst="rect">
+            <a:avLst/>
+          </a:prstGeom>
+          <a:noFill/>
+        </p:spPr>
+        <p:txBody>
+          <a:bodyPr wrap="square" lIns="45720" rIns="45720" tIns="18288" bIns="18288" anchor="t">
+            <a:spAutoFit/>
+          </a:bodyPr>
+          <a:lstStyle/>
+          <a:p>
+            <a:pPr algn="ctr"/>
+            <a:r>
+              <a:rPr sz="1100" b="1" i="0">
+                <a:solidFill>
+                  <a:srgbClr val="FFFFFF"/>
+                </a:solidFill>
+                <a:latin typeface="Calibri"/>
+              </a:rPr>
+              <a:t>Visited Set</a:t>
+            </a:r>
+          </a:p>
+        </p:txBody>
+      </p:sp>
+      <p:sp>
+        <p:nvSpPr>
+          <p:cNvPr id="19" name="Rectangle 18"/>
           <p:cNvSpPr/>
           <p:nvPr/>
         </p:nvSpPr>
         <p:spPr>
           <a:xfrm>
-            <a:off x="7406640" y="3291840"/>
-            <a:ext cx="731520" cy="731520"/>
-          </a:xfrm>
-          <a:prstGeom prst="ellipse">
+            <a:off x="7040880" y="3108960"/>
+            <a:ext cx="4206240" cy="365760"/>
+          </a:xfrm>
+          <a:prstGeom prst="rect">
             <a:avLst/>
           </a:prstGeom>
           <a:solidFill>
             <a:srgbClr val="FFFFFF"/>
           </a:solidFill>
-          <a:ln w="25400">
+          <a:ln w="12700">
             <a:solidFill>
-              <a:srgbClr val="0B2A4A"/>
+              <a:srgbClr val="333D4A"/>
             </a:solidFill>
           </a:ln>
           <a:effectLst/>
@@ -8685,14 +9113,49 @@
       </p:sp>
       <p:sp>
         <p:nvSpPr>
+          <p:cNvPr id="20" name="TextBox 19"/>
+          <p:cNvSpPr txBox="1"/>
+          <p:nvPr/>
+        </p:nvSpPr>
+        <p:spPr>
+          <a:xfrm>
+            <a:off x="7040880" y="3154680"/>
+            <a:ext cx="914400" cy="274320"/>
+          </a:xfrm>
+          <a:prstGeom prst="rect">
+            <a:avLst/>
+          </a:prstGeom>
+          <a:noFill/>
+        </p:spPr>
+        <p:txBody>
+          <a:bodyPr wrap="square" lIns="45720" rIns="45720" tIns="18288" bIns="18288" anchor="t">
+            <a:spAutoFit/>
+          </a:bodyPr>
+          <a:lstStyle/>
+          <a:p>
+            <a:pPr algn="ctr"/>
+            <a:r>
+              <a:rPr sz="1100" b="1" i="0">
+                <a:solidFill>
+                  <a:srgbClr val="333D4A"/>
+                </a:solidFill>
+                <a:latin typeface="Calibri"/>
+              </a:rPr>
+              <a:t>Initial</a:t>
+            </a:r>
+          </a:p>
+        </p:txBody>
+      </p:sp>
+      <p:sp>
+        <p:nvSpPr>
           <p:cNvPr id="21" name="TextBox 20"/>
           <p:cNvSpPr txBox="1"/>
           <p:nvPr/>
         </p:nvSpPr>
         <p:spPr>
           <a:xfrm>
-            <a:off x="7406640" y="3291840"/>
-            <a:ext cx="731520" cy="731520"/>
+            <a:off x="7955279" y="3154680"/>
+            <a:ext cx="1645920" cy="274320"/>
           </a:xfrm>
           <a:prstGeom prst="rect">
             <a:avLst/>
@@ -8700,44 +9163,79 @@
           <a:noFill/>
         </p:spPr>
         <p:txBody>
-          <a:bodyPr wrap="square" lIns="45720" rIns="45720" tIns="18288" bIns="18288" anchor="ctr">
+          <a:bodyPr wrap="square" lIns="45720" rIns="45720" tIns="18288" bIns="18288" anchor="t">
             <a:spAutoFit/>
           </a:bodyPr>
           <a:lstStyle/>
           <a:p>
             <a:pPr algn="ctr"/>
             <a:r>
-              <a:rPr sz="1600" b="1" i="0">
-                <a:solidFill>
-                  <a:srgbClr val="0B2A4A"/>
-                </a:solidFill>
-                <a:latin typeface="Calibri"/>
-              </a:rPr>
-              <a:t>B</a:t>
-            </a:r>
-          </a:p>
-        </p:txBody>
-      </p:sp>
-      <p:sp>
-        <p:nvSpPr>
-          <p:cNvPr id="22" name="Oval 21"/>
+              <a:rPr sz="1100" b="0" i="0">
+                <a:solidFill>
+                  <a:srgbClr val="333D4A"/>
+                </a:solidFill>
+                <a:latin typeface="Calibri"/>
+              </a:rPr>
+              <a:t>['A']</a:t>
+            </a:r>
+          </a:p>
+        </p:txBody>
+      </p:sp>
+      <p:sp>
+        <p:nvSpPr>
+          <p:cNvPr id="22" name="TextBox 21"/>
+          <p:cNvSpPr txBox="1"/>
+          <p:nvPr/>
+        </p:nvSpPr>
+        <p:spPr>
+          <a:xfrm>
+            <a:off x="9601200" y="3154680"/>
+            <a:ext cx="1645920" cy="274320"/>
+          </a:xfrm>
+          <a:prstGeom prst="rect">
+            <a:avLst/>
+          </a:prstGeom>
+          <a:noFill/>
+        </p:spPr>
+        <p:txBody>
+          <a:bodyPr wrap="square" lIns="45720" rIns="45720" tIns="18288" bIns="18288" anchor="t">
+            <a:spAutoFit/>
+          </a:bodyPr>
+          <a:lstStyle/>
+          <a:p>
+            <a:pPr algn="ctr"/>
+            <a:r>
+              <a:rPr sz="1100" b="0" i="0">
+                <a:solidFill>
+                  <a:srgbClr val="333D4A"/>
+                </a:solidFill>
+                <a:latin typeface="Calibri"/>
+              </a:rPr>
+              <a:t>{'A'}</a:t>
+            </a:r>
+          </a:p>
+        </p:txBody>
+      </p:sp>
+      <p:sp>
+        <p:nvSpPr>
+          <p:cNvPr id="23" name="Rectangle 22"/>
           <p:cNvSpPr/>
           <p:nvPr/>
         </p:nvSpPr>
         <p:spPr>
           <a:xfrm>
-            <a:off x="10149840" y="3291840"/>
-            <a:ext cx="731520" cy="731520"/>
-          </a:xfrm>
-          <a:prstGeom prst="ellipse">
+            <a:off x="7040880" y="3520440"/>
+            <a:ext cx="4206240" cy="365760"/>
+          </a:xfrm>
+          <a:prstGeom prst="rect">
             <a:avLst/>
           </a:prstGeom>
           <a:solidFill>
-            <a:srgbClr val="FFFFFF"/>
+            <a:srgbClr val="F2F4F7"/>
           </a:solidFill>
-          <a:ln w="25400">
+          <a:ln w="12700">
             <a:solidFill>
-              <a:srgbClr val="0B2A4A"/>
+              <a:srgbClr val="333D4A"/>
             </a:solidFill>
           </a:ln>
           <a:effectLst/>
@@ -8766,14 +9264,14 @@
       </p:sp>
       <p:sp>
         <p:nvSpPr>
-          <p:cNvPr id="23" name="TextBox 22"/>
+          <p:cNvPr id="24" name="TextBox 23"/>
           <p:cNvSpPr txBox="1"/>
           <p:nvPr/>
         </p:nvSpPr>
         <p:spPr>
           <a:xfrm>
-            <a:off x="10149840" y="3291840"/>
-            <a:ext cx="731520" cy="731520"/>
+            <a:off x="7040880" y="3566160"/>
+            <a:ext cx="914400" cy="274320"/>
           </a:xfrm>
           <a:prstGeom prst="rect">
             <a:avLst/>
@@ -8781,44 +9279,114 @@
           <a:noFill/>
         </p:spPr>
         <p:txBody>
-          <a:bodyPr wrap="square" lIns="45720" rIns="45720" tIns="18288" bIns="18288" anchor="ctr">
+          <a:bodyPr wrap="square" lIns="45720" rIns="45720" tIns="18288" bIns="18288" anchor="t">
             <a:spAutoFit/>
           </a:bodyPr>
           <a:lstStyle/>
           <a:p>
             <a:pPr algn="ctr"/>
             <a:r>
-              <a:rPr sz="1600" b="1" i="0">
-                <a:solidFill>
-                  <a:srgbClr val="0B2A4A"/>
-                </a:solidFill>
-                <a:latin typeface="Calibri"/>
-              </a:rPr>
-              <a:t>C</a:t>
-            </a:r>
-          </a:p>
-        </p:txBody>
-      </p:sp>
-      <p:sp>
-        <p:nvSpPr>
-          <p:cNvPr id="24" name="Oval 23"/>
+              <a:rPr sz="1100" b="1" i="0">
+                <a:solidFill>
+                  <a:srgbClr val="333D4A"/>
+                </a:solidFill>
+                <a:latin typeface="Calibri"/>
+              </a:rPr>
+              <a:t>A</a:t>
+            </a:r>
+          </a:p>
+        </p:txBody>
+      </p:sp>
+      <p:sp>
+        <p:nvSpPr>
+          <p:cNvPr id="25" name="TextBox 24"/>
+          <p:cNvSpPr txBox="1"/>
+          <p:nvPr/>
+        </p:nvSpPr>
+        <p:spPr>
+          <a:xfrm>
+            <a:off x="7955279" y="3566160"/>
+            <a:ext cx="1645920" cy="274320"/>
+          </a:xfrm>
+          <a:prstGeom prst="rect">
+            <a:avLst/>
+          </a:prstGeom>
+          <a:noFill/>
+        </p:spPr>
+        <p:txBody>
+          <a:bodyPr wrap="square" lIns="45720" rIns="45720" tIns="18288" bIns="18288" anchor="t">
+            <a:spAutoFit/>
+          </a:bodyPr>
+          <a:lstStyle/>
+          <a:p>
+            <a:pPr algn="ctr"/>
+            <a:r>
+              <a:rPr sz="1100" b="0" i="0">
+                <a:solidFill>
+                  <a:srgbClr val="333D4A"/>
+                </a:solidFill>
+                <a:latin typeface="Calibri"/>
+              </a:rPr>
+              <a:t>['B', 'C']</a:t>
+            </a:r>
+          </a:p>
+        </p:txBody>
+      </p:sp>
+      <p:sp>
+        <p:nvSpPr>
+          <p:cNvPr id="26" name="TextBox 25"/>
+          <p:cNvSpPr txBox="1"/>
+          <p:nvPr/>
+        </p:nvSpPr>
+        <p:spPr>
+          <a:xfrm>
+            <a:off x="9601200" y="3566160"/>
+            <a:ext cx="1645920" cy="274320"/>
+          </a:xfrm>
+          <a:prstGeom prst="rect">
+            <a:avLst/>
+          </a:prstGeom>
+          <a:noFill/>
+        </p:spPr>
+        <p:txBody>
+          <a:bodyPr wrap="square" lIns="45720" rIns="45720" tIns="18288" bIns="18288" anchor="t">
+            <a:spAutoFit/>
+          </a:bodyPr>
+          <a:lstStyle/>
+          <a:p>
+            <a:pPr algn="ctr"/>
+            <a:r>
+              <a:rPr sz="1100" b="0" i="0">
+                <a:solidFill>
+                  <a:srgbClr val="333D4A"/>
+                </a:solidFill>
+                <a:latin typeface="Calibri"/>
+              </a:rPr>
+              <a:t>{'A', 'B', 'C'}</a:t>
+            </a:r>
+          </a:p>
+        </p:txBody>
+      </p:sp>
+      <p:sp>
+        <p:nvSpPr>
+          <p:cNvPr id="27" name="Rectangle 26"/>
           <p:cNvSpPr/>
           <p:nvPr/>
         </p:nvSpPr>
         <p:spPr>
           <a:xfrm>
-            <a:off x="7406640" y="4663440"/>
-            <a:ext cx="731520" cy="731520"/>
-          </a:xfrm>
-          <a:prstGeom prst="ellipse">
+            <a:off x="7040880" y="3931920"/>
+            <a:ext cx="4206240" cy="365760"/>
+          </a:xfrm>
+          <a:prstGeom prst="rect">
             <a:avLst/>
           </a:prstGeom>
           <a:solidFill>
             <a:srgbClr val="FFFFFF"/>
           </a:solidFill>
-          <a:ln w="25400">
+          <a:ln w="12700">
             <a:solidFill>
-              <a:srgbClr val="0B2A4A"/>
+              <a:srgbClr val="333D4A"/>
             </a:solidFill>
           </a:ln>
           <a:effectLst/>
@@ -8847,14 +9415,14 @@
       </p:sp>
       <p:sp>
         <p:nvSpPr>
-          <p:cNvPr id="25" name="TextBox 24"/>
+          <p:cNvPr id="28" name="TextBox 27"/>
           <p:cNvSpPr txBox="1"/>
           <p:nvPr/>
         </p:nvSpPr>
         <p:spPr>
           <a:xfrm>
-            <a:off x="7406640" y="4663440"/>
-            <a:ext cx="731520" cy="731520"/>
+            <a:off x="7040880" y="3977640"/>
+            <a:ext cx="914400" cy="274320"/>
           </a:xfrm>
           <a:prstGeom prst="rect">
             <a:avLst/>
@@ -8862,44 +9430,114 @@
           <a:noFill/>
         </p:spPr>
         <p:txBody>
-          <a:bodyPr wrap="square" lIns="45720" rIns="45720" tIns="18288" bIns="18288" anchor="ctr">
+          <a:bodyPr wrap="square" lIns="45720" rIns="45720" tIns="18288" bIns="18288" anchor="t">
             <a:spAutoFit/>
           </a:bodyPr>
           <a:lstStyle/>
           <a:p>
             <a:pPr algn="ctr"/>
             <a:r>
-              <a:rPr sz="1600" b="1" i="0">
-                <a:solidFill>
-                  <a:srgbClr val="0B2A4A"/>
-                </a:solidFill>
-                <a:latin typeface="Calibri"/>
-              </a:rPr>
-              <a:t>D</a:t>
-            </a:r>
-          </a:p>
-        </p:txBody>
-      </p:sp>
-      <p:sp>
-        <p:nvSpPr>
-          <p:cNvPr id="26" name="Oval 25"/>
+              <a:rPr sz="1100" b="1" i="0">
+                <a:solidFill>
+                  <a:srgbClr val="333D4A"/>
+                </a:solidFill>
+                <a:latin typeface="Calibri"/>
+              </a:rPr>
+              <a:t>B</a:t>
+            </a:r>
+          </a:p>
+        </p:txBody>
+      </p:sp>
+      <p:sp>
+        <p:nvSpPr>
+          <p:cNvPr id="29" name="TextBox 28"/>
+          <p:cNvSpPr txBox="1"/>
+          <p:nvPr/>
+        </p:nvSpPr>
+        <p:spPr>
+          <a:xfrm>
+            <a:off x="7955279" y="3977640"/>
+            <a:ext cx="1645920" cy="274320"/>
+          </a:xfrm>
+          <a:prstGeom prst="rect">
+            <a:avLst/>
+          </a:prstGeom>
+          <a:noFill/>
+        </p:spPr>
+        <p:txBody>
+          <a:bodyPr wrap="square" lIns="45720" rIns="45720" tIns="18288" bIns="18288" anchor="t">
+            <a:spAutoFit/>
+          </a:bodyPr>
+          <a:lstStyle/>
+          <a:p>
+            <a:pPr algn="ctr"/>
+            <a:r>
+              <a:rPr sz="1100" b="0" i="0">
+                <a:solidFill>
+                  <a:srgbClr val="333D4A"/>
+                </a:solidFill>
+                <a:latin typeface="Calibri"/>
+              </a:rPr>
+              <a:t>['C', 'D']</a:t>
+            </a:r>
+          </a:p>
+        </p:txBody>
+      </p:sp>
+      <p:sp>
+        <p:nvSpPr>
+          <p:cNvPr id="30" name="TextBox 29"/>
+          <p:cNvSpPr txBox="1"/>
+          <p:nvPr/>
+        </p:nvSpPr>
+        <p:spPr>
+          <a:xfrm>
+            <a:off x="9601200" y="3977640"/>
+            <a:ext cx="1645920" cy="274320"/>
+          </a:xfrm>
+          <a:prstGeom prst="rect">
+            <a:avLst/>
+          </a:prstGeom>
+          <a:noFill/>
+        </p:spPr>
+        <p:txBody>
+          <a:bodyPr wrap="square" lIns="45720" rIns="45720" tIns="18288" bIns="18288" anchor="t">
+            <a:spAutoFit/>
+          </a:bodyPr>
+          <a:lstStyle/>
+          <a:p>
+            <a:pPr algn="ctr"/>
+            <a:r>
+              <a:rPr sz="1100" b="0" i="0">
+                <a:solidFill>
+                  <a:srgbClr val="333D4A"/>
+                </a:solidFill>
+                <a:latin typeface="Calibri"/>
+              </a:rPr>
+              <a:t>{'A', 'B', 'C', 'D'}</a:t>
+            </a:r>
+          </a:p>
+        </p:txBody>
+      </p:sp>
+      <p:sp>
+        <p:nvSpPr>
+          <p:cNvPr id="31" name="Rectangle 30"/>
           <p:cNvSpPr/>
           <p:nvPr/>
         </p:nvSpPr>
         <p:spPr>
           <a:xfrm>
-            <a:off x="10149840" y="4663440"/>
-            <a:ext cx="731520" cy="731520"/>
-          </a:xfrm>
-          <a:prstGeom prst="ellipse">
+            <a:off x="7040880" y="4343400"/>
+            <a:ext cx="4206240" cy="365760"/>
+          </a:xfrm>
+          <a:prstGeom prst="rect">
             <a:avLst/>
           </a:prstGeom>
           <a:solidFill>
-            <a:srgbClr val="FFFFFF"/>
+            <a:srgbClr val="F2F4F7"/>
           </a:solidFill>
-          <a:ln w="25400">
+          <a:ln w="12700">
             <a:solidFill>
-              <a:srgbClr val="0B2A4A"/>
+              <a:srgbClr val="333D4A"/>
             </a:solidFill>
           </a:ln>
           <a:effectLst/>
@@ -8928,49 +9566,14 @@
       </p:sp>
       <p:sp>
         <p:nvSpPr>
-          <p:cNvPr id="27" name="TextBox 26"/>
+          <p:cNvPr id="32" name="TextBox 31"/>
           <p:cNvSpPr txBox="1"/>
           <p:nvPr/>
         </p:nvSpPr>
         <p:spPr>
           <a:xfrm>
-            <a:off x="10149840" y="4663440"/>
-            <a:ext cx="731520" cy="731520"/>
-          </a:xfrm>
-          <a:prstGeom prst="rect">
-            <a:avLst/>
-          </a:prstGeom>
-          <a:noFill/>
-        </p:spPr>
-        <p:txBody>
-          <a:bodyPr wrap="square" lIns="45720" rIns="45720" tIns="18288" bIns="18288" anchor="ctr">
-            <a:spAutoFit/>
-          </a:bodyPr>
-          <a:lstStyle/>
-          <a:p>
-            <a:pPr algn="ctr"/>
-            <a:r>
-              <a:rPr sz="1600" b="1" i="0">
-                <a:solidFill>
-                  <a:srgbClr val="0B2A4A"/>
-                </a:solidFill>
-                <a:latin typeface="Calibri"/>
-              </a:rPr>
-              <a:t>E</a:t>
-            </a:r>
-          </a:p>
-        </p:txBody>
-      </p:sp>
-      <p:sp>
-        <p:nvSpPr>
-          <p:cNvPr id="28" name="TextBox 27"/>
-          <p:cNvSpPr txBox="1"/>
-          <p:nvPr/>
-        </p:nvSpPr>
-        <p:spPr>
-          <a:xfrm>
-            <a:off x="6858000" y="1463040"/>
-            <a:ext cx="4572000" cy="457200"/>
+            <a:off x="7040880" y="4389120"/>
+            <a:ext cx="914400" cy="274320"/>
           </a:xfrm>
           <a:prstGeom prst="rect">
             <a:avLst/>
@@ -8985,13 +9588,385 @@
           <a:p>
             <a:pPr algn="ctr"/>
             <a:r>
-              <a:rPr sz="1600" b="1" i="0">
-                <a:solidFill>
-                  <a:srgbClr val="6A1B9A"/>
-                </a:solidFill>
-                <a:latin typeface="Calibri"/>
-              </a:rPr>
-              <a:t>Order: A -&gt; B -&gt; D -&gt; C -&gt; E</a:t>
+              <a:rPr sz="1100" b="1" i="0">
+                <a:solidFill>
+                  <a:srgbClr val="333D4A"/>
+                </a:solidFill>
+                <a:latin typeface="Calibri"/>
+              </a:rPr>
+              <a:t>C</a:t>
+            </a:r>
+          </a:p>
+        </p:txBody>
+      </p:sp>
+      <p:sp>
+        <p:nvSpPr>
+          <p:cNvPr id="33" name="TextBox 32"/>
+          <p:cNvSpPr txBox="1"/>
+          <p:nvPr/>
+        </p:nvSpPr>
+        <p:spPr>
+          <a:xfrm>
+            <a:off x="7955279" y="4389120"/>
+            <a:ext cx="1645920" cy="274320"/>
+          </a:xfrm>
+          <a:prstGeom prst="rect">
+            <a:avLst/>
+          </a:prstGeom>
+          <a:noFill/>
+        </p:spPr>
+        <p:txBody>
+          <a:bodyPr wrap="square" lIns="45720" rIns="45720" tIns="18288" bIns="18288" anchor="t">
+            <a:spAutoFit/>
+          </a:bodyPr>
+          <a:lstStyle/>
+          <a:p>
+            <a:pPr algn="ctr"/>
+            <a:r>
+              <a:rPr sz="1100" b="0" i="0">
+                <a:solidFill>
+                  <a:srgbClr val="333D4A"/>
+                </a:solidFill>
+                <a:latin typeface="Calibri"/>
+              </a:rPr>
+              <a:t>['D', 'E']</a:t>
+            </a:r>
+          </a:p>
+        </p:txBody>
+      </p:sp>
+      <p:sp>
+        <p:nvSpPr>
+          <p:cNvPr id="34" name="TextBox 33"/>
+          <p:cNvSpPr txBox="1"/>
+          <p:nvPr/>
+        </p:nvSpPr>
+        <p:spPr>
+          <a:xfrm>
+            <a:off x="9601200" y="4389120"/>
+            <a:ext cx="1645920" cy="274320"/>
+          </a:xfrm>
+          <a:prstGeom prst="rect">
+            <a:avLst/>
+          </a:prstGeom>
+          <a:noFill/>
+        </p:spPr>
+        <p:txBody>
+          <a:bodyPr wrap="square" lIns="45720" rIns="45720" tIns="18288" bIns="18288" anchor="t">
+            <a:spAutoFit/>
+          </a:bodyPr>
+          <a:lstStyle/>
+          <a:p>
+            <a:pPr algn="ctr"/>
+            <a:r>
+              <a:rPr sz="1100" b="0" i="0">
+                <a:solidFill>
+                  <a:srgbClr val="333D4A"/>
+                </a:solidFill>
+                <a:latin typeface="Calibri"/>
+              </a:rPr>
+              <a:t>{'A', 'B', 'C', 'D', 'E'}</a:t>
+            </a:r>
+          </a:p>
+        </p:txBody>
+      </p:sp>
+      <p:sp>
+        <p:nvSpPr>
+          <p:cNvPr id="35" name="Rectangle 34"/>
+          <p:cNvSpPr/>
+          <p:nvPr/>
+        </p:nvSpPr>
+        <p:spPr>
+          <a:xfrm>
+            <a:off x="7040880" y="4754880"/>
+            <a:ext cx="4206240" cy="365760"/>
+          </a:xfrm>
+          <a:prstGeom prst="rect">
+            <a:avLst/>
+          </a:prstGeom>
+          <a:solidFill>
+            <a:srgbClr val="FFFFFF"/>
+          </a:solidFill>
+          <a:ln w="12700">
+            <a:solidFill>
+              <a:srgbClr val="333D4A"/>
+            </a:solidFill>
+          </a:ln>
+          <a:effectLst/>
+        </p:spPr>
+        <p:style>
+          <a:lnRef idx="1">
+            <a:schemeClr val="accent1"/>
+          </a:lnRef>
+          <a:fillRef idx="3">
+            <a:schemeClr val="accent1"/>
+          </a:fillRef>
+          <a:effectRef idx="2">
+            <a:schemeClr val="accent1"/>
+          </a:effectRef>
+          <a:fontRef idx="minor">
+            <a:schemeClr val="lt1"/>
+          </a:fontRef>
+        </p:style>
+        <p:txBody>
+          <a:bodyPr rtlCol="0" anchor="ctr"/>
+          <a:lstStyle/>
+          <a:p>
+            <a:pPr algn="ctr"/>
+          </a:p>
+        </p:txBody>
+      </p:sp>
+      <p:sp>
+        <p:nvSpPr>
+          <p:cNvPr id="36" name="TextBox 35"/>
+          <p:cNvSpPr txBox="1"/>
+          <p:nvPr/>
+        </p:nvSpPr>
+        <p:spPr>
+          <a:xfrm>
+            <a:off x="7040880" y="4800600"/>
+            <a:ext cx="914400" cy="274320"/>
+          </a:xfrm>
+          <a:prstGeom prst="rect">
+            <a:avLst/>
+          </a:prstGeom>
+          <a:noFill/>
+        </p:spPr>
+        <p:txBody>
+          <a:bodyPr wrap="square" lIns="45720" rIns="45720" tIns="18288" bIns="18288" anchor="t">
+            <a:spAutoFit/>
+          </a:bodyPr>
+          <a:lstStyle/>
+          <a:p>
+            <a:pPr algn="ctr"/>
+            <a:r>
+              <a:rPr sz="1100" b="1" i="0">
+                <a:solidFill>
+                  <a:srgbClr val="333D4A"/>
+                </a:solidFill>
+                <a:latin typeface="Calibri"/>
+              </a:rPr>
+              <a:t>D</a:t>
+            </a:r>
+          </a:p>
+        </p:txBody>
+      </p:sp>
+      <p:sp>
+        <p:nvSpPr>
+          <p:cNvPr id="37" name="TextBox 36"/>
+          <p:cNvSpPr txBox="1"/>
+          <p:nvPr/>
+        </p:nvSpPr>
+        <p:spPr>
+          <a:xfrm>
+            <a:off x="7955279" y="4800600"/>
+            <a:ext cx="1645920" cy="274320"/>
+          </a:xfrm>
+          <a:prstGeom prst="rect">
+            <a:avLst/>
+          </a:prstGeom>
+          <a:noFill/>
+        </p:spPr>
+        <p:txBody>
+          <a:bodyPr wrap="square" lIns="45720" rIns="45720" tIns="18288" bIns="18288" anchor="t">
+            <a:spAutoFit/>
+          </a:bodyPr>
+          <a:lstStyle/>
+          <a:p>
+            <a:pPr algn="ctr"/>
+            <a:r>
+              <a:rPr sz="1100" b="0" i="0">
+                <a:solidFill>
+                  <a:srgbClr val="333D4A"/>
+                </a:solidFill>
+                <a:latin typeface="Calibri"/>
+              </a:rPr>
+              <a:t>['E']</a:t>
+            </a:r>
+          </a:p>
+        </p:txBody>
+      </p:sp>
+      <p:sp>
+        <p:nvSpPr>
+          <p:cNvPr id="38" name="TextBox 37"/>
+          <p:cNvSpPr txBox="1"/>
+          <p:nvPr/>
+        </p:nvSpPr>
+        <p:spPr>
+          <a:xfrm>
+            <a:off x="9601200" y="4800600"/>
+            <a:ext cx="1645920" cy="274320"/>
+          </a:xfrm>
+          <a:prstGeom prst="rect">
+            <a:avLst/>
+          </a:prstGeom>
+          <a:noFill/>
+        </p:spPr>
+        <p:txBody>
+          <a:bodyPr wrap="square" lIns="45720" rIns="45720" tIns="18288" bIns="18288" anchor="t">
+            <a:spAutoFit/>
+          </a:bodyPr>
+          <a:lstStyle/>
+          <a:p>
+            <a:pPr algn="ctr"/>
+            <a:r>
+              <a:rPr sz="1100" b="0" i="0">
+                <a:solidFill>
+                  <a:srgbClr val="333D4A"/>
+                </a:solidFill>
+                <a:latin typeface="Calibri"/>
+              </a:rPr>
+              <a:t>{'A', 'B', 'C', 'D', 'E'}</a:t>
+            </a:r>
+          </a:p>
+        </p:txBody>
+      </p:sp>
+      <p:sp>
+        <p:nvSpPr>
+          <p:cNvPr id="39" name="Rectangle 38"/>
+          <p:cNvSpPr/>
+          <p:nvPr/>
+        </p:nvSpPr>
+        <p:spPr>
+          <a:xfrm>
+            <a:off x="7040880" y="5166360"/>
+            <a:ext cx="4206240" cy="365760"/>
+          </a:xfrm>
+          <a:prstGeom prst="rect">
+            <a:avLst/>
+          </a:prstGeom>
+          <a:solidFill>
+            <a:srgbClr val="F2F4F7"/>
+          </a:solidFill>
+          <a:ln w="12700">
+            <a:solidFill>
+              <a:srgbClr val="333D4A"/>
+            </a:solidFill>
+          </a:ln>
+          <a:effectLst/>
+        </p:spPr>
+        <p:style>
+          <a:lnRef idx="1">
+            <a:schemeClr val="accent1"/>
+          </a:lnRef>
+          <a:fillRef idx="3">
+            <a:schemeClr val="accent1"/>
+          </a:fillRef>
+          <a:effectRef idx="2">
+            <a:schemeClr val="accent1"/>
+          </a:effectRef>
+          <a:fontRef idx="minor">
+            <a:schemeClr val="lt1"/>
+          </a:fontRef>
+        </p:style>
+        <p:txBody>
+          <a:bodyPr rtlCol="0" anchor="ctr"/>
+          <a:lstStyle/>
+          <a:p>
+            <a:pPr algn="ctr"/>
+          </a:p>
+        </p:txBody>
+      </p:sp>
+      <p:sp>
+        <p:nvSpPr>
+          <p:cNvPr id="40" name="TextBox 39"/>
+          <p:cNvSpPr txBox="1"/>
+          <p:nvPr/>
+        </p:nvSpPr>
+        <p:spPr>
+          <a:xfrm>
+            <a:off x="7040880" y="5212080"/>
+            <a:ext cx="914400" cy="274320"/>
+          </a:xfrm>
+          <a:prstGeom prst="rect">
+            <a:avLst/>
+          </a:prstGeom>
+          <a:noFill/>
+        </p:spPr>
+        <p:txBody>
+          <a:bodyPr wrap="square" lIns="45720" rIns="45720" tIns="18288" bIns="18288" anchor="t">
+            <a:spAutoFit/>
+          </a:bodyPr>
+          <a:lstStyle/>
+          <a:p>
+            <a:pPr algn="ctr"/>
+            <a:r>
+              <a:rPr sz="1100" b="1" i="0">
+                <a:solidFill>
+                  <a:srgbClr val="333D4A"/>
+                </a:solidFill>
+                <a:latin typeface="Calibri"/>
+              </a:rPr>
+              <a:t>E</a:t>
+            </a:r>
+          </a:p>
+        </p:txBody>
+      </p:sp>
+      <p:sp>
+        <p:nvSpPr>
+          <p:cNvPr id="41" name="TextBox 40"/>
+          <p:cNvSpPr txBox="1"/>
+          <p:nvPr/>
+        </p:nvSpPr>
+        <p:spPr>
+          <a:xfrm>
+            <a:off x="7955279" y="5212080"/>
+            <a:ext cx="1645920" cy="274320"/>
+          </a:xfrm>
+          <a:prstGeom prst="rect">
+            <a:avLst/>
+          </a:prstGeom>
+          <a:noFill/>
+        </p:spPr>
+        <p:txBody>
+          <a:bodyPr wrap="square" lIns="45720" rIns="45720" tIns="18288" bIns="18288" anchor="t">
+            <a:spAutoFit/>
+          </a:bodyPr>
+          <a:lstStyle/>
+          <a:p>
+            <a:pPr algn="ctr"/>
+            <a:r>
+              <a:rPr sz="1100" b="0" i="0">
+                <a:solidFill>
+                  <a:srgbClr val="333D4A"/>
+                </a:solidFill>
+                <a:latin typeface="Calibri"/>
+              </a:rPr>
+              <a:t>[]</a:t>
+            </a:r>
+          </a:p>
+        </p:txBody>
+      </p:sp>
+      <p:sp>
+        <p:nvSpPr>
+          <p:cNvPr id="42" name="TextBox 41"/>
+          <p:cNvSpPr txBox="1"/>
+          <p:nvPr/>
+        </p:nvSpPr>
+        <p:spPr>
+          <a:xfrm>
+            <a:off x="9601200" y="5212080"/>
+            <a:ext cx="1645920" cy="274320"/>
+          </a:xfrm>
+          <a:prstGeom prst="rect">
+            <a:avLst/>
+          </a:prstGeom>
+          <a:noFill/>
+        </p:spPr>
+        <p:txBody>
+          <a:bodyPr wrap="square" lIns="45720" rIns="45720" tIns="18288" bIns="18288" anchor="t">
+            <a:spAutoFit/>
+          </a:bodyPr>
+          <a:lstStyle/>
+          <a:p>
+            <a:pPr algn="ctr"/>
+            <a:r>
+              <a:rPr sz="1100" b="0" i="0">
+                <a:solidFill>
+                  <a:srgbClr val="333D4A"/>
+                </a:solidFill>
+                <a:latin typeface="Calibri"/>
+              </a:rPr>
+              <a:t>{'A', 'B', 'C', 'D', 'E'}</a:t>
             </a:r>
           </a:p>
         </p:txBody>
@@ -9132,7 +10107,7 @@
                 </a:solidFill>
                 <a:latin typeface="Calibri"/>
               </a:rPr>
-              <a:t>Summary</a:t>
+              <a:t>5. Depth-First Search (DFS): Concept</a:t>
             </a:r>
           </a:p>
         </p:txBody>
@@ -9167,7 +10142,7 @@
                 </a:solidFill>
                 <a:latin typeface="Calibri"/>
               </a:rPr>
-              <a:t>Graphs open up the rest of Computer Science</a:t>
+              <a:t>Plunging deep down a path until hitting a dead end</a:t>
             </a:r>
           </a:p>
         </p:txBody>
@@ -9281,7 +10256,7 @@
                 </a:solidFill>
                 <a:latin typeface="Calibri"/>
               </a:rPr>
-              <a:t>Slide 7 / 7</a:t>
+              <a:t>Slide 7 / 9</a:t>
             </a:r>
           </a:p>
         </p:txBody>
@@ -9295,42 +10270,7 @@
         <p:spPr>
           <a:xfrm>
             <a:off x="822960" y="1371600"/>
-            <a:ext cx="10515600" cy="914400"/>
-          </a:xfrm>
-          <a:prstGeom prst="rect">
-            <a:avLst/>
-          </a:prstGeom>
-          <a:noFill/>
-        </p:spPr>
-        <p:txBody>
-          <a:bodyPr wrap="square" lIns="45720" rIns="45720" tIns="18288" bIns="18288" anchor="t">
-            <a:spAutoFit/>
-          </a:bodyPr>
-          <a:lstStyle/>
-          <a:p>
-            <a:pPr algn="l"/>
-            <a:r>
-              <a:rPr sz="1800" b="1" i="0">
-                <a:solidFill>
-                  <a:srgbClr val="0B2A4A"/>
-                </a:solidFill>
-                <a:latin typeface="Calibri"/>
-              </a:rPr>
-              <a:t>Graphs are the most versatile data structure. Mastering BFS and DFS is mandatory for complex problem solving.</a:t>
-            </a:r>
-          </a:p>
-        </p:txBody>
-      </p:sp>
-      <p:sp>
-        <p:nvSpPr>
-          <p:cNvPr id="10" name="TextBox 9"/>
-          <p:cNvSpPr txBox="1"/>
-          <p:nvPr/>
-        </p:nvSpPr>
-        <p:spPr>
-          <a:xfrm>
-            <a:off x="822960" y="2286000"/>
-            <a:ext cx="10515600" cy="2743200"/>
+            <a:ext cx="5486400" cy="4572000"/>
           </a:xfrm>
           <a:prstGeom prst="rect">
             <a:avLst/>
@@ -9345,14 +10285,14 @@
           <a:p>
             <a:pPr algn="l">
               <a:lnSpc>
-                <a:spcPct val="140000"/>
+                <a:spcPct val="120000"/>
               </a:lnSpc>
               <a:spcAft>
                 <a:spcPts val="400"/>
               </a:spcAft>
             </a:pPr>
             <a:r>
-              <a:rPr sz="1600" b="1">
+              <a:rPr sz="1500" b="1">
                 <a:solidFill>
                   <a:srgbClr val="127A8A"/>
                 </a:solidFill>
@@ -9361,26 +10301,35 @@
               <a:t>▸  </a:t>
             </a:r>
             <a:r>
-              <a:rPr sz="1600">
+              <a:rPr sz="1500" b="1">
+                <a:solidFill>
+                  <a:srgbClr val="0B2A4A"/>
+                </a:solidFill>
+                <a:latin typeface="Calibri"/>
+              </a:rPr>
+              <a:t>The Depth-First Approach: </a:t>
+            </a:r>
+            <a:r>
+              <a:rPr sz="1500">
                 <a:solidFill>
                   <a:srgbClr val="333D4A"/>
                 </a:solidFill>
                 <a:latin typeface="Calibri"/>
               </a:rPr>
-              <a:t>Use Adjacency Lists almost always, unless the graph is extremely dense.</a:t>
+              <a:t>DFS starts at a source node and follows a branch as far as possible before backtracking. It prioritizes depth over breadth.</a:t>
             </a:r>
           </a:p>
           <a:p>
             <a:pPr algn="l">
               <a:lnSpc>
-                <a:spcPct val="140000"/>
+                <a:spcPct val="120000"/>
               </a:lnSpc>
               <a:spcAft>
                 <a:spcPts val="400"/>
               </a:spcAft>
             </a:pPr>
             <a:r>
-              <a:rPr sz="1600" b="1">
+              <a:rPr sz="1500" b="1">
                 <a:solidFill>
                   <a:srgbClr val="127A8A"/>
                 </a:solidFill>
@@ -9389,26 +10338,35 @@
               <a:t>▸  </a:t>
             </a:r>
             <a:r>
-              <a:rPr sz="1600">
+              <a:rPr sz="1500" b="1">
+                <a:solidFill>
+                  <a:srgbClr val="0B2A4A"/>
+                </a:solidFill>
+                <a:latin typeface="Calibri"/>
+              </a:rPr>
+              <a:t>LIFO Stack / Recursion: </a:t>
+            </a:r>
+            <a:r>
+              <a:rPr sz="1500">
                 <a:solidFill>
                   <a:srgbClr val="333D4A"/>
                 </a:solidFill>
                 <a:latin typeface="Calibri"/>
               </a:rPr>
-              <a:t>Need the Shortest Path in an unweighted graph? Use BFS.</a:t>
+              <a:t>DFS uses a Stack structure. This is naturally implemented via Recursion (the Call Stack), but can also be done iteratively with a custom Stack.</a:t>
             </a:r>
           </a:p>
           <a:p>
             <a:pPr algn="l">
               <a:lnSpc>
-                <a:spcPct val="140000"/>
+                <a:spcPct val="120000"/>
               </a:lnSpc>
               <a:spcAft>
                 <a:spcPts val="400"/>
               </a:spcAft>
             </a:pPr>
             <a:r>
-              <a:rPr sz="1600" b="1">
+              <a:rPr sz="1500" b="1">
                 <a:solidFill>
                   <a:srgbClr val="127A8A"/>
                 </a:solidFill>
@@ -9417,26 +10375,35 @@
               <a:t>▸  </a:t>
             </a:r>
             <a:r>
-              <a:rPr sz="1600">
+              <a:rPr sz="1500" b="1">
+                <a:solidFill>
+                  <a:srgbClr val="0B2A4A"/>
+                </a:solidFill>
+                <a:latin typeface="Calibri"/>
+              </a:rPr>
+              <a:t>Cycle Detection: </a:t>
+            </a:r>
+            <a:r>
+              <a:rPr sz="1500">
                 <a:solidFill>
                   <a:srgbClr val="333D4A"/>
                 </a:solidFill>
                 <a:latin typeface="Calibri"/>
               </a:rPr>
-              <a:t>Need to check if a path exists, or find cycles? DFS is usually cleaner to implement recursively.</a:t>
+              <a:t>Excellent for detecting cycles (loops) in graphs by tracking the path of the current recursive call.</a:t>
             </a:r>
           </a:p>
           <a:p>
             <a:pPr algn="l">
               <a:lnSpc>
-                <a:spcPct val="140000"/>
+                <a:spcPct val="120000"/>
               </a:lnSpc>
               <a:spcAft>
                 <a:spcPts val="400"/>
               </a:spcAft>
             </a:pPr>
             <a:r>
-              <a:rPr sz="1600" b="1">
+              <a:rPr sz="1500" b="1">
                 <a:solidFill>
                   <a:srgbClr val="127A8A"/>
                 </a:solidFill>
@@ -9445,33 +10412,79 @@
               <a:t>▸  </a:t>
             </a:r>
             <a:r>
-              <a:rPr sz="1600">
+              <a:rPr sz="1500" b="1">
+                <a:solidFill>
+                  <a:srgbClr val="0B2A4A"/>
+                </a:solidFill>
+                <a:latin typeface="Calibri"/>
+              </a:rPr>
+              <a:t>Topological Sorting: </a:t>
+            </a:r>
+            <a:r>
+              <a:rPr sz="1500">
                 <a:solidFill>
                   <a:srgbClr val="333D4A"/>
                 </a:solidFill>
                 <a:latin typeface="Calibri"/>
               </a:rPr>
-              <a:t>Always remember to track Visited nodes, otherwise cycles will cause infinite loops (Stack Overflow or Memory Exceeded).</a:t>
-            </a:r>
-          </a:p>
-        </p:txBody>
-      </p:sp>
-      <p:sp>
-        <p:nvSpPr>
-          <p:cNvPr id="11" name="Rectangle 10"/>
+              <a:t>Crucial for ordering tasks with dependencies (e.g. build systems, class prerequisites) using finish times.</a:t>
+            </a:r>
+          </a:p>
+          <a:p>
+            <a:pPr algn="l">
+              <a:lnSpc>
+                <a:spcPct val="120000"/>
+              </a:lnSpc>
+              <a:spcAft>
+                <a:spcPts val="400"/>
+              </a:spcAft>
+            </a:pPr>
+            <a:r>
+              <a:rPr sz="1500" b="1">
+                <a:solidFill>
+                  <a:srgbClr val="127A8A"/>
+                </a:solidFill>
+                <a:latin typeface="Calibri"/>
+              </a:rPr>
+              <a:t>▸  </a:t>
+            </a:r>
+            <a:r>
+              <a:rPr sz="1500" b="1">
+                <a:solidFill>
+                  <a:srgbClr val="0B2A4A"/>
+                </a:solidFill>
+                <a:latin typeface="Calibri"/>
+              </a:rPr>
+              <a:t>Complexity: </a:t>
+            </a:r>
+            <a:r>
+              <a:rPr sz="1500">
+                <a:solidFill>
+                  <a:srgbClr val="333D4A"/>
+                </a:solidFill>
+                <a:latin typeface="Calibri"/>
+              </a:rPr>
+              <a:t>Time: O(V + E) as every vertex is visited and every edge is checked. Space: O(V) for the recursion call stack in the worst case.</a:t>
+            </a:r>
+          </a:p>
+        </p:txBody>
+      </p:sp>
+      <p:sp>
+        <p:nvSpPr>
+          <p:cNvPr id="10" name="Rectangle 9"/>
           <p:cNvSpPr/>
           <p:nvPr/>
         </p:nvSpPr>
         <p:spPr>
           <a:xfrm>
-            <a:off x="822960" y="5029200"/>
-            <a:ext cx="10515600" cy="914400"/>
+            <a:off x="6858000" y="1371600"/>
+            <a:ext cx="4572000" cy="4572000"/>
           </a:xfrm>
           <a:prstGeom prst="rect">
             <a:avLst/>
           </a:prstGeom>
           <a:solidFill>
-            <a:srgbClr val="127A8A"/>
+            <a:srgbClr val="F2F4F7"/>
           </a:solidFill>
           <a:ln>
             <a:noFill/>
@@ -9502,14 +10515,235 @@
       </p:sp>
       <p:sp>
         <p:nvSpPr>
-          <p:cNvPr id="12" name="TextBox 11"/>
+          <p:cNvPr id="11" name="TextBox 10"/>
           <p:cNvSpPr txBox="1"/>
           <p:nvPr/>
         </p:nvSpPr>
         <p:spPr>
           <a:xfrm>
-            <a:off x="1005840" y="5120640"/>
-            <a:ext cx="10058400" cy="731520"/>
+            <a:off x="6858000" y="1463040"/>
+            <a:ext cx="4572000" cy="457200"/>
+          </a:xfrm>
+          <a:prstGeom prst="rect">
+            <a:avLst/>
+          </a:prstGeom>
+          <a:noFill/>
+        </p:spPr>
+        <p:txBody>
+          <a:bodyPr wrap="square" lIns="45720" rIns="45720" tIns="18288" bIns="18288" anchor="t">
+            <a:spAutoFit/>
+          </a:bodyPr>
+          <a:lstStyle/>
+          <a:p>
+            <a:pPr algn="ctr"/>
+            <a:r>
+              <a:rPr sz="1600" b="1" i="0">
+                <a:solidFill>
+                  <a:srgbClr val="0B2A4A"/>
+                </a:solidFill>
+                <a:latin typeface="Calibri"/>
+              </a:rPr>
+              <a:t>DFS Traversal Order Visual</a:t>
+            </a:r>
+          </a:p>
+        </p:txBody>
+      </p:sp>
+      <p:cxnSp>
+        <p:nvCxnSpPr>
+          <p:cNvPr id="12" name="Connector 11"/>
+          <p:cNvCxnSpPr/>
+          <p:nvPr/>
+        </p:nvCxnSpPr>
+        <p:spPr>
+          <a:xfrm flipH="1">
+            <a:off x="7772400" y="2103120"/>
+            <a:ext cx="1371600" cy="1188720"/>
+          </a:xfrm>
+          <a:prstGeom prst="line">
+            <a:avLst/>
+          </a:prstGeom>
+          <a:ln w="25400">
+            <a:solidFill>
+              <a:srgbClr val="E0A81F"/>
+            </a:solidFill>
+          </a:ln>
+        </p:spPr>
+        <p:style>
+          <a:lnRef idx="2">
+            <a:schemeClr val="accent1"/>
+          </a:lnRef>
+          <a:fillRef idx="0">
+            <a:schemeClr val="accent1"/>
+          </a:fillRef>
+          <a:effectRef idx="1">
+            <a:schemeClr val="accent1"/>
+          </a:effectRef>
+          <a:fontRef idx="minor">
+            <a:schemeClr val="tx1"/>
+          </a:fontRef>
+        </p:style>
+      </p:cxnSp>
+      <p:cxnSp>
+        <p:nvCxnSpPr>
+          <p:cNvPr id="13" name="Connector 12"/>
+          <p:cNvCxnSpPr/>
+          <p:nvPr/>
+        </p:nvCxnSpPr>
+        <p:spPr>
+          <a:xfrm>
+            <a:off x="7772400" y="3291840"/>
+            <a:ext cx="0" cy="1371600"/>
+          </a:xfrm>
+          <a:prstGeom prst="line">
+            <a:avLst/>
+          </a:prstGeom>
+          <a:ln w="25400">
+            <a:solidFill>
+              <a:srgbClr val="E0A81F"/>
+            </a:solidFill>
+          </a:ln>
+        </p:spPr>
+        <p:style>
+          <a:lnRef idx="2">
+            <a:schemeClr val="accent1"/>
+          </a:lnRef>
+          <a:fillRef idx="0">
+            <a:schemeClr val="accent1"/>
+          </a:fillRef>
+          <a:effectRef idx="1">
+            <a:schemeClr val="accent1"/>
+          </a:effectRef>
+          <a:fontRef idx="minor">
+            <a:schemeClr val="tx1"/>
+          </a:fontRef>
+        </p:style>
+      </p:cxnSp>
+      <p:cxnSp>
+        <p:nvCxnSpPr>
+          <p:cNvPr id="14" name="Connector 13"/>
+          <p:cNvCxnSpPr/>
+          <p:nvPr/>
+        </p:nvCxnSpPr>
+        <p:spPr>
+          <a:xfrm>
+            <a:off x="9144000" y="2103120"/>
+            <a:ext cx="1371600" cy="1188720"/>
+          </a:xfrm>
+          <a:prstGeom prst="line">
+            <a:avLst/>
+          </a:prstGeom>
+          <a:ln w="25400">
+            <a:solidFill>
+              <a:srgbClr val="E0A81F"/>
+            </a:solidFill>
+          </a:ln>
+        </p:spPr>
+        <p:style>
+          <a:lnRef idx="2">
+            <a:schemeClr val="accent1"/>
+          </a:lnRef>
+          <a:fillRef idx="0">
+            <a:schemeClr val="accent1"/>
+          </a:fillRef>
+          <a:effectRef idx="1">
+            <a:schemeClr val="accent1"/>
+          </a:effectRef>
+          <a:fontRef idx="minor">
+            <a:schemeClr val="tx1"/>
+          </a:fontRef>
+        </p:style>
+      </p:cxnSp>
+      <p:cxnSp>
+        <p:nvCxnSpPr>
+          <p:cNvPr id="15" name="Connector 14"/>
+          <p:cNvCxnSpPr/>
+          <p:nvPr/>
+        </p:nvCxnSpPr>
+        <p:spPr>
+          <a:xfrm>
+            <a:off x="10515600" y="3291840"/>
+            <a:ext cx="0" cy="1371600"/>
+          </a:xfrm>
+          <a:prstGeom prst="line">
+            <a:avLst/>
+          </a:prstGeom>
+          <a:ln w="25400">
+            <a:solidFill>
+              <a:srgbClr val="E0A81F"/>
+            </a:solidFill>
+          </a:ln>
+        </p:spPr>
+        <p:style>
+          <a:lnRef idx="2">
+            <a:schemeClr val="accent1"/>
+          </a:lnRef>
+          <a:fillRef idx="0">
+            <a:schemeClr val="accent1"/>
+          </a:fillRef>
+          <a:effectRef idx="1">
+            <a:schemeClr val="accent1"/>
+          </a:effectRef>
+          <a:fontRef idx="minor">
+            <a:schemeClr val="tx1"/>
+          </a:fontRef>
+        </p:style>
+      </p:cxnSp>
+      <p:sp>
+        <p:nvSpPr>
+          <p:cNvPr id="16" name="Oval 15"/>
+          <p:cNvSpPr/>
+          <p:nvPr/>
+        </p:nvSpPr>
+        <p:spPr>
+          <a:xfrm>
+            <a:off x="8778240" y="1737360"/>
+            <a:ext cx="731520" cy="731520"/>
+          </a:xfrm>
+          <a:prstGeom prst="ellipse">
+            <a:avLst/>
+          </a:prstGeom>
+          <a:solidFill>
+            <a:srgbClr val="6A1B9A"/>
+          </a:solidFill>
+          <a:ln w="25400">
+            <a:solidFill>
+              <a:srgbClr val="0B2A4A"/>
+            </a:solidFill>
+          </a:ln>
+          <a:effectLst/>
+        </p:spPr>
+        <p:style>
+          <a:lnRef idx="1">
+            <a:schemeClr val="accent1"/>
+          </a:lnRef>
+          <a:fillRef idx="3">
+            <a:schemeClr val="accent1"/>
+          </a:fillRef>
+          <a:effectRef idx="2">
+            <a:schemeClr val="accent1"/>
+          </a:effectRef>
+          <a:fontRef idx="minor">
+            <a:schemeClr val="lt1"/>
+          </a:fontRef>
+        </p:style>
+        <p:txBody>
+          <a:bodyPr rtlCol="0" anchor="ctr"/>
+          <a:lstStyle/>
+          <a:p>
+            <a:pPr algn="ctr"/>
+          </a:p>
+        </p:txBody>
+      </p:sp>
+      <p:sp>
+        <p:nvSpPr>
+          <p:cNvPr id="17" name="TextBox 16"/>
+          <p:cNvSpPr txBox="1"/>
+          <p:nvPr/>
+        </p:nvSpPr>
+        <p:spPr>
+          <a:xfrm>
+            <a:off x="8778240" y="1737360"/>
+            <a:ext cx="731520" cy="731520"/>
           </a:xfrm>
           <a:prstGeom prst="rect">
             <a:avLst/>
@@ -9526,11 +10760,2283 @@
             <a:r>
               <a:rPr sz="1600" b="1" i="0">
                 <a:solidFill>
+                  <a:srgbClr val="0B2A4A"/>
+                </a:solidFill>
+                <a:latin typeface="Calibri"/>
+              </a:rPr>
+              <a:t>A</a:t>
+            </a:r>
+          </a:p>
+        </p:txBody>
+      </p:sp>
+      <p:sp>
+        <p:nvSpPr>
+          <p:cNvPr id="18" name="Oval 17"/>
+          <p:cNvSpPr/>
+          <p:nvPr/>
+        </p:nvSpPr>
+        <p:spPr>
+          <a:xfrm>
+            <a:off x="7406640" y="2926080"/>
+            <a:ext cx="731520" cy="731520"/>
+          </a:xfrm>
+          <a:prstGeom prst="ellipse">
+            <a:avLst/>
+          </a:prstGeom>
+          <a:solidFill>
+            <a:srgbClr val="E0A81F"/>
+          </a:solidFill>
+          <a:ln w="25400">
+            <a:solidFill>
+              <a:srgbClr val="0B2A4A"/>
+            </a:solidFill>
+          </a:ln>
+          <a:effectLst/>
+        </p:spPr>
+        <p:style>
+          <a:lnRef idx="1">
+            <a:schemeClr val="accent1"/>
+          </a:lnRef>
+          <a:fillRef idx="3">
+            <a:schemeClr val="accent1"/>
+          </a:fillRef>
+          <a:effectRef idx="2">
+            <a:schemeClr val="accent1"/>
+          </a:effectRef>
+          <a:fontRef idx="minor">
+            <a:schemeClr val="lt1"/>
+          </a:fontRef>
+        </p:style>
+        <p:txBody>
+          <a:bodyPr rtlCol="0" anchor="ctr"/>
+          <a:lstStyle/>
+          <a:p>
+            <a:pPr algn="ctr"/>
+          </a:p>
+        </p:txBody>
+      </p:sp>
+      <p:sp>
+        <p:nvSpPr>
+          <p:cNvPr id="19" name="TextBox 18"/>
+          <p:cNvSpPr txBox="1"/>
+          <p:nvPr/>
+        </p:nvSpPr>
+        <p:spPr>
+          <a:xfrm>
+            <a:off x="7406640" y="2926080"/>
+            <a:ext cx="731520" cy="731520"/>
+          </a:xfrm>
+          <a:prstGeom prst="rect">
+            <a:avLst/>
+          </a:prstGeom>
+          <a:noFill/>
+        </p:spPr>
+        <p:txBody>
+          <a:bodyPr wrap="square" lIns="45720" rIns="45720" tIns="18288" bIns="18288" anchor="ctr">
+            <a:spAutoFit/>
+          </a:bodyPr>
+          <a:lstStyle/>
+          <a:p>
+            <a:pPr algn="ctr"/>
+            <a:r>
+              <a:rPr sz="1600" b="1" i="0">
+                <a:solidFill>
+                  <a:srgbClr val="0B2A4A"/>
+                </a:solidFill>
+                <a:latin typeface="Calibri"/>
+              </a:rPr>
+              <a:t>B</a:t>
+            </a:r>
+          </a:p>
+        </p:txBody>
+      </p:sp>
+      <p:sp>
+        <p:nvSpPr>
+          <p:cNvPr id="20" name="Oval 19"/>
+          <p:cNvSpPr/>
+          <p:nvPr/>
+        </p:nvSpPr>
+        <p:spPr>
+          <a:xfrm>
+            <a:off x="10149840" y="2926080"/>
+            <a:ext cx="731520" cy="731520"/>
+          </a:xfrm>
+          <a:prstGeom prst="ellipse">
+            <a:avLst/>
+          </a:prstGeom>
+          <a:solidFill>
+            <a:srgbClr val="FFFFFF"/>
+          </a:solidFill>
+          <a:ln w="25400">
+            <a:solidFill>
+              <a:srgbClr val="0B2A4A"/>
+            </a:solidFill>
+          </a:ln>
+          <a:effectLst/>
+        </p:spPr>
+        <p:style>
+          <a:lnRef idx="1">
+            <a:schemeClr val="accent1"/>
+          </a:lnRef>
+          <a:fillRef idx="3">
+            <a:schemeClr val="accent1"/>
+          </a:fillRef>
+          <a:effectRef idx="2">
+            <a:schemeClr val="accent1"/>
+          </a:effectRef>
+          <a:fontRef idx="minor">
+            <a:schemeClr val="lt1"/>
+          </a:fontRef>
+        </p:style>
+        <p:txBody>
+          <a:bodyPr rtlCol="0" anchor="ctr"/>
+          <a:lstStyle/>
+          <a:p>
+            <a:pPr algn="ctr"/>
+          </a:p>
+        </p:txBody>
+      </p:sp>
+      <p:sp>
+        <p:nvSpPr>
+          <p:cNvPr id="21" name="TextBox 20"/>
+          <p:cNvSpPr txBox="1"/>
+          <p:nvPr/>
+        </p:nvSpPr>
+        <p:spPr>
+          <a:xfrm>
+            <a:off x="10149840" y="2926080"/>
+            <a:ext cx="731520" cy="731520"/>
+          </a:xfrm>
+          <a:prstGeom prst="rect">
+            <a:avLst/>
+          </a:prstGeom>
+          <a:noFill/>
+        </p:spPr>
+        <p:txBody>
+          <a:bodyPr wrap="square" lIns="45720" rIns="45720" tIns="18288" bIns="18288" anchor="ctr">
+            <a:spAutoFit/>
+          </a:bodyPr>
+          <a:lstStyle/>
+          <a:p>
+            <a:pPr algn="ctr"/>
+            <a:r>
+              <a:rPr sz="1600" b="1" i="0">
+                <a:solidFill>
+                  <a:srgbClr val="0B2A4A"/>
+                </a:solidFill>
+                <a:latin typeface="Calibri"/>
+              </a:rPr>
+              <a:t>C</a:t>
+            </a:r>
+          </a:p>
+        </p:txBody>
+      </p:sp>
+      <p:sp>
+        <p:nvSpPr>
+          <p:cNvPr id="22" name="Oval 21"/>
+          <p:cNvSpPr/>
+          <p:nvPr/>
+        </p:nvSpPr>
+        <p:spPr>
+          <a:xfrm>
+            <a:off x="7406640" y="4297680"/>
+            <a:ext cx="731520" cy="731520"/>
+          </a:xfrm>
+          <a:prstGeom prst="ellipse">
+            <a:avLst/>
+          </a:prstGeom>
+          <a:solidFill>
+            <a:srgbClr val="E0A81F"/>
+          </a:solidFill>
+          <a:ln w="25400">
+            <a:solidFill>
+              <a:srgbClr val="0B2A4A"/>
+            </a:solidFill>
+          </a:ln>
+          <a:effectLst/>
+        </p:spPr>
+        <p:style>
+          <a:lnRef idx="1">
+            <a:schemeClr val="accent1"/>
+          </a:lnRef>
+          <a:fillRef idx="3">
+            <a:schemeClr val="accent1"/>
+          </a:fillRef>
+          <a:effectRef idx="2">
+            <a:schemeClr val="accent1"/>
+          </a:effectRef>
+          <a:fontRef idx="minor">
+            <a:schemeClr val="lt1"/>
+          </a:fontRef>
+        </p:style>
+        <p:txBody>
+          <a:bodyPr rtlCol="0" anchor="ctr"/>
+          <a:lstStyle/>
+          <a:p>
+            <a:pPr algn="ctr"/>
+          </a:p>
+        </p:txBody>
+      </p:sp>
+      <p:sp>
+        <p:nvSpPr>
+          <p:cNvPr id="23" name="TextBox 22"/>
+          <p:cNvSpPr txBox="1"/>
+          <p:nvPr/>
+        </p:nvSpPr>
+        <p:spPr>
+          <a:xfrm>
+            <a:off x="7406640" y="4297680"/>
+            <a:ext cx="731520" cy="731520"/>
+          </a:xfrm>
+          <a:prstGeom prst="rect">
+            <a:avLst/>
+          </a:prstGeom>
+          <a:noFill/>
+        </p:spPr>
+        <p:txBody>
+          <a:bodyPr wrap="square" lIns="45720" rIns="45720" tIns="18288" bIns="18288" anchor="ctr">
+            <a:spAutoFit/>
+          </a:bodyPr>
+          <a:lstStyle/>
+          <a:p>
+            <a:pPr algn="ctr"/>
+            <a:r>
+              <a:rPr sz="1600" b="1" i="0">
+                <a:solidFill>
+                  <a:srgbClr val="0B2A4A"/>
+                </a:solidFill>
+                <a:latin typeface="Calibri"/>
+              </a:rPr>
+              <a:t>D</a:t>
+            </a:r>
+          </a:p>
+        </p:txBody>
+      </p:sp>
+      <p:sp>
+        <p:nvSpPr>
+          <p:cNvPr id="24" name="Oval 23"/>
+          <p:cNvSpPr/>
+          <p:nvPr/>
+        </p:nvSpPr>
+        <p:spPr>
+          <a:xfrm>
+            <a:off x="10149840" y="4297680"/>
+            <a:ext cx="731520" cy="731520"/>
+          </a:xfrm>
+          <a:prstGeom prst="ellipse">
+            <a:avLst/>
+          </a:prstGeom>
+          <a:solidFill>
+            <a:srgbClr val="FFFFFF"/>
+          </a:solidFill>
+          <a:ln w="25400">
+            <a:solidFill>
+              <a:srgbClr val="0B2A4A"/>
+            </a:solidFill>
+          </a:ln>
+          <a:effectLst/>
+        </p:spPr>
+        <p:style>
+          <a:lnRef idx="1">
+            <a:schemeClr val="accent1"/>
+          </a:lnRef>
+          <a:fillRef idx="3">
+            <a:schemeClr val="accent1"/>
+          </a:fillRef>
+          <a:effectRef idx="2">
+            <a:schemeClr val="accent1"/>
+          </a:effectRef>
+          <a:fontRef idx="minor">
+            <a:schemeClr val="lt1"/>
+          </a:fontRef>
+        </p:style>
+        <p:txBody>
+          <a:bodyPr rtlCol="0" anchor="ctr"/>
+          <a:lstStyle/>
+          <a:p>
+            <a:pPr algn="ctr"/>
+          </a:p>
+        </p:txBody>
+      </p:sp>
+      <p:sp>
+        <p:nvSpPr>
+          <p:cNvPr id="25" name="TextBox 24"/>
+          <p:cNvSpPr txBox="1"/>
+          <p:nvPr/>
+        </p:nvSpPr>
+        <p:spPr>
+          <a:xfrm>
+            <a:off x="10149840" y="4297680"/>
+            <a:ext cx="731520" cy="731520"/>
+          </a:xfrm>
+          <a:prstGeom prst="rect">
+            <a:avLst/>
+          </a:prstGeom>
+          <a:noFill/>
+        </p:spPr>
+        <p:txBody>
+          <a:bodyPr wrap="square" lIns="45720" rIns="45720" tIns="18288" bIns="18288" anchor="ctr">
+            <a:spAutoFit/>
+          </a:bodyPr>
+          <a:lstStyle/>
+          <a:p>
+            <a:pPr algn="ctr"/>
+            <a:r>
+              <a:rPr sz="1600" b="1" i="0">
+                <a:solidFill>
+                  <a:srgbClr val="0B2A4A"/>
+                </a:solidFill>
+                <a:latin typeface="Calibri"/>
+              </a:rPr>
+              <a:t>E</a:t>
+            </a:r>
+          </a:p>
+        </p:txBody>
+      </p:sp>
+      <p:sp>
+        <p:nvSpPr>
+          <p:cNvPr id="26" name="TextBox 25"/>
+          <p:cNvSpPr txBox="1"/>
+          <p:nvPr/>
+        </p:nvSpPr>
+        <p:spPr>
+          <a:xfrm>
+            <a:off x="6858000" y="5303520"/>
+            <a:ext cx="4572000" cy="548640"/>
+          </a:xfrm>
+          <a:prstGeom prst="rect">
+            <a:avLst/>
+          </a:prstGeom>
+          <a:noFill/>
+        </p:spPr>
+        <p:txBody>
+          <a:bodyPr wrap="square" lIns="45720" rIns="45720" tIns="18288" bIns="18288" anchor="t">
+            <a:spAutoFit/>
+          </a:bodyPr>
+          <a:lstStyle/>
+          <a:p>
+            <a:pPr algn="ctr"/>
+            <a:r>
+              <a:rPr sz="1300" b="1" i="0">
+                <a:solidFill>
+                  <a:srgbClr val="333D4A"/>
+                </a:solidFill>
+                <a:latin typeface="Calibri"/>
+              </a:rPr>
+              <a:t>First Branch (Purple ➔ Gold)  ➔  Second Branch (White)</a:t>
+            </a:r>
+          </a:p>
+        </p:txBody>
+      </p:sp>
+    </p:spTree>
+  </p:cSld>
+  <p:clrMapOvr>
+    <a:masterClrMapping/>
+  </p:clrMapOvr>
+</p:sld>
+</file>
+
+<file path=ppt/slides/slide9.xml><?xml version="1.0" encoding="utf-8"?>
+<p:sld xmlns:a="http://schemas.openxmlformats.org/drawingml/2006/main" xmlns:p="http://schemas.openxmlformats.org/presentationml/2006/main" xmlns:r="http://schemas.openxmlformats.org/officeDocument/2006/relationships">
+  <p:cSld>
+    <p:spTree>
+      <p:nvGrpSpPr>
+        <p:cNvPr id="1" name=""/>
+        <p:cNvGrpSpPr/>
+        <p:nvPr/>
+      </p:nvGrpSpPr>
+      <p:grpSpPr/>
+      <p:sp>
+        <p:nvSpPr>
+          <p:cNvPr id="2" name="Rectangle 1"/>
+          <p:cNvSpPr/>
+          <p:nvPr/>
+        </p:nvSpPr>
+        <p:spPr>
+          <a:xfrm>
+            <a:off x="0" y="0"/>
+            <a:ext cx="320040" cy="6858000"/>
+          </a:xfrm>
+          <a:prstGeom prst="rect">
+            <a:avLst/>
+          </a:prstGeom>
+          <a:solidFill>
+            <a:srgbClr val="0B2A4A"/>
+          </a:solidFill>
+          <a:ln>
+            <a:noFill/>
+          </a:ln>
+          <a:effectLst/>
+        </p:spPr>
+        <p:style>
+          <a:lnRef idx="1">
+            <a:schemeClr val="accent1"/>
+          </a:lnRef>
+          <a:fillRef idx="3">
+            <a:schemeClr val="accent1"/>
+          </a:fillRef>
+          <a:effectRef idx="2">
+            <a:schemeClr val="accent1"/>
+          </a:effectRef>
+          <a:fontRef idx="minor">
+            <a:schemeClr val="lt1"/>
+          </a:fontRef>
+        </p:style>
+        <p:txBody>
+          <a:bodyPr rtlCol="0" anchor="ctr"/>
+          <a:lstStyle/>
+          <a:p>
+            <a:pPr algn="ctr"/>
+          </a:p>
+        </p:txBody>
+      </p:sp>
+      <p:sp>
+        <p:nvSpPr>
+          <p:cNvPr id="3" name="Rectangle 2"/>
+          <p:cNvSpPr/>
+          <p:nvPr/>
+        </p:nvSpPr>
+        <p:spPr>
+          <a:xfrm>
+            <a:off x="320040" y="0"/>
+            <a:ext cx="11871655" cy="73152"/>
+          </a:xfrm>
+          <a:prstGeom prst="rect">
+            <a:avLst/>
+          </a:prstGeom>
+          <a:solidFill>
+            <a:srgbClr val="E0A81F"/>
+          </a:solidFill>
+          <a:ln>
+            <a:noFill/>
+          </a:ln>
+          <a:effectLst/>
+        </p:spPr>
+        <p:style>
+          <a:lnRef idx="1">
+            <a:schemeClr val="accent1"/>
+          </a:lnRef>
+          <a:fillRef idx="3">
+            <a:schemeClr val="accent1"/>
+          </a:fillRef>
+          <a:effectRef idx="2">
+            <a:schemeClr val="accent1"/>
+          </a:effectRef>
+          <a:fontRef idx="minor">
+            <a:schemeClr val="lt1"/>
+          </a:fontRef>
+        </p:style>
+        <p:txBody>
+          <a:bodyPr rtlCol="0" anchor="ctr"/>
+          <a:lstStyle/>
+          <a:p>
+            <a:pPr algn="ctr"/>
+          </a:p>
+        </p:txBody>
+      </p:sp>
+      <p:sp>
+        <p:nvSpPr>
+          <p:cNvPr id="4" name="TextBox 3"/>
+          <p:cNvSpPr txBox="1"/>
+          <p:nvPr/>
+        </p:nvSpPr>
+        <p:spPr>
+          <a:xfrm>
+            <a:off x="548640" y="164592"/>
+            <a:ext cx="10515600" cy="640080"/>
+          </a:xfrm>
+          <a:prstGeom prst="rect">
+            <a:avLst/>
+          </a:prstGeom>
+          <a:noFill/>
+        </p:spPr>
+        <p:txBody>
+          <a:bodyPr wrap="square" lIns="45720" rIns="45720" tIns="18288" bIns="18288" anchor="t">
+            <a:spAutoFit/>
+          </a:bodyPr>
+          <a:lstStyle/>
+          <a:p>
+            <a:pPr algn="l"/>
+            <a:r>
+              <a:rPr sz="3000" b="1" i="0">
+                <a:solidFill>
+                  <a:srgbClr val="0B2A4A"/>
+                </a:solidFill>
+                <a:latin typeface="Calibri"/>
+              </a:rPr>
+              <a:t>5. Depth-First Search (DFS): Code &amp; Trace</a:t>
+            </a:r>
+          </a:p>
+        </p:txBody>
+      </p:sp>
+      <p:sp>
+        <p:nvSpPr>
+          <p:cNvPr id="5" name="TextBox 4"/>
+          <p:cNvSpPr txBox="1"/>
+          <p:nvPr/>
+        </p:nvSpPr>
+        <p:spPr>
+          <a:xfrm>
+            <a:off x="548640" y="713232"/>
+            <a:ext cx="10515600" cy="411480"/>
+          </a:xfrm>
+          <a:prstGeom prst="rect">
+            <a:avLst/>
+          </a:prstGeom>
+          <a:noFill/>
+        </p:spPr>
+        <p:txBody>
+          <a:bodyPr wrap="square" lIns="45720" rIns="45720" tIns="18288" bIns="18288" anchor="t">
+            <a:spAutoFit/>
+          </a:bodyPr>
+          <a:lstStyle/>
+          <a:p>
+            <a:pPr algn="l"/>
+            <a:r>
+              <a:rPr sz="1500" b="0" i="1">
+                <a:solidFill>
+                  <a:srgbClr val="127A8A"/>
+                </a:solidFill>
+                <a:latin typeface="Calibri"/>
+              </a:rPr>
+              <a:t>Implementing and executing the recursive DFS</a:t>
+            </a:r>
+          </a:p>
+        </p:txBody>
+      </p:sp>
+      <p:sp>
+        <p:nvSpPr>
+          <p:cNvPr id="6" name="Rectangle 5"/>
+          <p:cNvSpPr/>
+          <p:nvPr/>
+        </p:nvSpPr>
+        <p:spPr>
+          <a:xfrm>
+            <a:off x="548640" y="1115568"/>
+            <a:ext cx="1828800" cy="36576"/>
+          </a:xfrm>
+          <a:prstGeom prst="rect">
+            <a:avLst/>
+          </a:prstGeom>
+          <a:solidFill>
+            <a:srgbClr val="E0A81F"/>
+          </a:solidFill>
+          <a:ln>
+            <a:noFill/>
+          </a:ln>
+          <a:effectLst/>
+        </p:spPr>
+        <p:style>
+          <a:lnRef idx="1">
+            <a:schemeClr val="accent1"/>
+          </a:lnRef>
+          <a:fillRef idx="3">
+            <a:schemeClr val="accent1"/>
+          </a:fillRef>
+          <a:effectRef idx="2">
+            <a:schemeClr val="accent1"/>
+          </a:effectRef>
+          <a:fontRef idx="minor">
+            <a:schemeClr val="lt1"/>
+          </a:fontRef>
+        </p:style>
+        <p:txBody>
+          <a:bodyPr rtlCol="0" anchor="ctr"/>
+          <a:lstStyle/>
+          <a:p>
+            <a:pPr algn="ctr"/>
+          </a:p>
+        </p:txBody>
+      </p:sp>
+      <p:sp>
+        <p:nvSpPr>
+          <p:cNvPr id="7" name="TextBox 6"/>
+          <p:cNvSpPr txBox="1"/>
+          <p:nvPr/>
+        </p:nvSpPr>
+        <p:spPr>
+          <a:xfrm>
+            <a:off x="548640" y="6446520"/>
+            <a:ext cx="7315200" cy="274320"/>
+          </a:xfrm>
+          <a:prstGeom prst="rect">
+            <a:avLst/>
+          </a:prstGeom>
+          <a:noFill/>
+        </p:spPr>
+        <p:txBody>
+          <a:bodyPr wrap="square" lIns="45720" rIns="45720" tIns="18288" bIns="18288" anchor="t">
+            <a:spAutoFit/>
+          </a:bodyPr>
+          <a:lstStyle/>
+          <a:p>
+            <a:pPr algn="l"/>
+            <a:r>
+              <a:rPr sz="1000" b="0" i="1">
+                <a:solidFill>
+                  <a:srgbClr val="333D4A"/>
+                </a:solidFill>
+                <a:latin typeface="Calibri"/>
+              </a:rPr>
+              <a:t>Data Structures &amp; Algorithms · Week 08 · Graphs I</a:t>
+            </a:r>
+          </a:p>
+        </p:txBody>
+      </p:sp>
+      <p:sp>
+        <p:nvSpPr>
+          <p:cNvPr id="8" name="TextBox 7"/>
+          <p:cNvSpPr txBox="1"/>
+          <p:nvPr/>
+        </p:nvSpPr>
+        <p:spPr>
+          <a:xfrm>
+            <a:off x="10728655" y="6446520"/>
+            <a:ext cx="1097280" cy="274320"/>
+          </a:xfrm>
+          <a:prstGeom prst="rect">
+            <a:avLst/>
+          </a:prstGeom>
+          <a:noFill/>
+        </p:spPr>
+        <p:txBody>
+          <a:bodyPr wrap="square" lIns="45720" rIns="45720" tIns="18288" bIns="18288" anchor="t">
+            <a:spAutoFit/>
+          </a:bodyPr>
+          <a:lstStyle/>
+          <a:p>
+            <a:pPr algn="r"/>
+            <a:r>
+              <a:rPr sz="1000" b="0" i="0">
+                <a:solidFill>
+                  <a:srgbClr val="333D4A"/>
+                </a:solidFill>
+                <a:latin typeface="Calibri"/>
+              </a:rPr>
+              <a:t>Slide 8 / 9</a:t>
+            </a:r>
+          </a:p>
+        </p:txBody>
+      </p:sp>
+      <p:sp>
+        <p:nvSpPr>
+          <p:cNvPr id="9" name="Rectangle 8"/>
+          <p:cNvSpPr/>
+          <p:nvPr/>
+        </p:nvSpPr>
+        <p:spPr>
+          <a:xfrm>
+            <a:off x="822960" y="1371600"/>
+            <a:ext cx="5486400" cy="4572000"/>
+          </a:xfrm>
+          <a:prstGeom prst="rect">
+            <a:avLst/>
+          </a:prstGeom>
+          <a:solidFill>
+            <a:srgbClr val="1E1E2E"/>
+          </a:solidFill>
+          <a:ln>
+            <a:noFill/>
+          </a:ln>
+          <a:effectLst/>
+        </p:spPr>
+        <p:style>
+          <a:lnRef idx="1">
+            <a:schemeClr val="accent1"/>
+          </a:lnRef>
+          <a:fillRef idx="3">
+            <a:schemeClr val="accent1"/>
+          </a:fillRef>
+          <a:effectRef idx="2">
+            <a:schemeClr val="accent1"/>
+          </a:effectRef>
+          <a:fontRef idx="minor">
+            <a:schemeClr val="lt1"/>
+          </a:fontRef>
+        </p:style>
+        <p:txBody>
+          <a:bodyPr rtlCol="0" anchor="ctr"/>
+          <a:lstStyle/>
+          <a:p>
+            <a:pPr algn="ctr"/>
+          </a:p>
+        </p:txBody>
+      </p:sp>
+      <p:sp>
+        <p:nvSpPr>
+          <p:cNvPr id="10" name="Rectangle 9"/>
+          <p:cNvSpPr/>
+          <p:nvPr/>
+        </p:nvSpPr>
+        <p:spPr>
+          <a:xfrm>
+            <a:off x="822960" y="1371600"/>
+            <a:ext cx="73152" cy="4572000"/>
+          </a:xfrm>
+          <a:prstGeom prst="rect">
+            <a:avLst/>
+          </a:prstGeom>
+          <a:solidFill>
+            <a:srgbClr val="E0A81F"/>
+          </a:solidFill>
+          <a:ln>
+            <a:noFill/>
+          </a:ln>
+          <a:effectLst/>
+        </p:spPr>
+        <p:style>
+          <a:lnRef idx="1">
+            <a:schemeClr val="accent1"/>
+          </a:lnRef>
+          <a:fillRef idx="3">
+            <a:schemeClr val="accent1"/>
+          </a:fillRef>
+          <a:effectRef idx="2">
+            <a:schemeClr val="accent1"/>
+          </a:effectRef>
+          <a:fontRef idx="minor">
+            <a:schemeClr val="lt1"/>
+          </a:fontRef>
+        </p:style>
+        <p:txBody>
+          <a:bodyPr rtlCol="0" anchor="ctr"/>
+          <a:lstStyle/>
+          <a:p>
+            <a:pPr algn="ctr"/>
+          </a:p>
+        </p:txBody>
+      </p:sp>
+      <p:sp>
+        <p:nvSpPr>
+          <p:cNvPr id="11" name="TextBox 10"/>
+          <p:cNvSpPr txBox="1"/>
+          <p:nvPr/>
+        </p:nvSpPr>
+        <p:spPr>
+          <a:xfrm>
+            <a:off x="960120" y="1463040"/>
+            <a:ext cx="5257800" cy="4389120"/>
+          </a:xfrm>
+          <a:prstGeom prst="rect">
+            <a:avLst/>
+          </a:prstGeom>
+          <a:noFill/>
+        </p:spPr>
+        <p:txBody>
+          <a:bodyPr wrap="square" lIns="45720" rIns="45720">
+            <a:spAutoFit/>
+          </a:bodyPr>
+          <a:lstStyle/>
+          <a:p>
+            <a:pPr algn="l">
+              <a:lnSpc>
+                <a:spcPct val="115000"/>
+              </a:lnSpc>
+            </a:pPr>
+            <a:r>
+              <a:rPr sz="1300">
+                <a:solidFill>
+                  <a:srgbClr val="E6E6E6"/>
+                </a:solidFill>
+                <a:latin typeface="Consolas"/>
+              </a:rPr>
+              <a:t>def dfs(graph, node, visited=None):</a:t>
+            </a:r>
+          </a:p>
+          <a:p>
+            <a:pPr algn="l">
+              <a:lnSpc>
+                <a:spcPct val="115000"/>
+              </a:lnSpc>
+            </a:pPr>
+            <a:r>
+              <a:rPr sz="1300">
+                <a:solidFill>
+                  <a:srgbClr val="E6E6E6"/>
+                </a:solidFill>
+                <a:latin typeface="Consolas"/>
+              </a:rPr>
+              <a:t>    if visited is None:</a:t>
+            </a:r>
+          </a:p>
+          <a:p>
+            <a:pPr algn="l">
+              <a:lnSpc>
+                <a:spcPct val="115000"/>
+              </a:lnSpc>
+            </a:pPr>
+            <a:r>
+              <a:rPr sz="1300">
+                <a:solidFill>
+                  <a:srgbClr val="E6E6E6"/>
+                </a:solidFill>
+                <a:latin typeface="Consolas"/>
+              </a:rPr>
+              <a:t>        visited = set()</a:t>
+            </a:r>
+          </a:p>
+          <a:p>
+            <a:pPr algn="l">
+              <a:lnSpc>
+                <a:spcPct val="115000"/>
+              </a:lnSpc>
+            </a:pPr>
+            <a:r>
+              <a:rPr sz="1300">
+                <a:solidFill>
+                  <a:srgbClr val="E6E6E6"/>
+                </a:solidFill>
+                <a:latin typeface="Consolas"/>
+              </a:rPr>
+              <a:t> </a:t>
+            </a:r>
+          </a:p>
+          <a:p>
+            <a:pPr algn="l">
+              <a:lnSpc>
+                <a:spcPct val="115000"/>
+              </a:lnSpc>
+            </a:pPr>
+            <a:r>
+              <a:rPr sz="1300">
+                <a:solidFill>
+                  <a:srgbClr val="E6E6E6"/>
+                </a:solidFill>
+                <a:latin typeface="Consolas"/>
+              </a:rPr>
+              <a:t>    if node not in visited:</a:t>
+            </a:r>
+          </a:p>
+          <a:p>
+            <a:pPr algn="l">
+              <a:lnSpc>
+                <a:spcPct val="115000"/>
+              </a:lnSpc>
+            </a:pPr>
+            <a:r>
+              <a:rPr sz="1300">
+                <a:solidFill>
+                  <a:srgbClr val="E6E6E6"/>
+                </a:solidFill>
+                <a:latin typeface="Consolas"/>
+              </a:rPr>
+              <a:t>        visited.add(node)</a:t>
+            </a:r>
+          </a:p>
+          <a:p>
+            <a:pPr algn="l">
+              <a:lnSpc>
+                <a:spcPct val="115000"/>
+              </a:lnSpc>
+            </a:pPr>
+            <a:r>
+              <a:rPr sz="1300">
+                <a:solidFill>
+                  <a:srgbClr val="E6E6E6"/>
+                </a:solidFill>
+                <a:latin typeface="Consolas"/>
+              </a:rPr>
+              <a:t>        print(node)  # Process node</a:t>
+            </a:r>
+          </a:p>
+          <a:p>
+            <a:pPr algn="l">
+              <a:lnSpc>
+                <a:spcPct val="115000"/>
+              </a:lnSpc>
+            </a:pPr>
+            <a:r>
+              <a:rPr sz="1300">
+                <a:solidFill>
+                  <a:srgbClr val="E6E6E6"/>
+                </a:solidFill>
+                <a:latin typeface="Consolas"/>
+              </a:rPr>
+              <a:t> </a:t>
+            </a:r>
+          </a:p>
+          <a:p>
+            <a:pPr algn="l">
+              <a:lnSpc>
+                <a:spcPct val="115000"/>
+              </a:lnSpc>
+            </a:pPr>
+            <a:r>
+              <a:rPr sz="1300">
+                <a:solidFill>
+                  <a:srgbClr val="E6E6E6"/>
+                </a:solidFill>
+                <a:latin typeface="Consolas"/>
+              </a:rPr>
+              <a:t>        for neighbor in graph[node]:</a:t>
+            </a:r>
+          </a:p>
+          <a:p>
+            <a:pPr algn="l">
+              <a:lnSpc>
+                <a:spcPct val="115000"/>
+              </a:lnSpc>
+            </a:pPr>
+            <a:r>
+              <a:rPr sz="1300">
+                <a:solidFill>
+                  <a:srgbClr val="E6E6E6"/>
+                </a:solidFill>
+                <a:latin typeface="Consolas"/>
+              </a:rPr>
+              <a:t>            if neighbor not in visited:</a:t>
+            </a:r>
+          </a:p>
+          <a:p>
+            <a:pPr algn="l">
+              <a:lnSpc>
+                <a:spcPct val="115000"/>
+              </a:lnSpc>
+            </a:pPr>
+            <a:r>
+              <a:rPr sz="1300">
+                <a:solidFill>
+                  <a:srgbClr val="E6E6E6"/>
+                </a:solidFill>
+                <a:latin typeface="Consolas"/>
+              </a:rPr>
+              <a:t>                dfs(graph, neighbor, visited)</a:t>
+            </a:r>
+          </a:p>
+          <a:p>
+            <a:pPr algn="l">
+              <a:lnSpc>
+                <a:spcPct val="115000"/>
+              </a:lnSpc>
+            </a:pPr>
+            <a:r>
+              <a:rPr sz="1300">
+                <a:solidFill>
+                  <a:srgbClr val="E6E6E6"/>
+                </a:solidFill>
+                <a:latin typeface="Consolas"/>
+              </a:rPr>
+              <a:t>    return visited</a:t>
+            </a:r>
+          </a:p>
+        </p:txBody>
+      </p:sp>
+      <p:sp>
+        <p:nvSpPr>
+          <p:cNvPr id="12" name="Rectangle 11"/>
+          <p:cNvSpPr/>
+          <p:nvPr/>
+        </p:nvSpPr>
+        <p:spPr>
+          <a:xfrm>
+            <a:off x="6858000" y="1371600"/>
+            <a:ext cx="4572000" cy="4572000"/>
+          </a:xfrm>
+          <a:prstGeom prst="rect">
+            <a:avLst/>
+          </a:prstGeom>
+          <a:solidFill>
+            <a:srgbClr val="F2F4F7"/>
+          </a:solidFill>
+          <a:ln>
+            <a:noFill/>
+          </a:ln>
+          <a:effectLst/>
+        </p:spPr>
+        <p:style>
+          <a:lnRef idx="1">
+            <a:schemeClr val="accent1"/>
+          </a:lnRef>
+          <a:fillRef idx="3">
+            <a:schemeClr val="accent1"/>
+          </a:fillRef>
+          <a:effectRef idx="2">
+            <a:schemeClr val="accent1"/>
+          </a:effectRef>
+          <a:fontRef idx="minor">
+            <a:schemeClr val="lt1"/>
+          </a:fontRef>
+        </p:style>
+        <p:txBody>
+          <a:bodyPr rtlCol="0" anchor="ctr"/>
+          <a:lstStyle/>
+          <a:p>
+            <a:pPr algn="ctr"/>
+          </a:p>
+        </p:txBody>
+      </p:sp>
+      <p:sp>
+        <p:nvSpPr>
+          <p:cNvPr id="13" name="TextBox 12"/>
+          <p:cNvSpPr txBox="1"/>
+          <p:nvPr/>
+        </p:nvSpPr>
+        <p:spPr>
+          <a:xfrm>
+            <a:off x="6858000" y="1463040"/>
+            <a:ext cx="4572000" cy="457200"/>
+          </a:xfrm>
+          <a:prstGeom prst="rect">
+            <a:avLst/>
+          </a:prstGeom>
+          <a:noFill/>
+        </p:spPr>
+        <p:txBody>
+          <a:bodyPr wrap="square" lIns="45720" rIns="45720" tIns="18288" bIns="18288" anchor="t">
+            <a:spAutoFit/>
+          </a:bodyPr>
+          <a:lstStyle/>
+          <a:p>
+            <a:pPr algn="ctr"/>
+            <a:r>
+              <a:rPr sz="1600" b="1" i="0">
+                <a:solidFill>
+                  <a:srgbClr val="6A1B9A"/>
+                </a:solidFill>
+                <a:latin typeface="Calibri"/>
+              </a:rPr>
+              <a:t>Recursion Call Stack Trace</a:t>
+            </a:r>
+          </a:p>
+        </p:txBody>
+      </p:sp>
+      <p:sp>
+        <p:nvSpPr>
+          <p:cNvPr id="14" name="TextBox 13"/>
+          <p:cNvSpPr txBox="1"/>
+          <p:nvPr/>
+        </p:nvSpPr>
+        <p:spPr>
+          <a:xfrm>
+            <a:off x="7040880" y="2011680"/>
+            <a:ext cx="4206240" cy="548640"/>
+          </a:xfrm>
+          <a:prstGeom prst="rect">
+            <a:avLst/>
+          </a:prstGeom>
+          <a:noFill/>
+        </p:spPr>
+        <p:txBody>
+          <a:bodyPr wrap="square" lIns="45720" rIns="45720" tIns="18288" bIns="18288" anchor="t">
+            <a:spAutoFit/>
+          </a:bodyPr>
+          <a:lstStyle/>
+          <a:p>
+            <a:pPr algn="l"/>
+            <a:r>
+              <a:rPr sz="1300" b="1" i="0">
+                <a:solidFill>
+                  <a:srgbClr val="333D4A"/>
+                </a:solidFill>
+                <a:latin typeface="Calibri"/>
+              </a:rPr>
+              <a:t>Graph: A-B, B-D, A-C, C-E (Start at 'A')</a:t>
+            </a:r>
+          </a:p>
+        </p:txBody>
+      </p:sp>
+      <p:sp>
+        <p:nvSpPr>
+          <p:cNvPr id="15" name="Rectangle 14"/>
+          <p:cNvSpPr/>
+          <p:nvPr/>
+        </p:nvSpPr>
+        <p:spPr>
+          <a:xfrm>
+            <a:off x="7040880" y="2651760"/>
+            <a:ext cx="4206240" cy="365760"/>
+          </a:xfrm>
+          <a:prstGeom prst="rect">
+            <a:avLst/>
+          </a:prstGeom>
+          <a:solidFill>
+            <a:srgbClr val="0B2A4A"/>
+          </a:solidFill>
+          <a:ln>
+            <a:noFill/>
+          </a:ln>
+          <a:effectLst/>
+        </p:spPr>
+        <p:style>
+          <a:lnRef idx="1">
+            <a:schemeClr val="accent1"/>
+          </a:lnRef>
+          <a:fillRef idx="3">
+            <a:schemeClr val="accent1"/>
+          </a:fillRef>
+          <a:effectRef idx="2">
+            <a:schemeClr val="accent1"/>
+          </a:effectRef>
+          <a:fontRef idx="minor">
+            <a:schemeClr val="lt1"/>
+          </a:fontRef>
+        </p:style>
+        <p:txBody>
+          <a:bodyPr rtlCol="0" anchor="ctr"/>
+          <a:lstStyle/>
+          <a:p>
+            <a:pPr algn="ctr"/>
+          </a:p>
+        </p:txBody>
+      </p:sp>
+      <p:sp>
+        <p:nvSpPr>
+          <p:cNvPr id="16" name="TextBox 15"/>
+          <p:cNvSpPr txBox="1"/>
+          <p:nvPr/>
+        </p:nvSpPr>
+        <p:spPr>
+          <a:xfrm>
+            <a:off x="7040880" y="2697480"/>
+            <a:ext cx="914400" cy="274320"/>
+          </a:xfrm>
+          <a:prstGeom prst="rect">
+            <a:avLst/>
+          </a:prstGeom>
+          <a:noFill/>
+        </p:spPr>
+        <p:txBody>
+          <a:bodyPr wrap="square" lIns="45720" rIns="45720" tIns="18288" bIns="18288" anchor="t">
+            <a:spAutoFit/>
+          </a:bodyPr>
+          <a:lstStyle/>
+          <a:p>
+            <a:pPr algn="ctr"/>
+            <a:r>
+              <a:rPr sz="1100" b="1" i="0">
+                <a:solidFill>
                   <a:srgbClr val="FFFFFF"/>
                 </a:solidFill>
                 <a:latin typeface="Calibri"/>
               </a:rPr>
-              <a:t>Next Week (Graphs II): We will introduce edge weights and explore Dijkstra's Algorithm for finding the shortest paths on real-world maps.</a:t>
+              <a:t>Action</a:t>
+            </a:r>
+          </a:p>
+        </p:txBody>
+      </p:sp>
+      <p:sp>
+        <p:nvSpPr>
+          <p:cNvPr id="17" name="TextBox 16"/>
+          <p:cNvSpPr txBox="1"/>
+          <p:nvPr/>
+        </p:nvSpPr>
+        <p:spPr>
+          <a:xfrm>
+            <a:off x="7955279" y="2697480"/>
+            <a:ext cx="1645920" cy="274320"/>
+          </a:xfrm>
+          <a:prstGeom prst="rect">
+            <a:avLst/>
+          </a:prstGeom>
+          <a:noFill/>
+        </p:spPr>
+        <p:txBody>
+          <a:bodyPr wrap="square" lIns="45720" rIns="45720" tIns="18288" bIns="18288" anchor="t">
+            <a:spAutoFit/>
+          </a:bodyPr>
+          <a:lstStyle/>
+          <a:p>
+            <a:pPr algn="ctr"/>
+            <a:r>
+              <a:rPr sz="1100" b="1" i="0">
+                <a:solidFill>
+                  <a:srgbClr val="FFFFFF"/>
+                </a:solidFill>
+                <a:latin typeface="Calibri"/>
+              </a:rPr>
+              <a:t>Call Stack</a:t>
+            </a:r>
+          </a:p>
+        </p:txBody>
+      </p:sp>
+      <p:sp>
+        <p:nvSpPr>
+          <p:cNvPr id="18" name="TextBox 17"/>
+          <p:cNvSpPr txBox="1"/>
+          <p:nvPr/>
+        </p:nvSpPr>
+        <p:spPr>
+          <a:xfrm>
+            <a:off x="9601200" y="2697480"/>
+            <a:ext cx="1645920" cy="274320"/>
+          </a:xfrm>
+          <a:prstGeom prst="rect">
+            <a:avLst/>
+          </a:prstGeom>
+          <a:noFill/>
+        </p:spPr>
+        <p:txBody>
+          <a:bodyPr wrap="square" lIns="45720" rIns="45720" tIns="18288" bIns="18288" anchor="t">
+            <a:spAutoFit/>
+          </a:bodyPr>
+          <a:lstStyle/>
+          <a:p>
+            <a:pPr algn="ctr"/>
+            <a:r>
+              <a:rPr sz="1100" b="1" i="0">
+                <a:solidFill>
+                  <a:srgbClr val="FFFFFF"/>
+                </a:solidFill>
+                <a:latin typeface="Calibri"/>
+              </a:rPr>
+              <a:t>Visited Set</a:t>
+            </a:r>
+          </a:p>
+        </p:txBody>
+      </p:sp>
+      <p:sp>
+        <p:nvSpPr>
+          <p:cNvPr id="19" name="Rectangle 18"/>
+          <p:cNvSpPr/>
+          <p:nvPr/>
+        </p:nvSpPr>
+        <p:spPr>
+          <a:xfrm>
+            <a:off x="7040880" y="3108960"/>
+            <a:ext cx="4206240" cy="365760"/>
+          </a:xfrm>
+          <a:prstGeom prst="rect">
+            <a:avLst/>
+          </a:prstGeom>
+          <a:solidFill>
+            <a:srgbClr val="FFFFFF"/>
+          </a:solidFill>
+          <a:ln w="12700">
+            <a:solidFill>
+              <a:srgbClr val="333D4A"/>
+            </a:solidFill>
+          </a:ln>
+          <a:effectLst/>
+        </p:spPr>
+        <p:style>
+          <a:lnRef idx="1">
+            <a:schemeClr val="accent1"/>
+          </a:lnRef>
+          <a:fillRef idx="3">
+            <a:schemeClr val="accent1"/>
+          </a:fillRef>
+          <a:effectRef idx="2">
+            <a:schemeClr val="accent1"/>
+          </a:effectRef>
+          <a:fontRef idx="minor">
+            <a:schemeClr val="lt1"/>
+          </a:fontRef>
+        </p:style>
+        <p:txBody>
+          <a:bodyPr rtlCol="0" anchor="ctr"/>
+          <a:lstStyle/>
+          <a:p>
+            <a:pPr algn="ctr"/>
+          </a:p>
+        </p:txBody>
+      </p:sp>
+      <p:sp>
+        <p:nvSpPr>
+          <p:cNvPr id="20" name="TextBox 19"/>
+          <p:cNvSpPr txBox="1"/>
+          <p:nvPr/>
+        </p:nvSpPr>
+        <p:spPr>
+          <a:xfrm>
+            <a:off x="7040880" y="3154680"/>
+            <a:ext cx="914400" cy="274320"/>
+          </a:xfrm>
+          <a:prstGeom prst="rect">
+            <a:avLst/>
+          </a:prstGeom>
+          <a:noFill/>
+        </p:spPr>
+        <p:txBody>
+          <a:bodyPr wrap="square" lIns="45720" rIns="45720" tIns="18288" bIns="18288" anchor="t">
+            <a:spAutoFit/>
+          </a:bodyPr>
+          <a:lstStyle/>
+          <a:p>
+            <a:pPr algn="ctr"/>
+            <a:r>
+              <a:rPr sz="1100" b="1" i="0">
+                <a:solidFill>
+                  <a:srgbClr val="333D4A"/>
+                </a:solidFill>
+                <a:latin typeface="Calibri"/>
+              </a:rPr>
+              <a:t>Call dfs(A)</a:t>
+            </a:r>
+          </a:p>
+        </p:txBody>
+      </p:sp>
+      <p:sp>
+        <p:nvSpPr>
+          <p:cNvPr id="21" name="TextBox 20"/>
+          <p:cNvSpPr txBox="1"/>
+          <p:nvPr/>
+        </p:nvSpPr>
+        <p:spPr>
+          <a:xfrm>
+            <a:off x="7955279" y="3154680"/>
+            <a:ext cx="1645920" cy="274320"/>
+          </a:xfrm>
+          <a:prstGeom prst="rect">
+            <a:avLst/>
+          </a:prstGeom>
+          <a:noFill/>
+        </p:spPr>
+        <p:txBody>
+          <a:bodyPr wrap="square" lIns="45720" rIns="45720" tIns="18288" bIns="18288" anchor="t">
+            <a:spAutoFit/>
+          </a:bodyPr>
+          <a:lstStyle/>
+          <a:p>
+            <a:pPr algn="ctr"/>
+            <a:r>
+              <a:rPr sz="1100" b="0" i="0">
+                <a:solidFill>
+                  <a:srgbClr val="333D4A"/>
+                </a:solidFill>
+                <a:latin typeface="Calibri"/>
+              </a:rPr>
+              <a:t>[dfs(A)]</a:t>
+            </a:r>
+          </a:p>
+        </p:txBody>
+      </p:sp>
+      <p:sp>
+        <p:nvSpPr>
+          <p:cNvPr id="22" name="TextBox 21"/>
+          <p:cNvSpPr txBox="1"/>
+          <p:nvPr/>
+        </p:nvSpPr>
+        <p:spPr>
+          <a:xfrm>
+            <a:off x="9601200" y="3154680"/>
+            <a:ext cx="1645920" cy="274320"/>
+          </a:xfrm>
+          <a:prstGeom prst="rect">
+            <a:avLst/>
+          </a:prstGeom>
+          <a:noFill/>
+        </p:spPr>
+        <p:txBody>
+          <a:bodyPr wrap="square" lIns="45720" rIns="45720" tIns="18288" bIns="18288" anchor="t">
+            <a:spAutoFit/>
+          </a:bodyPr>
+          <a:lstStyle/>
+          <a:p>
+            <a:pPr algn="ctr"/>
+            <a:r>
+              <a:rPr sz="1100" b="0" i="0">
+                <a:solidFill>
+                  <a:srgbClr val="333D4A"/>
+                </a:solidFill>
+                <a:latin typeface="Calibri"/>
+              </a:rPr>
+              <a:t>{'A'}</a:t>
+            </a:r>
+          </a:p>
+        </p:txBody>
+      </p:sp>
+      <p:sp>
+        <p:nvSpPr>
+          <p:cNvPr id="23" name="Rectangle 22"/>
+          <p:cNvSpPr/>
+          <p:nvPr/>
+        </p:nvSpPr>
+        <p:spPr>
+          <a:xfrm>
+            <a:off x="7040880" y="3520440"/>
+            <a:ext cx="4206240" cy="365760"/>
+          </a:xfrm>
+          <a:prstGeom prst="rect">
+            <a:avLst/>
+          </a:prstGeom>
+          <a:solidFill>
+            <a:srgbClr val="F2F4F7"/>
+          </a:solidFill>
+          <a:ln w="12700">
+            <a:solidFill>
+              <a:srgbClr val="333D4A"/>
+            </a:solidFill>
+          </a:ln>
+          <a:effectLst/>
+        </p:spPr>
+        <p:style>
+          <a:lnRef idx="1">
+            <a:schemeClr val="accent1"/>
+          </a:lnRef>
+          <a:fillRef idx="3">
+            <a:schemeClr val="accent1"/>
+          </a:fillRef>
+          <a:effectRef idx="2">
+            <a:schemeClr val="accent1"/>
+          </a:effectRef>
+          <a:fontRef idx="minor">
+            <a:schemeClr val="lt1"/>
+          </a:fontRef>
+        </p:style>
+        <p:txBody>
+          <a:bodyPr rtlCol="0" anchor="ctr"/>
+          <a:lstStyle/>
+          <a:p>
+            <a:pPr algn="ctr"/>
+          </a:p>
+        </p:txBody>
+      </p:sp>
+      <p:sp>
+        <p:nvSpPr>
+          <p:cNvPr id="24" name="TextBox 23"/>
+          <p:cNvSpPr txBox="1"/>
+          <p:nvPr/>
+        </p:nvSpPr>
+        <p:spPr>
+          <a:xfrm>
+            <a:off x="7040880" y="3566160"/>
+            <a:ext cx="914400" cy="274320"/>
+          </a:xfrm>
+          <a:prstGeom prst="rect">
+            <a:avLst/>
+          </a:prstGeom>
+          <a:noFill/>
+        </p:spPr>
+        <p:txBody>
+          <a:bodyPr wrap="square" lIns="45720" rIns="45720" tIns="18288" bIns="18288" anchor="t">
+            <a:spAutoFit/>
+          </a:bodyPr>
+          <a:lstStyle/>
+          <a:p>
+            <a:pPr algn="ctr"/>
+            <a:r>
+              <a:rPr sz="1100" b="1" i="0">
+                <a:solidFill>
+                  <a:srgbClr val="333D4A"/>
+                </a:solidFill>
+                <a:latin typeface="Calibri"/>
+              </a:rPr>
+              <a:t>Call dfs(B)</a:t>
+            </a:r>
+          </a:p>
+        </p:txBody>
+      </p:sp>
+      <p:sp>
+        <p:nvSpPr>
+          <p:cNvPr id="25" name="TextBox 24"/>
+          <p:cNvSpPr txBox="1"/>
+          <p:nvPr/>
+        </p:nvSpPr>
+        <p:spPr>
+          <a:xfrm>
+            <a:off x="7955279" y="3566160"/>
+            <a:ext cx="1645920" cy="274320"/>
+          </a:xfrm>
+          <a:prstGeom prst="rect">
+            <a:avLst/>
+          </a:prstGeom>
+          <a:noFill/>
+        </p:spPr>
+        <p:txBody>
+          <a:bodyPr wrap="square" lIns="45720" rIns="45720" tIns="18288" bIns="18288" anchor="t">
+            <a:spAutoFit/>
+          </a:bodyPr>
+          <a:lstStyle/>
+          <a:p>
+            <a:pPr algn="ctr"/>
+            <a:r>
+              <a:rPr sz="1100" b="0" i="0">
+                <a:solidFill>
+                  <a:srgbClr val="333D4A"/>
+                </a:solidFill>
+                <a:latin typeface="Calibri"/>
+              </a:rPr>
+              <a:t>[dfs(A), dfs(B)]</a:t>
+            </a:r>
+          </a:p>
+        </p:txBody>
+      </p:sp>
+      <p:sp>
+        <p:nvSpPr>
+          <p:cNvPr id="26" name="TextBox 25"/>
+          <p:cNvSpPr txBox="1"/>
+          <p:nvPr/>
+        </p:nvSpPr>
+        <p:spPr>
+          <a:xfrm>
+            <a:off x="9601200" y="3566160"/>
+            <a:ext cx="1645920" cy="274320"/>
+          </a:xfrm>
+          <a:prstGeom prst="rect">
+            <a:avLst/>
+          </a:prstGeom>
+          <a:noFill/>
+        </p:spPr>
+        <p:txBody>
+          <a:bodyPr wrap="square" lIns="45720" rIns="45720" tIns="18288" bIns="18288" anchor="t">
+            <a:spAutoFit/>
+          </a:bodyPr>
+          <a:lstStyle/>
+          <a:p>
+            <a:pPr algn="ctr"/>
+            <a:r>
+              <a:rPr sz="1100" b="0" i="0">
+                <a:solidFill>
+                  <a:srgbClr val="333D4A"/>
+                </a:solidFill>
+                <a:latin typeface="Calibri"/>
+              </a:rPr>
+              <a:t>{'A', 'B'}</a:t>
+            </a:r>
+          </a:p>
+        </p:txBody>
+      </p:sp>
+      <p:sp>
+        <p:nvSpPr>
+          <p:cNvPr id="27" name="Rectangle 26"/>
+          <p:cNvSpPr/>
+          <p:nvPr/>
+        </p:nvSpPr>
+        <p:spPr>
+          <a:xfrm>
+            <a:off x="7040880" y="3931920"/>
+            <a:ext cx="4206240" cy="365760"/>
+          </a:xfrm>
+          <a:prstGeom prst="rect">
+            <a:avLst/>
+          </a:prstGeom>
+          <a:solidFill>
+            <a:srgbClr val="FFFFFF"/>
+          </a:solidFill>
+          <a:ln w="12700">
+            <a:solidFill>
+              <a:srgbClr val="333D4A"/>
+            </a:solidFill>
+          </a:ln>
+          <a:effectLst/>
+        </p:spPr>
+        <p:style>
+          <a:lnRef idx="1">
+            <a:schemeClr val="accent1"/>
+          </a:lnRef>
+          <a:fillRef idx="3">
+            <a:schemeClr val="accent1"/>
+          </a:fillRef>
+          <a:effectRef idx="2">
+            <a:schemeClr val="accent1"/>
+          </a:effectRef>
+          <a:fontRef idx="minor">
+            <a:schemeClr val="lt1"/>
+          </a:fontRef>
+        </p:style>
+        <p:txBody>
+          <a:bodyPr rtlCol="0" anchor="ctr"/>
+          <a:lstStyle/>
+          <a:p>
+            <a:pPr algn="ctr"/>
+          </a:p>
+        </p:txBody>
+      </p:sp>
+      <p:sp>
+        <p:nvSpPr>
+          <p:cNvPr id="28" name="TextBox 27"/>
+          <p:cNvSpPr txBox="1"/>
+          <p:nvPr/>
+        </p:nvSpPr>
+        <p:spPr>
+          <a:xfrm>
+            <a:off x="7040880" y="3977640"/>
+            <a:ext cx="914400" cy="274320"/>
+          </a:xfrm>
+          <a:prstGeom prst="rect">
+            <a:avLst/>
+          </a:prstGeom>
+          <a:noFill/>
+        </p:spPr>
+        <p:txBody>
+          <a:bodyPr wrap="square" lIns="45720" rIns="45720" tIns="18288" bIns="18288" anchor="t">
+            <a:spAutoFit/>
+          </a:bodyPr>
+          <a:lstStyle/>
+          <a:p>
+            <a:pPr algn="ctr"/>
+            <a:r>
+              <a:rPr sz="1100" b="1" i="0">
+                <a:solidFill>
+                  <a:srgbClr val="333D4A"/>
+                </a:solidFill>
+                <a:latin typeface="Calibri"/>
+              </a:rPr>
+              <a:t>Call dfs(D)</a:t>
+            </a:r>
+          </a:p>
+        </p:txBody>
+      </p:sp>
+      <p:sp>
+        <p:nvSpPr>
+          <p:cNvPr id="29" name="TextBox 28"/>
+          <p:cNvSpPr txBox="1"/>
+          <p:nvPr/>
+        </p:nvSpPr>
+        <p:spPr>
+          <a:xfrm>
+            <a:off x="7955279" y="3977640"/>
+            <a:ext cx="1645920" cy="274320"/>
+          </a:xfrm>
+          <a:prstGeom prst="rect">
+            <a:avLst/>
+          </a:prstGeom>
+          <a:noFill/>
+        </p:spPr>
+        <p:txBody>
+          <a:bodyPr wrap="square" lIns="45720" rIns="45720" tIns="18288" bIns="18288" anchor="t">
+            <a:spAutoFit/>
+          </a:bodyPr>
+          <a:lstStyle/>
+          <a:p>
+            <a:pPr algn="ctr"/>
+            <a:r>
+              <a:rPr sz="1100" b="0" i="0">
+                <a:solidFill>
+                  <a:srgbClr val="333D4A"/>
+                </a:solidFill>
+                <a:latin typeface="Calibri"/>
+              </a:rPr>
+              <a:t>[dfs(A), dfs(B), dfs(D)]</a:t>
+            </a:r>
+          </a:p>
+        </p:txBody>
+      </p:sp>
+      <p:sp>
+        <p:nvSpPr>
+          <p:cNvPr id="30" name="TextBox 29"/>
+          <p:cNvSpPr txBox="1"/>
+          <p:nvPr/>
+        </p:nvSpPr>
+        <p:spPr>
+          <a:xfrm>
+            <a:off x="9601200" y="3977640"/>
+            <a:ext cx="1645920" cy="274320"/>
+          </a:xfrm>
+          <a:prstGeom prst="rect">
+            <a:avLst/>
+          </a:prstGeom>
+          <a:noFill/>
+        </p:spPr>
+        <p:txBody>
+          <a:bodyPr wrap="square" lIns="45720" rIns="45720" tIns="18288" bIns="18288" anchor="t">
+            <a:spAutoFit/>
+          </a:bodyPr>
+          <a:lstStyle/>
+          <a:p>
+            <a:pPr algn="ctr"/>
+            <a:r>
+              <a:rPr sz="1100" b="0" i="0">
+                <a:solidFill>
+                  <a:srgbClr val="333D4A"/>
+                </a:solidFill>
+                <a:latin typeface="Calibri"/>
+              </a:rPr>
+              <a:t>{'A', 'B', 'D'}</a:t>
+            </a:r>
+          </a:p>
+        </p:txBody>
+      </p:sp>
+      <p:sp>
+        <p:nvSpPr>
+          <p:cNvPr id="31" name="Rectangle 30"/>
+          <p:cNvSpPr/>
+          <p:nvPr/>
+        </p:nvSpPr>
+        <p:spPr>
+          <a:xfrm>
+            <a:off x="7040880" y="4343400"/>
+            <a:ext cx="4206240" cy="365760"/>
+          </a:xfrm>
+          <a:prstGeom prst="rect">
+            <a:avLst/>
+          </a:prstGeom>
+          <a:solidFill>
+            <a:srgbClr val="F2F4F7"/>
+          </a:solidFill>
+          <a:ln w="12700">
+            <a:solidFill>
+              <a:srgbClr val="333D4A"/>
+            </a:solidFill>
+          </a:ln>
+          <a:effectLst/>
+        </p:spPr>
+        <p:style>
+          <a:lnRef idx="1">
+            <a:schemeClr val="accent1"/>
+          </a:lnRef>
+          <a:fillRef idx="3">
+            <a:schemeClr val="accent1"/>
+          </a:fillRef>
+          <a:effectRef idx="2">
+            <a:schemeClr val="accent1"/>
+          </a:effectRef>
+          <a:fontRef idx="minor">
+            <a:schemeClr val="lt1"/>
+          </a:fontRef>
+        </p:style>
+        <p:txBody>
+          <a:bodyPr rtlCol="0" anchor="ctr"/>
+          <a:lstStyle/>
+          <a:p>
+            <a:pPr algn="ctr"/>
+          </a:p>
+        </p:txBody>
+      </p:sp>
+      <p:sp>
+        <p:nvSpPr>
+          <p:cNvPr id="32" name="TextBox 31"/>
+          <p:cNvSpPr txBox="1"/>
+          <p:nvPr/>
+        </p:nvSpPr>
+        <p:spPr>
+          <a:xfrm>
+            <a:off x="7040880" y="4389120"/>
+            <a:ext cx="914400" cy="274320"/>
+          </a:xfrm>
+          <a:prstGeom prst="rect">
+            <a:avLst/>
+          </a:prstGeom>
+          <a:noFill/>
+        </p:spPr>
+        <p:txBody>
+          <a:bodyPr wrap="square" lIns="45720" rIns="45720" tIns="18288" bIns="18288" anchor="t">
+            <a:spAutoFit/>
+          </a:bodyPr>
+          <a:lstStyle/>
+          <a:p>
+            <a:pPr algn="ctr"/>
+            <a:r>
+              <a:rPr sz="1100" b="1" i="0">
+                <a:solidFill>
+                  <a:srgbClr val="333D4A"/>
+                </a:solidFill>
+                <a:latin typeface="Calibri"/>
+              </a:rPr>
+              <a:t>Pop dfs(D)</a:t>
+            </a:r>
+          </a:p>
+        </p:txBody>
+      </p:sp>
+      <p:sp>
+        <p:nvSpPr>
+          <p:cNvPr id="33" name="TextBox 32"/>
+          <p:cNvSpPr txBox="1"/>
+          <p:nvPr/>
+        </p:nvSpPr>
+        <p:spPr>
+          <a:xfrm>
+            <a:off x="7955279" y="4389120"/>
+            <a:ext cx="1645920" cy="274320"/>
+          </a:xfrm>
+          <a:prstGeom prst="rect">
+            <a:avLst/>
+          </a:prstGeom>
+          <a:noFill/>
+        </p:spPr>
+        <p:txBody>
+          <a:bodyPr wrap="square" lIns="45720" rIns="45720" tIns="18288" bIns="18288" anchor="t">
+            <a:spAutoFit/>
+          </a:bodyPr>
+          <a:lstStyle/>
+          <a:p>
+            <a:pPr algn="ctr"/>
+            <a:r>
+              <a:rPr sz="1100" b="0" i="0">
+                <a:solidFill>
+                  <a:srgbClr val="333D4A"/>
+                </a:solidFill>
+                <a:latin typeface="Calibri"/>
+              </a:rPr>
+              <a:t>[dfs(A), dfs(B)]</a:t>
+            </a:r>
+          </a:p>
+        </p:txBody>
+      </p:sp>
+      <p:sp>
+        <p:nvSpPr>
+          <p:cNvPr id="34" name="TextBox 33"/>
+          <p:cNvSpPr txBox="1"/>
+          <p:nvPr/>
+        </p:nvSpPr>
+        <p:spPr>
+          <a:xfrm>
+            <a:off x="9601200" y="4389120"/>
+            <a:ext cx="1645920" cy="274320"/>
+          </a:xfrm>
+          <a:prstGeom prst="rect">
+            <a:avLst/>
+          </a:prstGeom>
+          <a:noFill/>
+        </p:spPr>
+        <p:txBody>
+          <a:bodyPr wrap="square" lIns="45720" rIns="45720" tIns="18288" bIns="18288" anchor="t">
+            <a:spAutoFit/>
+          </a:bodyPr>
+          <a:lstStyle/>
+          <a:p>
+            <a:pPr algn="ctr"/>
+            <a:r>
+              <a:rPr sz="1100" b="0" i="0">
+                <a:solidFill>
+                  <a:srgbClr val="333D4A"/>
+                </a:solidFill>
+                <a:latin typeface="Calibri"/>
+              </a:rPr>
+              <a:t>{'A', 'B', 'D'}</a:t>
+            </a:r>
+          </a:p>
+        </p:txBody>
+      </p:sp>
+      <p:sp>
+        <p:nvSpPr>
+          <p:cNvPr id="35" name="Rectangle 34"/>
+          <p:cNvSpPr/>
+          <p:nvPr/>
+        </p:nvSpPr>
+        <p:spPr>
+          <a:xfrm>
+            <a:off x="7040880" y="4754880"/>
+            <a:ext cx="4206240" cy="365760"/>
+          </a:xfrm>
+          <a:prstGeom prst="rect">
+            <a:avLst/>
+          </a:prstGeom>
+          <a:solidFill>
+            <a:srgbClr val="FFFFFF"/>
+          </a:solidFill>
+          <a:ln w="12700">
+            <a:solidFill>
+              <a:srgbClr val="333D4A"/>
+            </a:solidFill>
+          </a:ln>
+          <a:effectLst/>
+        </p:spPr>
+        <p:style>
+          <a:lnRef idx="1">
+            <a:schemeClr val="accent1"/>
+          </a:lnRef>
+          <a:fillRef idx="3">
+            <a:schemeClr val="accent1"/>
+          </a:fillRef>
+          <a:effectRef idx="2">
+            <a:schemeClr val="accent1"/>
+          </a:effectRef>
+          <a:fontRef idx="minor">
+            <a:schemeClr val="lt1"/>
+          </a:fontRef>
+        </p:style>
+        <p:txBody>
+          <a:bodyPr rtlCol="0" anchor="ctr"/>
+          <a:lstStyle/>
+          <a:p>
+            <a:pPr algn="ctr"/>
+          </a:p>
+        </p:txBody>
+      </p:sp>
+      <p:sp>
+        <p:nvSpPr>
+          <p:cNvPr id="36" name="TextBox 35"/>
+          <p:cNvSpPr txBox="1"/>
+          <p:nvPr/>
+        </p:nvSpPr>
+        <p:spPr>
+          <a:xfrm>
+            <a:off x="7040880" y="4800600"/>
+            <a:ext cx="914400" cy="274320"/>
+          </a:xfrm>
+          <a:prstGeom prst="rect">
+            <a:avLst/>
+          </a:prstGeom>
+          <a:noFill/>
+        </p:spPr>
+        <p:txBody>
+          <a:bodyPr wrap="square" lIns="45720" rIns="45720" tIns="18288" bIns="18288" anchor="t">
+            <a:spAutoFit/>
+          </a:bodyPr>
+          <a:lstStyle/>
+          <a:p>
+            <a:pPr algn="ctr"/>
+            <a:r>
+              <a:rPr sz="1100" b="1" i="0">
+                <a:solidFill>
+                  <a:srgbClr val="333D4A"/>
+                </a:solidFill>
+                <a:latin typeface="Calibri"/>
+              </a:rPr>
+              <a:t>Pop dfs(B)</a:t>
+            </a:r>
+          </a:p>
+        </p:txBody>
+      </p:sp>
+      <p:sp>
+        <p:nvSpPr>
+          <p:cNvPr id="37" name="TextBox 36"/>
+          <p:cNvSpPr txBox="1"/>
+          <p:nvPr/>
+        </p:nvSpPr>
+        <p:spPr>
+          <a:xfrm>
+            <a:off x="7955279" y="4800600"/>
+            <a:ext cx="1645920" cy="274320"/>
+          </a:xfrm>
+          <a:prstGeom prst="rect">
+            <a:avLst/>
+          </a:prstGeom>
+          <a:noFill/>
+        </p:spPr>
+        <p:txBody>
+          <a:bodyPr wrap="square" lIns="45720" rIns="45720" tIns="18288" bIns="18288" anchor="t">
+            <a:spAutoFit/>
+          </a:bodyPr>
+          <a:lstStyle/>
+          <a:p>
+            <a:pPr algn="ctr"/>
+            <a:r>
+              <a:rPr sz="1100" b="0" i="0">
+                <a:solidFill>
+                  <a:srgbClr val="333D4A"/>
+                </a:solidFill>
+                <a:latin typeface="Calibri"/>
+              </a:rPr>
+              <a:t>[dfs(A)]</a:t>
+            </a:r>
+          </a:p>
+        </p:txBody>
+      </p:sp>
+      <p:sp>
+        <p:nvSpPr>
+          <p:cNvPr id="38" name="TextBox 37"/>
+          <p:cNvSpPr txBox="1"/>
+          <p:nvPr/>
+        </p:nvSpPr>
+        <p:spPr>
+          <a:xfrm>
+            <a:off x="9601200" y="4800600"/>
+            <a:ext cx="1645920" cy="274320"/>
+          </a:xfrm>
+          <a:prstGeom prst="rect">
+            <a:avLst/>
+          </a:prstGeom>
+          <a:noFill/>
+        </p:spPr>
+        <p:txBody>
+          <a:bodyPr wrap="square" lIns="45720" rIns="45720" tIns="18288" bIns="18288" anchor="t">
+            <a:spAutoFit/>
+          </a:bodyPr>
+          <a:lstStyle/>
+          <a:p>
+            <a:pPr algn="ctr"/>
+            <a:r>
+              <a:rPr sz="1100" b="0" i="0">
+                <a:solidFill>
+                  <a:srgbClr val="333D4A"/>
+                </a:solidFill>
+                <a:latin typeface="Calibri"/>
+              </a:rPr>
+              <a:t>{'A', 'B', 'D'}</a:t>
+            </a:r>
+          </a:p>
+        </p:txBody>
+      </p:sp>
+      <p:sp>
+        <p:nvSpPr>
+          <p:cNvPr id="39" name="Rectangle 38"/>
+          <p:cNvSpPr/>
+          <p:nvPr/>
+        </p:nvSpPr>
+        <p:spPr>
+          <a:xfrm>
+            <a:off x="7040880" y="5166360"/>
+            <a:ext cx="4206240" cy="365760"/>
+          </a:xfrm>
+          <a:prstGeom prst="rect">
+            <a:avLst/>
+          </a:prstGeom>
+          <a:solidFill>
+            <a:srgbClr val="F2F4F7"/>
+          </a:solidFill>
+          <a:ln w="12700">
+            <a:solidFill>
+              <a:srgbClr val="333D4A"/>
+            </a:solidFill>
+          </a:ln>
+          <a:effectLst/>
+        </p:spPr>
+        <p:style>
+          <a:lnRef idx="1">
+            <a:schemeClr val="accent1"/>
+          </a:lnRef>
+          <a:fillRef idx="3">
+            <a:schemeClr val="accent1"/>
+          </a:fillRef>
+          <a:effectRef idx="2">
+            <a:schemeClr val="accent1"/>
+          </a:effectRef>
+          <a:fontRef idx="minor">
+            <a:schemeClr val="lt1"/>
+          </a:fontRef>
+        </p:style>
+        <p:txBody>
+          <a:bodyPr rtlCol="0" anchor="ctr"/>
+          <a:lstStyle/>
+          <a:p>
+            <a:pPr algn="ctr"/>
+          </a:p>
+        </p:txBody>
+      </p:sp>
+      <p:sp>
+        <p:nvSpPr>
+          <p:cNvPr id="40" name="TextBox 39"/>
+          <p:cNvSpPr txBox="1"/>
+          <p:nvPr/>
+        </p:nvSpPr>
+        <p:spPr>
+          <a:xfrm>
+            <a:off x="7040880" y="5212080"/>
+            <a:ext cx="914400" cy="274320"/>
+          </a:xfrm>
+          <a:prstGeom prst="rect">
+            <a:avLst/>
+          </a:prstGeom>
+          <a:noFill/>
+        </p:spPr>
+        <p:txBody>
+          <a:bodyPr wrap="square" lIns="45720" rIns="45720" tIns="18288" bIns="18288" anchor="t">
+            <a:spAutoFit/>
+          </a:bodyPr>
+          <a:lstStyle/>
+          <a:p>
+            <a:pPr algn="ctr"/>
+            <a:r>
+              <a:rPr sz="1100" b="1" i="0">
+                <a:solidFill>
+                  <a:srgbClr val="333D4A"/>
+                </a:solidFill>
+                <a:latin typeface="Calibri"/>
+              </a:rPr>
+              <a:t>Call dfs(C)</a:t>
+            </a:r>
+          </a:p>
+        </p:txBody>
+      </p:sp>
+      <p:sp>
+        <p:nvSpPr>
+          <p:cNvPr id="41" name="TextBox 40"/>
+          <p:cNvSpPr txBox="1"/>
+          <p:nvPr/>
+        </p:nvSpPr>
+        <p:spPr>
+          <a:xfrm>
+            <a:off x="7955279" y="5212080"/>
+            <a:ext cx="1645920" cy="274320"/>
+          </a:xfrm>
+          <a:prstGeom prst="rect">
+            <a:avLst/>
+          </a:prstGeom>
+          <a:noFill/>
+        </p:spPr>
+        <p:txBody>
+          <a:bodyPr wrap="square" lIns="45720" rIns="45720" tIns="18288" bIns="18288" anchor="t">
+            <a:spAutoFit/>
+          </a:bodyPr>
+          <a:lstStyle/>
+          <a:p>
+            <a:pPr algn="ctr"/>
+            <a:r>
+              <a:rPr sz="1100" b="0" i="0">
+                <a:solidFill>
+                  <a:srgbClr val="333D4A"/>
+                </a:solidFill>
+                <a:latin typeface="Calibri"/>
+              </a:rPr>
+              <a:t>[dfs(A), dfs(C)]</a:t>
+            </a:r>
+          </a:p>
+        </p:txBody>
+      </p:sp>
+      <p:sp>
+        <p:nvSpPr>
+          <p:cNvPr id="42" name="TextBox 41"/>
+          <p:cNvSpPr txBox="1"/>
+          <p:nvPr/>
+        </p:nvSpPr>
+        <p:spPr>
+          <a:xfrm>
+            <a:off x="9601200" y="5212080"/>
+            <a:ext cx="1645920" cy="274320"/>
+          </a:xfrm>
+          <a:prstGeom prst="rect">
+            <a:avLst/>
+          </a:prstGeom>
+          <a:noFill/>
+        </p:spPr>
+        <p:txBody>
+          <a:bodyPr wrap="square" lIns="45720" rIns="45720" tIns="18288" bIns="18288" anchor="t">
+            <a:spAutoFit/>
+          </a:bodyPr>
+          <a:lstStyle/>
+          <a:p>
+            <a:pPr algn="ctr"/>
+            <a:r>
+              <a:rPr sz="1100" b="0" i="0">
+                <a:solidFill>
+                  <a:srgbClr val="333D4A"/>
+                </a:solidFill>
+                <a:latin typeface="Calibri"/>
+              </a:rPr>
+              <a:t>{'A', 'B', 'D', 'C'}</a:t>
+            </a:r>
+          </a:p>
+        </p:txBody>
+      </p:sp>
+      <p:sp>
+        <p:nvSpPr>
+          <p:cNvPr id="43" name="Rectangle 42"/>
+          <p:cNvSpPr/>
+          <p:nvPr/>
+        </p:nvSpPr>
+        <p:spPr>
+          <a:xfrm>
+            <a:off x="7040880" y="5577840"/>
+            <a:ext cx="4206240" cy="365760"/>
+          </a:xfrm>
+          <a:prstGeom prst="rect">
+            <a:avLst/>
+          </a:prstGeom>
+          <a:solidFill>
+            <a:srgbClr val="FFFFFF"/>
+          </a:solidFill>
+          <a:ln w="12700">
+            <a:solidFill>
+              <a:srgbClr val="333D4A"/>
+            </a:solidFill>
+          </a:ln>
+          <a:effectLst/>
+        </p:spPr>
+        <p:style>
+          <a:lnRef idx="1">
+            <a:schemeClr val="accent1"/>
+          </a:lnRef>
+          <a:fillRef idx="3">
+            <a:schemeClr val="accent1"/>
+          </a:fillRef>
+          <a:effectRef idx="2">
+            <a:schemeClr val="accent1"/>
+          </a:effectRef>
+          <a:fontRef idx="minor">
+            <a:schemeClr val="lt1"/>
+          </a:fontRef>
+        </p:style>
+        <p:txBody>
+          <a:bodyPr rtlCol="0" anchor="ctr"/>
+          <a:lstStyle/>
+          <a:p>
+            <a:pPr algn="ctr"/>
+          </a:p>
+        </p:txBody>
+      </p:sp>
+      <p:sp>
+        <p:nvSpPr>
+          <p:cNvPr id="44" name="TextBox 43"/>
+          <p:cNvSpPr txBox="1"/>
+          <p:nvPr/>
+        </p:nvSpPr>
+        <p:spPr>
+          <a:xfrm>
+            <a:off x="7040880" y="5623560"/>
+            <a:ext cx="914400" cy="274320"/>
+          </a:xfrm>
+          <a:prstGeom prst="rect">
+            <a:avLst/>
+          </a:prstGeom>
+          <a:noFill/>
+        </p:spPr>
+        <p:txBody>
+          <a:bodyPr wrap="square" lIns="45720" rIns="45720" tIns="18288" bIns="18288" anchor="t">
+            <a:spAutoFit/>
+          </a:bodyPr>
+          <a:lstStyle/>
+          <a:p>
+            <a:pPr algn="ctr"/>
+            <a:r>
+              <a:rPr sz="1100" b="1" i="0">
+                <a:solidFill>
+                  <a:srgbClr val="333D4A"/>
+                </a:solidFill>
+                <a:latin typeface="Calibri"/>
+              </a:rPr>
+              <a:t>Call dfs(E)</a:t>
+            </a:r>
+          </a:p>
+        </p:txBody>
+      </p:sp>
+      <p:sp>
+        <p:nvSpPr>
+          <p:cNvPr id="45" name="TextBox 44"/>
+          <p:cNvSpPr txBox="1"/>
+          <p:nvPr/>
+        </p:nvSpPr>
+        <p:spPr>
+          <a:xfrm>
+            <a:off x="7955279" y="5623560"/>
+            <a:ext cx="1645920" cy="274320"/>
+          </a:xfrm>
+          <a:prstGeom prst="rect">
+            <a:avLst/>
+          </a:prstGeom>
+          <a:noFill/>
+        </p:spPr>
+        <p:txBody>
+          <a:bodyPr wrap="square" lIns="45720" rIns="45720" tIns="18288" bIns="18288" anchor="t">
+            <a:spAutoFit/>
+          </a:bodyPr>
+          <a:lstStyle/>
+          <a:p>
+            <a:pPr algn="ctr"/>
+            <a:r>
+              <a:rPr sz="1100" b="0" i="0">
+                <a:solidFill>
+                  <a:srgbClr val="333D4A"/>
+                </a:solidFill>
+                <a:latin typeface="Calibri"/>
+              </a:rPr>
+              <a:t>[dfs(A), dfs(C), dfs(E)]</a:t>
+            </a:r>
+          </a:p>
+        </p:txBody>
+      </p:sp>
+      <p:sp>
+        <p:nvSpPr>
+          <p:cNvPr id="46" name="TextBox 45"/>
+          <p:cNvSpPr txBox="1"/>
+          <p:nvPr/>
+        </p:nvSpPr>
+        <p:spPr>
+          <a:xfrm>
+            <a:off x="9601200" y="5623560"/>
+            <a:ext cx="1645920" cy="274320"/>
+          </a:xfrm>
+          <a:prstGeom prst="rect">
+            <a:avLst/>
+          </a:prstGeom>
+          <a:noFill/>
+        </p:spPr>
+        <p:txBody>
+          <a:bodyPr wrap="square" lIns="45720" rIns="45720" tIns="18288" bIns="18288" anchor="t">
+            <a:spAutoFit/>
+          </a:bodyPr>
+          <a:lstStyle/>
+          <a:p>
+            <a:pPr algn="ctr"/>
+            <a:r>
+              <a:rPr sz="1100" b="0" i="0">
+                <a:solidFill>
+                  <a:srgbClr val="333D4A"/>
+                </a:solidFill>
+                <a:latin typeface="Calibri"/>
+              </a:rPr>
+              <a:t>{'A', 'B', 'D', 'C', 'E'}</a:t>
             </a:r>
           </a:p>
         </p:txBody>
